--- a/Yanac_NKE.pptx
+++ b/Yanac_NKE.pptx
@@ -5,7 +5,7 @@
     <p:sldMasterId id="2147483708" r:id="rId1"/>
   </p:sldMasterIdLst>
   <p:notesMasterIdLst>
-    <p:notesMasterId r:id="rId11"/>
+    <p:notesMasterId r:id="rId15"/>
   </p:notesMasterIdLst>
   <p:sldIdLst>
     <p:sldId id="256" r:id="rId2"/>
@@ -15,8 +15,12 @@
     <p:sldId id="266" r:id="rId6"/>
     <p:sldId id="267" r:id="rId7"/>
     <p:sldId id="268" r:id="rId8"/>
-    <p:sldId id="269" r:id="rId9"/>
-    <p:sldId id="270" r:id="rId10"/>
+    <p:sldId id="273" r:id="rId9"/>
+    <p:sldId id="274" r:id="rId10"/>
+    <p:sldId id="271" r:id="rId11"/>
+    <p:sldId id="269" r:id="rId12"/>
+    <p:sldId id="272" r:id="rId13"/>
+    <p:sldId id="270" r:id="rId14"/>
   </p:sldIdLst>
   <p:sldSz cx="12192000" cy="6858000"/>
   <p:notesSz cx="6858000" cy="9144000"/>
@@ -169,8 +173,9 @@
             </a:pPr>
             <a:r>
               <a:rPr lang="hu-HU"/>
-              <a:t>APT CIKKEK</a:t>
-            </a:r>
+              <a:t>Kulcsszavak</a:t>
+            </a:r>
+            <a:endParaRPr lang="en-GB"/>
           </a:p>
         </c:rich>
       </c:tx>
@@ -199,7 +204,7 @@
               <a:cs typeface="+mn-cs"/>
             </a:defRPr>
           </a:pPr>
-          <a:endParaRPr lang="hu-HU"/>
+          <a:endParaRPr lang="en-GB"/>
         </a:p>
       </c:txPr>
     </c:title>
@@ -229,19 +234,19 @@
               <c:strCache>
                 <c:ptCount val="5"/>
                 <c:pt idx="0">
-                  <c:v>APT 28</c:v>
+                  <c:v>Oroszország</c:v>
                 </c:pt>
                 <c:pt idx="1">
-                  <c:v>APT 29</c:v>
+                  <c:v>Kína</c:v>
                 </c:pt>
                 <c:pt idx="2">
-                  <c:v>APT 31</c:v>
+                  <c:v>Ransomware</c:v>
                 </c:pt>
                 <c:pt idx="3">
-                  <c:v>APT 35</c:v>
+                  <c:v>AI</c:v>
                 </c:pt>
                 <c:pt idx="4">
-                  <c:v>APT 37</c:v>
+                  <c:v>USA</c:v>
                 </c:pt>
               </c:strCache>
             </c:strRef>
@@ -253,26 +258,26 @@
                 <c:formatCode>General</c:formatCode>
                 <c:ptCount val="5"/>
                 <c:pt idx="0">
-                  <c:v>40</c:v>
+                  <c:v>232</c:v>
                 </c:pt>
                 <c:pt idx="1">
-                  <c:v>43</c:v>
+                  <c:v>223</c:v>
                 </c:pt>
                 <c:pt idx="2">
-                  <c:v>31</c:v>
+                  <c:v>177</c:v>
                 </c:pt>
                 <c:pt idx="3">
-                  <c:v>15</c:v>
+                  <c:v>177</c:v>
                 </c:pt>
                 <c:pt idx="4">
-                  <c:v>10</c:v>
+                  <c:v>128</c:v>
                 </c:pt>
               </c:numCache>
             </c:numRef>
           </c:val>
           <c:extLst>
             <c:ext xmlns:c16="http://schemas.microsoft.com/office/drawing/2014/chart" uri="{C3380CC4-5D6E-409C-BE32-E72D297353CC}">
-              <c16:uniqueId val="{00000000-034D-423D-A88B-839C47B294B5}"/>
+              <c16:uniqueId val="{00000000-51BA-41DC-925D-19F9741450BB}"/>
             </c:ext>
           </c:extLst>
         </c:ser>
@@ -286,11 +291,11 @@
         </c:dLbls>
         <c:gapWidth val="219"/>
         <c:overlap val="-27"/>
-        <c:axId val="1516635968"/>
-        <c:axId val="1516631168"/>
+        <c:axId val="909430479"/>
+        <c:axId val="909441039"/>
       </c:barChart>
       <c:catAx>
-        <c:axId val="1516635968"/>
+        <c:axId val="909430479"/>
         <c:scaling>
           <c:orientation val="minMax"/>
         </c:scaling>
@@ -301,9 +306,7 @@
         <c:minorTickMark val="none"/>
         <c:tickLblPos val="nextTo"/>
         <c:spPr>
-          <a:solidFill>
-            <a:schemeClr val="bg1"/>
-          </a:solidFill>
+          <a:noFill/>
           <a:ln w="9525" cap="flat" cmpd="sng" algn="ctr">
             <a:solidFill>
               <a:schemeClr val="tx1">
@@ -322,17 +325,20 @@
             <a:pPr>
               <a:defRPr sz="900" b="0" i="0" u="none" strike="noStrike" kern="1200" baseline="0">
                 <a:solidFill>
-                  <a:schemeClr val="tx1"/>
+                  <a:schemeClr val="tx1">
+                    <a:lumMod val="65000"/>
+                    <a:lumOff val="35000"/>
+                  </a:schemeClr>
                 </a:solidFill>
                 <a:latin typeface="+mn-lt"/>
                 <a:ea typeface="+mn-ea"/>
                 <a:cs typeface="+mn-cs"/>
               </a:defRPr>
             </a:pPr>
-            <a:endParaRPr lang="hu-HU"/>
+            <a:endParaRPr lang="en-US"/>
           </a:p>
         </c:txPr>
-        <c:crossAx val="1516631168"/>
+        <c:crossAx val="909441039"/>
         <c:crosses val="autoZero"/>
         <c:auto val="1"/>
         <c:lblAlgn val="ctr"/>
@@ -340,7 +346,7 @@
         <c:noMultiLvlLbl val="0"/>
       </c:catAx>
       <c:valAx>
-        <c:axId val="1516631168"/>
+        <c:axId val="909441039"/>
         <c:scaling>
           <c:orientation val="minMax"/>
         </c:scaling>
@@ -388,10 +394,321 @@
                 <a:cs typeface="+mn-cs"/>
               </a:defRPr>
             </a:pPr>
-            <a:endParaRPr lang="hu-HU"/>
+            <a:endParaRPr lang="en-US"/>
           </a:p>
         </c:txPr>
-        <c:crossAx val="1516635968"/>
+        <c:crossAx val="909430479"/>
+        <c:crosses val="autoZero"/>
+        <c:crossBetween val="between"/>
+      </c:valAx>
+      <c:spPr>
+        <a:noFill/>
+        <a:ln>
+          <a:noFill/>
+        </a:ln>
+        <a:effectLst/>
+      </c:spPr>
+    </c:plotArea>
+    <c:plotVisOnly val="1"/>
+    <c:dispBlanksAs val="gap"/>
+    <c:showDLblsOverMax val="0"/>
+    <c:extLst>
+      <c:ext xmlns:c16r3="http://schemas.microsoft.com/office/drawing/2017/03/chart" uri="{56B9EC1D-385E-4148-901F-78D8002777C0}">
+        <c16r3:dataDisplayOptions16>
+          <c16r3:dispNaAsBlank val="1"/>
+        </c16r3:dataDisplayOptions16>
+      </c:ext>
+    </c:extLst>
+  </c:chart>
+  <c:spPr>
+    <a:noFill/>
+    <a:ln w="9525" cap="flat" cmpd="sng" algn="ctr">
+      <a:solidFill>
+        <a:schemeClr val="tx1">
+          <a:lumMod val="15000"/>
+          <a:lumOff val="85000"/>
+        </a:schemeClr>
+      </a:solidFill>
+      <a:round/>
+    </a:ln>
+    <a:effectLst/>
+  </c:spPr>
+  <c:txPr>
+    <a:bodyPr/>
+    <a:lstStyle/>
+    <a:p>
+      <a:pPr>
+        <a:defRPr/>
+      </a:pPr>
+      <a:endParaRPr lang="en-US"/>
+    </a:p>
+  </c:txPr>
+  <c:externalData r:id="rId3">
+    <c:autoUpdate val="0"/>
+  </c:externalData>
+</c:chartSpace>
+</file>
+
+<file path=ppt/charts/chart2.xml><?xml version="1.0" encoding="utf-8"?>
+<c:chartSpace xmlns:c="http://schemas.openxmlformats.org/drawingml/2006/chart" xmlns:a="http://schemas.openxmlformats.org/drawingml/2006/main" xmlns:r="http://schemas.openxmlformats.org/officeDocument/2006/relationships" xmlns:c16r2="http://schemas.microsoft.com/office/drawing/2015/06/chart">
+  <c:date1904 val="0"/>
+  <c:lang val="en-GB"/>
+  <c:roundedCorners val="0"/>
+  <mc:AlternateContent xmlns:mc="http://schemas.openxmlformats.org/markup-compatibility/2006">
+    <mc:Choice xmlns:c14="http://schemas.microsoft.com/office/drawing/2007/8/2/chart" Requires="c14">
+      <c14:style val="102"/>
+    </mc:Choice>
+    <mc:Fallback>
+      <c:style val="2"/>
+    </mc:Fallback>
+  </mc:AlternateContent>
+  <c:chart>
+    <c:title>
+      <c:tx>
+        <c:rich>
+          <a:bodyPr rot="0" spcFirstLastPara="1" vertOverflow="ellipsis" vert="horz" wrap="square" anchor="ctr" anchorCtr="1"/>
+          <a:lstStyle/>
+          <a:p>
+            <a:pPr>
+              <a:defRPr sz="1400" b="0" i="0" u="none" strike="noStrike" kern="1200" spc="0" baseline="0">
+                <a:solidFill>
+                  <a:schemeClr val="tx1">
+                    <a:lumMod val="65000"/>
+                    <a:lumOff val="35000"/>
+                  </a:schemeClr>
+                </a:solidFill>
+                <a:latin typeface="+mn-lt"/>
+                <a:ea typeface="+mn-ea"/>
+                <a:cs typeface="+mn-cs"/>
+              </a:defRPr>
+            </a:pPr>
+            <a:r>
+              <a:rPr lang="hu-HU"/>
+              <a:t>APT Csoportok</a:t>
+            </a:r>
+            <a:endParaRPr lang="en-GB"/>
+          </a:p>
+        </c:rich>
+      </c:tx>
+      <c:overlay val="0"/>
+      <c:spPr>
+        <a:noFill/>
+        <a:ln>
+          <a:noFill/>
+        </a:ln>
+        <a:effectLst/>
+      </c:spPr>
+      <c:txPr>
+        <a:bodyPr rot="0" spcFirstLastPara="1" vertOverflow="ellipsis" vert="horz" wrap="square" anchor="ctr" anchorCtr="1"/>
+        <a:lstStyle/>
+        <a:p>
+          <a:pPr>
+            <a:defRPr sz="1400" b="0" i="0" u="none" strike="noStrike" kern="1200" spc="0" baseline="0">
+              <a:solidFill>
+                <a:schemeClr val="tx1">
+                  <a:lumMod val="65000"/>
+                  <a:lumOff val="35000"/>
+                </a:schemeClr>
+              </a:solidFill>
+              <a:latin typeface="+mn-lt"/>
+              <a:ea typeface="+mn-ea"/>
+              <a:cs typeface="+mn-cs"/>
+            </a:defRPr>
+          </a:pPr>
+          <a:endParaRPr lang="en-GB"/>
+        </a:p>
+      </c:txPr>
+    </c:title>
+    <c:autoTitleDeleted val="0"/>
+    <c:plotArea>
+      <c:layout/>
+      <c:barChart>
+        <c:barDir val="col"/>
+        <c:grouping val="clustered"/>
+        <c:varyColors val="0"/>
+        <c:ser>
+          <c:idx val="0"/>
+          <c:order val="0"/>
+          <c:spPr>
+            <a:solidFill>
+              <a:srgbClr val="FF3F5A"/>
+            </a:solidFill>
+            <a:ln>
+              <a:noFill/>
+            </a:ln>
+            <a:effectLst/>
+          </c:spPr>
+          <c:invertIfNegative val="0"/>
+          <c:cat>
+            <c:strRef>
+              <c:f>Sheet1!$A$38:$A$42</c:f>
+              <c:strCache>
+                <c:ptCount val="5"/>
+                <c:pt idx="0">
+                  <c:v>APT28</c:v>
+                </c:pt>
+                <c:pt idx="1">
+                  <c:v>APT43</c:v>
+                </c:pt>
+                <c:pt idx="2">
+                  <c:v>APT29</c:v>
+                </c:pt>
+                <c:pt idx="3">
+                  <c:v>APT41</c:v>
+                </c:pt>
+                <c:pt idx="4">
+                  <c:v>APT31</c:v>
+                </c:pt>
+              </c:strCache>
+            </c:strRef>
+          </c:cat>
+          <c:val>
+            <c:numRef>
+              <c:f>Sheet1!$B$38:$B$42</c:f>
+              <c:numCache>
+                <c:formatCode>General</c:formatCode>
+                <c:ptCount val="5"/>
+                <c:pt idx="0">
+                  <c:v>52</c:v>
+                </c:pt>
+                <c:pt idx="1">
+                  <c:v>26</c:v>
+                </c:pt>
+                <c:pt idx="2">
+                  <c:v>24</c:v>
+                </c:pt>
+                <c:pt idx="3">
+                  <c:v>14</c:v>
+                </c:pt>
+                <c:pt idx="4">
+                  <c:v>9</c:v>
+                </c:pt>
+              </c:numCache>
+            </c:numRef>
+          </c:val>
+          <c:extLst>
+            <c:ext xmlns:c16="http://schemas.microsoft.com/office/drawing/2014/chart" uri="{C3380CC4-5D6E-409C-BE32-E72D297353CC}">
+              <c16:uniqueId val="{00000000-EC72-49A6-AFD1-E5493E9F143E}"/>
+            </c:ext>
+          </c:extLst>
+        </c:ser>
+        <c:dLbls>
+          <c:showLegendKey val="0"/>
+          <c:showVal val="0"/>
+          <c:showCatName val="0"/>
+          <c:showSerName val="0"/>
+          <c:showPercent val="0"/>
+          <c:showBubbleSize val="0"/>
+        </c:dLbls>
+        <c:gapWidth val="219"/>
+        <c:overlap val="-27"/>
+        <c:axId val="793182063"/>
+        <c:axId val="793179663"/>
+      </c:barChart>
+      <c:catAx>
+        <c:axId val="793182063"/>
+        <c:scaling>
+          <c:orientation val="minMax"/>
+        </c:scaling>
+        <c:delete val="0"/>
+        <c:axPos val="b"/>
+        <c:numFmt formatCode="General" sourceLinked="1"/>
+        <c:majorTickMark val="none"/>
+        <c:minorTickMark val="none"/>
+        <c:tickLblPos val="nextTo"/>
+        <c:spPr>
+          <a:noFill/>
+          <a:ln w="9525" cap="flat" cmpd="sng" algn="ctr">
+            <a:solidFill>
+              <a:schemeClr val="tx1">
+                <a:lumMod val="15000"/>
+                <a:lumOff val="85000"/>
+              </a:schemeClr>
+            </a:solidFill>
+            <a:round/>
+          </a:ln>
+          <a:effectLst/>
+        </c:spPr>
+        <c:txPr>
+          <a:bodyPr rot="-60000000" spcFirstLastPara="1" vertOverflow="ellipsis" vert="horz" wrap="square" anchor="ctr" anchorCtr="1"/>
+          <a:lstStyle/>
+          <a:p>
+            <a:pPr>
+              <a:defRPr sz="900" b="0" i="0" u="none" strike="noStrike" kern="1200" baseline="0">
+                <a:solidFill>
+                  <a:schemeClr val="tx1">
+                    <a:lumMod val="65000"/>
+                    <a:lumOff val="35000"/>
+                  </a:schemeClr>
+                </a:solidFill>
+                <a:latin typeface="+mn-lt"/>
+                <a:ea typeface="+mn-ea"/>
+                <a:cs typeface="+mn-cs"/>
+              </a:defRPr>
+            </a:pPr>
+            <a:endParaRPr lang="en-US"/>
+          </a:p>
+        </c:txPr>
+        <c:crossAx val="793179663"/>
+        <c:crosses val="autoZero"/>
+        <c:auto val="1"/>
+        <c:lblAlgn val="ctr"/>
+        <c:lblOffset val="100"/>
+        <c:noMultiLvlLbl val="0"/>
+      </c:catAx>
+      <c:valAx>
+        <c:axId val="793179663"/>
+        <c:scaling>
+          <c:orientation val="minMax"/>
+        </c:scaling>
+        <c:delete val="0"/>
+        <c:axPos val="l"/>
+        <c:majorGridlines>
+          <c:spPr>
+            <a:ln w="9525" cap="flat" cmpd="sng" algn="ctr">
+              <a:solidFill>
+                <a:schemeClr val="tx1">
+                  <a:lumMod val="15000"/>
+                  <a:lumOff val="85000"/>
+                </a:schemeClr>
+              </a:solidFill>
+              <a:round/>
+            </a:ln>
+            <a:effectLst/>
+          </c:spPr>
+        </c:majorGridlines>
+        <c:numFmt formatCode="General" sourceLinked="1"/>
+        <c:majorTickMark val="none"/>
+        <c:minorTickMark val="none"/>
+        <c:tickLblPos val="nextTo"/>
+        <c:spPr>
+          <a:noFill/>
+          <a:ln>
+            <a:noFill/>
+          </a:ln>
+          <a:effectLst/>
+        </c:spPr>
+        <c:txPr>
+          <a:bodyPr rot="-60000000" spcFirstLastPara="1" vertOverflow="ellipsis" vert="horz" wrap="square" anchor="ctr" anchorCtr="1"/>
+          <a:lstStyle/>
+          <a:p>
+            <a:pPr>
+              <a:defRPr sz="900" b="0" i="0" u="none" strike="noStrike" kern="1200" baseline="0">
+                <a:solidFill>
+                  <a:schemeClr val="tx1">
+                    <a:lumMod val="65000"/>
+                    <a:lumOff val="35000"/>
+                  </a:schemeClr>
+                </a:solidFill>
+                <a:latin typeface="+mn-lt"/>
+                <a:ea typeface="+mn-ea"/>
+                <a:cs typeface="+mn-cs"/>
+              </a:defRPr>
+            </a:pPr>
+            <a:endParaRPr lang="en-US"/>
+          </a:p>
+        </c:txPr>
+        <c:crossAx val="793182063"/>
         <c:crosses val="autoZero"/>
         <c:crossBetween val="between"/>
       </c:valAx>
@@ -428,7 +745,7 @@
       <a:pPr>
         <a:defRPr/>
       </a:pPr>
-      <a:endParaRPr lang="hu-HU"/>
+      <a:endParaRPr lang="en-US"/>
     </a:p>
   </c:txPr>
   <c:externalData r:id="rId3">
@@ -437,7 +754,7 @@
 </c:chartSpace>
 </file>
 
-<file path=ppt/charts/chart2.xml><?xml version="1.0" encoding="utf-8"?>
+<file path=ppt/charts/chart3.xml><?xml version="1.0" encoding="utf-8"?>
 <c:chartSpace xmlns:c="http://schemas.openxmlformats.org/drawingml/2006/chart" xmlns:a="http://schemas.openxmlformats.org/drawingml/2006/main" xmlns:r="http://schemas.openxmlformats.org/officeDocument/2006/relationships" xmlns:c16r2="http://schemas.microsoft.com/office/drawing/2015/06/chart">
   <c:date1904 val="0"/>
   <c:lang val="en-GB"/>
@@ -472,11 +789,24 @@
             </a:pPr>
             <a:r>
               <a:rPr lang="hu-HU"/>
-              <a:t>KULCSSZAVAK</a:t>
-            </a:r>
+              <a:t>Legolvasottab</a:t>
+            </a:r>
+            <a:r>
+              <a:rPr lang="hu-HU" baseline="0"/>
+              <a:t> cikkek</a:t>
+            </a:r>
+            <a:endParaRPr lang="en-GB"/>
           </a:p>
         </c:rich>
       </c:tx>
+      <c:layout>
+        <c:manualLayout>
+          <c:xMode val="edge"/>
+          <c:yMode val="edge"/>
+          <c:x val="0"/>
+          <c:y val="0"/>
+        </c:manualLayout>
+      </c:layout>
       <c:overlay val="0"/>
       <c:spPr>
         <a:noFill/>
@@ -502,7 +832,7 @@
               <a:cs typeface="+mn-cs"/>
             </a:defRPr>
           </a:pPr>
-          <a:endParaRPr lang="hu-HU"/>
+          <a:endParaRPr lang="en-GB"/>
         </a:p>
       </c:txPr>
     </c:title>
@@ -528,60 +858,54 @@
           <c:invertIfNegative val="0"/>
           <c:cat>
             <c:strRef>
-              <c:f>Sheet1!$A$10:$A$15</c:f>
+              <c:f>Sheet1!$A$1:$A$5</c:f>
               <c:strCache>
-                <c:ptCount val="6"/>
+                <c:ptCount val="5"/>
                 <c:pt idx="0">
-                  <c:v>KÍNA</c:v>
+                  <c:v>Editors’ Pick</c:v>
                 </c:pt>
                 <c:pt idx="1">
-                  <c:v>OROSZORSZÁG / OROSZ</c:v>
+                  <c:v>Kínai offenzív kiberképzésekkel kapcsolatos adatszivárgás</c:v>
                 </c:pt>
                 <c:pt idx="2">
-                  <c:v>KOREA</c:v>
+                  <c:v>Orosz kémhálózat Argentínában</c:v>
                 </c:pt>
                 <c:pt idx="3">
-                  <c:v>CISA</c:v>
+                  <c:v>70 000 kormányzati ID kompromittálódott a Discord incidensben</c:v>
                 </c:pt>
                 <c:pt idx="4">
-                  <c:v>MAGYAR</c:v>
-                </c:pt>
-                <c:pt idx="5">
-                  <c:v>ENISA</c:v>
+                  <c:v>Elindult az Európai Sérülékenységi Adatbázis (EUVD)</c:v>
                 </c:pt>
               </c:strCache>
             </c:strRef>
           </c:cat>
           <c:val>
             <c:numRef>
-              <c:f>Sheet1!$B$10:$B$15</c:f>
+              <c:f>Sheet1!$B$1:$B$5</c:f>
               <c:numCache>
                 <c:formatCode>General</c:formatCode>
-                <c:ptCount val="6"/>
+                <c:ptCount val="5"/>
                 <c:pt idx="0">
-                  <c:v>525</c:v>
+                  <c:v>618</c:v>
                 </c:pt>
                 <c:pt idx="1">
-                  <c:v>560</c:v>
+                  <c:v>329</c:v>
                 </c:pt>
                 <c:pt idx="2">
-                  <c:v>128</c:v>
+                  <c:v>237</c:v>
                 </c:pt>
                 <c:pt idx="3">
-                  <c:v>204</c:v>
+                  <c:v>214</c:v>
                 </c:pt>
                 <c:pt idx="4">
-                  <c:v>102</c:v>
-                </c:pt>
-                <c:pt idx="5">
-                  <c:v>51</c:v>
+                  <c:v>147</c:v>
                 </c:pt>
               </c:numCache>
             </c:numRef>
           </c:val>
           <c:extLst>
             <c:ext xmlns:c16="http://schemas.microsoft.com/office/drawing/2014/chart" uri="{C3380CC4-5D6E-409C-BE32-E72D297353CC}">
-              <c16:uniqueId val="{00000000-07BD-4F76-8344-DB0595A0B27F}"/>
+              <c16:uniqueId val="{00000000-1757-4512-B002-1D4FCF1C5846}"/>
             </c:ext>
           </c:extLst>
         </c:ser>
@@ -595,11 +919,11 @@
         </c:dLbls>
         <c:gapWidth val="219"/>
         <c:overlap val="-27"/>
-        <c:axId val="1443998656"/>
-        <c:axId val="1444004416"/>
+        <c:axId val="335860479"/>
+        <c:axId val="335854719"/>
       </c:barChart>
       <c:catAx>
-        <c:axId val="1443998656"/>
+        <c:axId val="335860479"/>
         <c:scaling>
           <c:orientation val="minMax"/>
         </c:scaling>
@@ -610,9 +934,7 @@
         <c:minorTickMark val="none"/>
         <c:tickLblPos val="nextTo"/>
         <c:spPr>
-          <a:solidFill>
-            <a:schemeClr val="bg1"/>
-          </a:solidFill>
+          <a:noFill/>
           <a:ln w="9525" cap="flat" cmpd="sng" algn="ctr">
             <a:solidFill>
               <a:schemeClr val="tx1">
@@ -631,20 +953,20 @@
             <a:pPr>
               <a:defRPr sz="900" b="0" i="0" u="none" strike="noStrike" kern="1200" baseline="0">
                 <a:solidFill>
-                  <a:schemeClr val="tx1"/>
+                  <a:schemeClr val="tx1">
+                    <a:lumMod val="65000"/>
+                    <a:lumOff val="35000"/>
+                  </a:schemeClr>
                 </a:solidFill>
-                <a:highlight>
-                  <a:srgbClr val="000000"/>
-                </a:highlight>
                 <a:latin typeface="+mn-lt"/>
                 <a:ea typeface="+mn-ea"/>
                 <a:cs typeface="+mn-cs"/>
               </a:defRPr>
             </a:pPr>
-            <a:endParaRPr lang="hu-HU"/>
+            <a:endParaRPr lang="en-US"/>
           </a:p>
         </c:txPr>
-        <c:crossAx val="1444004416"/>
+        <c:crossAx val="335854719"/>
         <c:crosses val="autoZero"/>
         <c:auto val="1"/>
         <c:lblAlgn val="ctr"/>
@@ -652,7 +974,7 @@
         <c:noMultiLvlLbl val="0"/>
       </c:catAx>
       <c:valAx>
-        <c:axId val="1444004416"/>
+        <c:axId val="335854719"/>
         <c:scaling>
           <c:orientation val="minMax"/>
         </c:scaling>
@@ -700,10 +1022,10 @@
                 <a:cs typeface="+mn-cs"/>
               </a:defRPr>
             </a:pPr>
-            <a:endParaRPr lang="hu-HU"/>
+            <a:endParaRPr lang="en-US"/>
           </a:p>
         </c:txPr>
-        <c:crossAx val="1443998656"/>
+        <c:crossAx val="335860479"/>
         <c:crosses val="autoZero"/>
         <c:crossBetween val="between"/>
       </c:valAx>
@@ -740,7 +1062,300 @@
       <a:pPr>
         <a:defRPr/>
       </a:pPr>
-      <a:endParaRPr lang="hu-HU"/>
+      <a:endParaRPr lang="en-US"/>
+    </a:p>
+  </c:txPr>
+  <c:externalData r:id="rId3">
+    <c:autoUpdate val="0"/>
+  </c:externalData>
+</c:chartSpace>
+</file>
+
+<file path=ppt/charts/chart4.xml><?xml version="1.0" encoding="utf-8"?>
+<c:chartSpace xmlns:c="http://schemas.openxmlformats.org/drawingml/2006/chart" xmlns:a="http://schemas.openxmlformats.org/drawingml/2006/main" xmlns:r="http://schemas.openxmlformats.org/officeDocument/2006/relationships" xmlns:c16r2="http://schemas.microsoft.com/office/drawing/2015/06/chart">
+  <c:date1904 val="0"/>
+  <c:lang val="en-GB"/>
+  <c:roundedCorners val="0"/>
+  <mc:AlternateContent xmlns:mc="http://schemas.openxmlformats.org/markup-compatibility/2006">
+    <mc:Choice xmlns:c14="http://schemas.microsoft.com/office/drawing/2007/8/2/chart" Requires="c14">
+      <c14:style val="102"/>
+    </mc:Choice>
+    <mc:Fallback>
+      <c:style val="2"/>
+    </mc:Fallback>
+  </mc:AlternateContent>
+  <c:chart>
+    <c:title>
+      <c:tx>
+        <c:rich>
+          <a:bodyPr rot="0" spcFirstLastPara="1" vertOverflow="ellipsis" vert="horz" wrap="square" anchor="ctr" anchorCtr="1"/>
+          <a:lstStyle/>
+          <a:p>
+            <a:pPr>
+              <a:defRPr sz="1400" b="0" i="0" u="none" strike="noStrike" kern="1200" spc="0" baseline="0">
+                <a:solidFill>
+                  <a:schemeClr val="tx1">
+                    <a:lumMod val="65000"/>
+                    <a:lumOff val="35000"/>
+                  </a:schemeClr>
+                </a:solidFill>
+                <a:latin typeface="+mn-lt"/>
+                <a:ea typeface="+mn-ea"/>
+                <a:cs typeface="+mn-cs"/>
+              </a:defRPr>
+            </a:pPr>
+            <a:r>
+              <a:rPr lang="hu-HU"/>
+              <a:t>Aggregált tartalom</a:t>
+            </a:r>
+            <a:endParaRPr lang="en-GB"/>
+          </a:p>
+        </c:rich>
+      </c:tx>
+      <c:overlay val="0"/>
+      <c:spPr>
+        <a:noFill/>
+        <a:ln>
+          <a:noFill/>
+        </a:ln>
+        <a:effectLst/>
+      </c:spPr>
+      <c:txPr>
+        <a:bodyPr rot="0" spcFirstLastPara="1" vertOverflow="ellipsis" vert="horz" wrap="square" anchor="ctr" anchorCtr="1"/>
+        <a:lstStyle/>
+        <a:p>
+          <a:pPr>
+            <a:defRPr sz="1400" b="0" i="0" u="none" strike="noStrike" kern="1200" spc="0" baseline="0">
+              <a:solidFill>
+                <a:schemeClr val="tx1">
+                  <a:lumMod val="65000"/>
+                  <a:lumOff val="35000"/>
+                </a:schemeClr>
+              </a:solidFill>
+              <a:latin typeface="+mn-lt"/>
+              <a:ea typeface="+mn-ea"/>
+              <a:cs typeface="+mn-cs"/>
+            </a:defRPr>
+          </a:pPr>
+          <a:endParaRPr lang="en-GB"/>
+        </a:p>
+      </c:txPr>
+    </c:title>
+    <c:autoTitleDeleted val="0"/>
+    <c:plotArea>
+      <c:layout/>
+      <c:barChart>
+        <c:barDir val="col"/>
+        <c:grouping val="clustered"/>
+        <c:varyColors val="0"/>
+        <c:ser>
+          <c:idx val="0"/>
+          <c:order val="0"/>
+          <c:spPr>
+            <a:solidFill>
+              <a:srgbClr val="FF3F5A"/>
+            </a:solidFill>
+            <a:ln>
+              <a:noFill/>
+            </a:ln>
+            <a:effectLst/>
+          </c:spPr>
+          <c:invertIfNegative val="0"/>
+          <c:cat>
+            <c:strRef>
+              <c:f>Sheet1!$A$30:$A$32</c:f>
+              <c:strCache>
+                <c:ptCount val="3"/>
+                <c:pt idx="0">
+                  <c:v>Security</c:v>
+                </c:pt>
+                <c:pt idx="1">
+                  <c:v>Vulns</c:v>
+                </c:pt>
+                <c:pt idx="2">
+                  <c:v>News</c:v>
+                </c:pt>
+              </c:strCache>
+            </c:strRef>
+          </c:cat>
+          <c:val>
+            <c:numRef>
+              <c:f>Sheet1!$B$30:$B$32</c:f>
+              <c:numCache>
+                <c:formatCode>General</c:formatCode>
+                <c:ptCount val="3"/>
+                <c:pt idx="0">
+                  <c:v>8822</c:v>
+                </c:pt>
+                <c:pt idx="1">
+                  <c:v>8675</c:v>
+                </c:pt>
+                <c:pt idx="2">
+                  <c:v>6288</c:v>
+                </c:pt>
+              </c:numCache>
+            </c:numRef>
+          </c:val>
+          <c:extLst>
+            <c:ext xmlns:c16="http://schemas.microsoft.com/office/drawing/2014/chart" uri="{C3380CC4-5D6E-409C-BE32-E72D297353CC}">
+              <c16:uniqueId val="{00000000-1B2A-40D4-8A48-D98228031ECB}"/>
+            </c:ext>
+          </c:extLst>
+        </c:ser>
+        <c:dLbls>
+          <c:showLegendKey val="0"/>
+          <c:showVal val="0"/>
+          <c:showCatName val="0"/>
+          <c:showSerName val="0"/>
+          <c:showPercent val="0"/>
+          <c:showBubbleSize val="0"/>
+        </c:dLbls>
+        <c:gapWidth val="219"/>
+        <c:overlap val="-27"/>
+        <c:axId val="519679343"/>
+        <c:axId val="519682223"/>
+      </c:barChart>
+      <c:catAx>
+        <c:axId val="519679343"/>
+        <c:scaling>
+          <c:orientation val="minMax"/>
+        </c:scaling>
+        <c:delete val="0"/>
+        <c:axPos val="b"/>
+        <c:numFmt formatCode="General" sourceLinked="1"/>
+        <c:majorTickMark val="none"/>
+        <c:minorTickMark val="none"/>
+        <c:tickLblPos val="nextTo"/>
+        <c:spPr>
+          <a:noFill/>
+          <a:ln w="9525" cap="flat" cmpd="sng" algn="ctr">
+            <a:solidFill>
+              <a:schemeClr val="tx1">
+                <a:lumMod val="15000"/>
+                <a:lumOff val="85000"/>
+              </a:schemeClr>
+            </a:solidFill>
+            <a:round/>
+          </a:ln>
+          <a:effectLst/>
+        </c:spPr>
+        <c:txPr>
+          <a:bodyPr rot="-60000000" spcFirstLastPara="1" vertOverflow="ellipsis" vert="horz" wrap="square" anchor="ctr" anchorCtr="1"/>
+          <a:lstStyle/>
+          <a:p>
+            <a:pPr>
+              <a:defRPr sz="900" b="0" i="0" u="none" strike="noStrike" kern="1200" baseline="0">
+                <a:solidFill>
+                  <a:schemeClr val="tx1">
+                    <a:lumMod val="65000"/>
+                    <a:lumOff val="35000"/>
+                  </a:schemeClr>
+                </a:solidFill>
+                <a:latin typeface="+mn-lt"/>
+                <a:ea typeface="+mn-ea"/>
+                <a:cs typeface="+mn-cs"/>
+              </a:defRPr>
+            </a:pPr>
+            <a:endParaRPr lang="en-US"/>
+          </a:p>
+        </c:txPr>
+        <c:crossAx val="519682223"/>
+        <c:crosses val="autoZero"/>
+        <c:auto val="1"/>
+        <c:lblAlgn val="ctr"/>
+        <c:lblOffset val="100"/>
+        <c:noMultiLvlLbl val="0"/>
+      </c:catAx>
+      <c:valAx>
+        <c:axId val="519682223"/>
+        <c:scaling>
+          <c:orientation val="minMax"/>
+        </c:scaling>
+        <c:delete val="0"/>
+        <c:axPos val="l"/>
+        <c:majorGridlines>
+          <c:spPr>
+            <a:ln w="9525" cap="flat" cmpd="sng" algn="ctr">
+              <a:solidFill>
+                <a:schemeClr val="tx1">
+                  <a:lumMod val="15000"/>
+                  <a:lumOff val="85000"/>
+                </a:schemeClr>
+              </a:solidFill>
+              <a:round/>
+            </a:ln>
+            <a:effectLst/>
+          </c:spPr>
+        </c:majorGridlines>
+        <c:numFmt formatCode="General" sourceLinked="1"/>
+        <c:majorTickMark val="none"/>
+        <c:minorTickMark val="none"/>
+        <c:tickLblPos val="nextTo"/>
+        <c:spPr>
+          <a:noFill/>
+          <a:ln>
+            <a:noFill/>
+          </a:ln>
+          <a:effectLst/>
+        </c:spPr>
+        <c:txPr>
+          <a:bodyPr rot="-60000000" spcFirstLastPara="1" vertOverflow="ellipsis" vert="horz" wrap="square" anchor="ctr" anchorCtr="1"/>
+          <a:lstStyle/>
+          <a:p>
+            <a:pPr>
+              <a:defRPr sz="900" b="0" i="0" u="none" strike="noStrike" kern="1200" baseline="0">
+                <a:solidFill>
+                  <a:schemeClr val="tx1">
+                    <a:lumMod val="65000"/>
+                    <a:lumOff val="35000"/>
+                  </a:schemeClr>
+                </a:solidFill>
+                <a:latin typeface="+mn-lt"/>
+                <a:ea typeface="+mn-ea"/>
+                <a:cs typeface="+mn-cs"/>
+              </a:defRPr>
+            </a:pPr>
+            <a:endParaRPr lang="en-US"/>
+          </a:p>
+        </c:txPr>
+        <c:crossAx val="519679343"/>
+        <c:crosses val="autoZero"/>
+        <c:crossBetween val="between"/>
+      </c:valAx>
+      <c:spPr>
+        <a:noFill/>
+        <a:ln>
+          <a:noFill/>
+        </a:ln>
+        <a:effectLst/>
+      </c:spPr>
+    </c:plotArea>
+    <c:plotVisOnly val="1"/>
+    <c:dispBlanksAs val="gap"/>
+    <c:showDLblsOverMax val="0"/>
+    <c:extLst>
+      <c:ext xmlns:c16r3="http://schemas.microsoft.com/office/drawing/2017/03/chart" uri="{56B9EC1D-385E-4148-901F-78D8002777C0}">
+        <c16r3:dataDisplayOptions16>
+          <c16r3:dispNaAsBlank val="1"/>
+        </c16r3:dataDisplayOptions16>
+      </c:ext>
+    </c:extLst>
+  </c:chart>
+  <c:spPr>
+    <a:noFill/>
+    <a:ln>
+      <a:noFill/>
+    </a:ln>
+    <a:effectLst/>
+  </c:spPr>
+  <c:txPr>
+    <a:bodyPr/>
+    <a:lstStyle/>
+    <a:p>
+      <a:pPr>
+        <a:defRPr/>
+      </a:pPr>
+      <a:endParaRPr lang="en-US"/>
     </a:p>
   </c:txPr>
   <c:externalData r:id="rId3">
@@ -790,6 +1405,86 @@
 </file>
 
 <file path=ppt/charts/colors2.xml><?xml version="1.0" encoding="utf-8"?>
+<cs:colorStyle xmlns:cs="http://schemas.microsoft.com/office/drawing/2012/chartStyle" xmlns:a="http://schemas.openxmlformats.org/drawingml/2006/main" meth="cycle" id="10">
+  <a:schemeClr val="accent1"/>
+  <a:schemeClr val="accent2"/>
+  <a:schemeClr val="accent3"/>
+  <a:schemeClr val="accent4"/>
+  <a:schemeClr val="accent5"/>
+  <a:schemeClr val="accent6"/>
+  <cs:variation/>
+  <cs:variation>
+    <a:lumMod val="60000"/>
+  </cs:variation>
+  <cs:variation>
+    <a:lumMod val="80000"/>
+    <a:lumOff val="20000"/>
+  </cs:variation>
+  <cs:variation>
+    <a:lumMod val="80000"/>
+  </cs:variation>
+  <cs:variation>
+    <a:lumMod val="60000"/>
+    <a:lumOff val="40000"/>
+  </cs:variation>
+  <cs:variation>
+    <a:lumMod val="50000"/>
+  </cs:variation>
+  <cs:variation>
+    <a:lumMod val="70000"/>
+    <a:lumOff val="30000"/>
+  </cs:variation>
+  <cs:variation>
+    <a:lumMod val="70000"/>
+  </cs:variation>
+  <cs:variation>
+    <a:lumMod val="50000"/>
+    <a:lumOff val="50000"/>
+  </cs:variation>
+</cs:colorStyle>
+</file>
+
+<file path=ppt/charts/colors3.xml><?xml version="1.0" encoding="utf-8"?>
+<cs:colorStyle xmlns:cs="http://schemas.microsoft.com/office/drawing/2012/chartStyle" xmlns:a="http://schemas.openxmlformats.org/drawingml/2006/main" meth="cycle" id="10">
+  <a:schemeClr val="accent1"/>
+  <a:schemeClr val="accent2"/>
+  <a:schemeClr val="accent3"/>
+  <a:schemeClr val="accent4"/>
+  <a:schemeClr val="accent5"/>
+  <a:schemeClr val="accent6"/>
+  <cs:variation/>
+  <cs:variation>
+    <a:lumMod val="60000"/>
+  </cs:variation>
+  <cs:variation>
+    <a:lumMod val="80000"/>
+    <a:lumOff val="20000"/>
+  </cs:variation>
+  <cs:variation>
+    <a:lumMod val="80000"/>
+  </cs:variation>
+  <cs:variation>
+    <a:lumMod val="60000"/>
+    <a:lumOff val="40000"/>
+  </cs:variation>
+  <cs:variation>
+    <a:lumMod val="50000"/>
+  </cs:variation>
+  <cs:variation>
+    <a:lumMod val="70000"/>
+    <a:lumOff val="30000"/>
+  </cs:variation>
+  <cs:variation>
+    <a:lumMod val="70000"/>
+  </cs:variation>
+  <cs:variation>
+    <a:lumMod val="50000"/>
+    <a:lumOff val="50000"/>
+  </cs:variation>
+</cs:colorStyle>
+</file>
+
+<file path=ppt/charts/colors4.xml><?xml version="1.0" encoding="utf-8"?>
 <cs:colorStyle xmlns:cs="http://schemas.microsoft.com/office/drawing/2012/chartStyle" xmlns:a="http://schemas.openxmlformats.org/drawingml/2006/main" meth="cycle" id="10">
   <a:schemeClr val="accent1"/>
   <a:schemeClr val="accent2"/>
@@ -1835,6 +2530,1012 @@
 </cs:chartStyle>
 </file>
 
+<file path=ppt/charts/style3.xml><?xml version="1.0" encoding="utf-8"?>
+<cs:chartStyle xmlns:cs="http://schemas.microsoft.com/office/drawing/2012/chartStyle" xmlns:a="http://schemas.openxmlformats.org/drawingml/2006/main" id="201">
+  <cs:axisTitle>
+    <cs:lnRef idx="0"/>
+    <cs:fillRef idx="0"/>
+    <cs:effectRef idx="0"/>
+    <cs:fontRef idx="minor">
+      <a:schemeClr val="tx1">
+        <a:lumMod val="65000"/>
+        <a:lumOff val="35000"/>
+      </a:schemeClr>
+    </cs:fontRef>
+    <cs:defRPr sz="1000" kern="1200"/>
+  </cs:axisTitle>
+  <cs:categoryAxis>
+    <cs:lnRef idx="0"/>
+    <cs:fillRef idx="0"/>
+    <cs:effectRef idx="0"/>
+    <cs:fontRef idx="minor">
+      <a:schemeClr val="tx1">
+        <a:lumMod val="65000"/>
+        <a:lumOff val="35000"/>
+      </a:schemeClr>
+    </cs:fontRef>
+    <cs:spPr>
+      <a:ln w="9525" cap="flat" cmpd="sng" algn="ctr">
+        <a:solidFill>
+          <a:schemeClr val="tx1">
+            <a:lumMod val="15000"/>
+            <a:lumOff val="85000"/>
+          </a:schemeClr>
+        </a:solidFill>
+        <a:round/>
+      </a:ln>
+    </cs:spPr>
+    <cs:defRPr sz="900" kern="1200"/>
+  </cs:categoryAxis>
+  <cs:chartArea mods="allowNoFillOverride allowNoLineOverride">
+    <cs:lnRef idx="0"/>
+    <cs:fillRef idx="0"/>
+    <cs:effectRef idx="0"/>
+    <cs:fontRef idx="minor">
+      <a:schemeClr val="tx1"/>
+    </cs:fontRef>
+    <cs:spPr>
+      <a:solidFill>
+        <a:schemeClr val="bg1"/>
+      </a:solidFill>
+      <a:ln w="9525" cap="flat" cmpd="sng" algn="ctr">
+        <a:solidFill>
+          <a:schemeClr val="tx1">
+            <a:lumMod val="15000"/>
+            <a:lumOff val="85000"/>
+          </a:schemeClr>
+        </a:solidFill>
+        <a:round/>
+      </a:ln>
+    </cs:spPr>
+    <cs:defRPr sz="1000" kern="1200"/>
+  </cs:chartArea>
+  <cs:dataLabel>
+    <cs:lnRef idx="0"/>
+    <cs:fillRef idx="0"/>
+    <cs:effectRef idx="0"/>
+    <cs:fontRef idx="minor">
+      <a:schemeClr val="tx1">
+        <a:lumMod val="75000"/>
+        <a:lumOff val="25000"/>
+      </a:schemeClr>
+    </cs:fontRef>
+    <cs:defRPr sz="900" kern="1200"/>
+  </cs:dataLabel>
+  <cs:dataLabelCallout>
+    <cs:lnRef idx="0"/>
+    <cs:fillRef idx="0"/>
+    <cs:effectRef idx="0"/>
+    <cs:fontRef idx="minor">
+      <a:schemeClr val="dk1">
+        <a:lumMod val="65000"/>
+        <a:lumOff val="35000"/>
+      </a:schemeClr>
+    </cs:fontRef>
+    <cs:spPr>
+      <a:solidFill>
+        <a:schemeClr val="lt1"/>
+      </a:solidFill>
+      <a:ln>
+        <a:solidFill>
+          <a:schemeClr val="dk1">
+            <a:lumMod val="25000"/>
+            <a:lumOff val="75000"/>
+          </a:schemeClr>
+        </a:solidFill>
+      </a:ln>
+    </cs:spPr>
+    <cs:defRPr sz="900" kern="1200"/>
+    <cs:bodyPr rot="0" spcFirstLastPara="1" vertOverflow="clip" horzOverflow="clip" vert="horz" wrap="square" lIns="36576" tIns="18288" rIns="36576" bIns="18288" anchor="ctr" anchorCtr="1">
+      <a:spAutoFit/>
+    </cs:bodyPr>
+  </cs:dataLabelCallout>
+  <cs:dataPoint>
+    <cs:lnRef idx="0"/>
+    <cs:fillRef idx="1">
+      <cs:styleClr val="auto"/>
+    </cs:fillRef>
+    <cs:effectRef idx="0"/>
+    <cs:fontRef idx="minor">
+      <a:schemeClr val="tx1"/>
+    </cs:fontRef>
+  </cs:dataPoint>
+  <cs:dataPoint3D>
+    <cs:lnRef idx="0"/>
+    <cs:fillRef idx="1">
+      <cs:styleClr val="auto"/>
+    </cs:fillRef>
+    <cs:effectRef idx="0"/>
+    <cs:fontRef idx="minor">
+      <a:schemeClr val="tx1"/>
+    </cs:fontRef>
+  </cs:dataPoint3D>
+  <cs:dataPointLine>
+    <cs:lnRef idx="0">
+      <cs:styleClr val="auto"/>
+    </cs:lnRef>
+    <cs:fillRef idx="1"/>
+    <cs:effectRef idx="0"/>
+    <cs:fontRef idx="minor">
+      <a:schemeClr val="tx1"/>
+    </cs:fontRef>
+    <cs:spPr>
+      <a:ln w="28575" cap="rnd">
+        <a:solidFill>
+          <a:schemeClr val="phClr"/>
+        </a:solidFill>
+        <a:round/>
+      </a:ln>
+    </cs:spPr>
+  </cs:dataPointLine>
+  <cs:dataPointMarker>
+    <cs:lnRef idx="0">
+      <cs:styleClr val="auto"/>
+    </cs:lnRef>
+    <cs:fillRef idx="1">
+      <cs:styleClr val="auto"/>
+    </cs:fillRef>
+    <cs:effectRef idx="0"/>
+    <cs:fontRef idx="minor">
+      <a:schemeClr val="tx1"/>
+    </cs:fontRef>
+    <cs:spPr>
+      <a:ln w="9525">
+        <a:solidFill>
+          <a:schemeClr val="phClr"/>
+        </a:solidFill>
+      </a:ln>
+    </cs:spPr>
+  </cs:dataPointMarker>
+  <cs:dataPointMarkerLayout symbol="circle" size="5"/>
+  <cs:dataPointWireframe>
+    <cs:lnRef idx="0">
+      <cs:styleClr val="auto"/>
+    </cs:lnRef>
+    <cs:fillRef idx="1"/>
+    <cs:effectRef idx="0"/>
+    <cs:fontRef idx="minor">
+      <a:schemeClr val="tx1"/>
+    </cs:fontRef>
+    <cs:spPr>
+      <a:ln w="9525" cap="rnd">
+        <a:solidFill>
+          <a:schemeClr val="phClr"/>
+        </a:solidFill>
+        <a:round/>
+      </a:ln>
+    </cs:spPr>
+  </cs:dataPointWireframe>
+  <cs:dataTable>
+    <cs:lnRef idx="0"/>
+    <cs:fillRef idx="0"/>
+    <cs:effectRef idx="0"/>
+    <cs:fontRef idx="minor">
+      <a:schemeClr val="tx1">
+        <a:lumMod val="65000"/>
+        <a:lumOff val="35000"/>
+      </a:schemeClr>
+    </cs:fontRef>
+    <cs:spPr>
+      <a:noFill/>
+      <a:ln w="9525" cap="flat" cmpd="sng" algn="ctr">
+        <a:solidFill>
+          <a:schemeClr val="tx1">
+            <a:lumMod val="15000"/>
+            <a:lumOff val="85000"/>
+          </a:schemeClr>
+        </a:solidFill>
+        <a:round/>
+      </a:ln>
+    </cs:spPr>
+    <cs:defRPr sz="900" kern="1200"/>
+  </cs:dataTable>
+  <cs:downBar>
+    <cs:lnRef idx="0"/>
+    <cs:fillRef idx="0"/>
+    <cs:effectRef idx="0"/>
+    <cs:fontRef idx="minor">
+      <a:schemeClr val="dk1"/>
+    </cs:fontRef>
+    <cs:spPr>
+      <a:solidFill>
+        <a:schemeClr val="dk1">
+          <a:lumMod val="65000"/>
+          <a:lumOff val="35000"/>
+        </a:schemeClr>
+      </a:solidFill>
+      <a:ln w="9525">
+        <a:solidFill>
+          <a:schemeClr val="tx1">
+            <a:lumMod val="65000"/>
+            <a:lumOff val="35000"/>
+          </a:schemeClr>
+        </a:solidFill>
+      </a:ln>
+    </cs:spPr>
+  </cs:downBar>
+  <cs:dropLine>
+    <cs:lnRef idx="0"/>
+    <cs:fillRef idx="0"/>
+    <cs:effectRef idx="0"/>
+    <cs:fontRef idx="minor">
+      <a:schemeClr val="tx1"/>
+    </cs:fontRef>
+    <cs:spPr>
+      <a:ln w="9525" cap="flat" cmpd="sng" algn="ctr">
+        <a:solidFill>
+          <a:schemeClr val="tx1">
+            <a:lumMod val="35000"/>
+            <a:lumOff val="65000"/>
+          </a:schemeClr>
+        </a:solidFill>
+        <a:round/>
+      </a:ln>
+    </cs:spPr>
+  </cs:dropLine>
+  <cs:errorBar>
+    <cs:lnRef idx="0"/>
+    <cs:fillRef idx="0"/>
+    <cs:effectRef idx="0"/>
+    <cs:fontRef idx="minor">
+      <a:schemeClr val="tx1"/>
+    </cs:fontRef>
+    <cs:spPr>
+      <a:ln w="9525" cap="flat" cmpd="sng" algn="ctr">
+        <a:solidFill>
+          <a:schemeClr val="tx1">
+            <a:lumMod val="65000"/>
+            <a:lumOff val="35000"/>
+          </a:schemeClr>
+        </a:solidFill>
+        <a:round/>
+      </a:ln>
+    </cs:spPr>
+  </cs:errorBar>
+  <cs:floor>
+    <cs:lnRef idx="0"/>
+    <cs:fillRef idx="0"/>
+    <cs:effectRef idx="0"/>
+    <cs:fontRef idx="minor">
+      <a:schemeClr val="tx1"/>
+    </cs:fontRef>
+    <cs:spPr>
+      <a:noFill/>
+      <a:ln>
+        <a:noFill/>
+      </a:ln>
+    </cs:spPr>
+  </cs:floor>
+  <cs:gridlineMajor>
+    <cs:lnRef idx="0"/>
+    <cs:fillRef idx="0"/>
+    <cs:effectRef idx="0"/>
+    <cs:fontRef idx="minor">
+      <a:schemeClr val="tx1"/>
+    </cs:fontRef>
+    <cs:spPr>
+      <a:ln w="9525" cap="flat" cmpd="sng" algn="ctr">
+        <a:solidFill>
+          <a:schemeClr val="tx1">
+            <a:lumMod val="15000"/>
+            <a:lumOff val="85000"/>
+          </a:schemeClr>
+        </a:solidFill>
+        <a:round/>
+      </a:ln>
+    </cs:spPr>
+  </cs:gridlineMajor>
+  <cs:gridlineMinor>
+    <cs:lnRef idx="0"/>
+    <cs:fillRef idx="0"/>
+    <cs:effectRef idx="0"/>
+    <cs:fontRef idx="minor">
+      <a:schemeClr val="tx1"/>
+    </cs:fontRef>
+    <cs:spPr>
+      <a:ln w="9525" cap="flat" cmpd="sng" algn="ctr">
+        <a:solidFill>
+          <a:schemeClr val="tx1">
+            <a:lumMod val="5000"/>
+            <a:lumOff val="95000"/>
+          </a:schemeClr>
+        </a:solidFill>
+        <a:round/>
+      </a:ln>
+    </cs:spPr>
+  </cs:gridlineMinor>
+  <cs:hiLoLine>
+    <cs:lnRef idx="0"/>
+    <cs:fillRef idx="0"/>
+    <cs:effectRef idx="0"/>
+    <cs:fontRef idx="minor">
+      <a:schemeClr val="tx1"/>
+    </cs:fontRef>
+    <cs:spPr>
+      <a:ln w="9525" cap="flat" cmpd="sng" algn="ctr">
+        <a:solidFill>
+          <a:schemeClr val="tx1">
+            <a:lumMod val="75000"/>
+            <a:lumOff val="25000"/>
+          </a:schemeClr>
+        </a:solidFill>
+        <a:round/>
+      </a:ln>
+    </cs:spPr>
+  </cs:hiLoLine>
+  <cs:leaderLine>
+    <cs:lnRef idx="0"/>
+    <cs:fillRef idx="0"/>
+    <cs:effectRef idx="0"/>
+    <cs:fontRef idx="minor">
+      <a:schemeClr val="tx1"/>
+    </cs:fontRef>
+    <cs:spPr>
+      <a:ln w="9525" cap="flat" cmpd="sng" algn="ctr">
+        <a:solidFill>
+          <a:schemeClr val="tx1">
+            <a:lumMod val="35000"/>
+            <a:lumOff val="65000"/>
+          </a:schemeClr>
+        </a:solidFill>
+        <a:round/>
+      </a:ln>
+    </cs:spPr>
+  </cs:leaderLine>
+  <cs:legend>
+    <cs:lnRef idx="0"/>
+    <cs:fillRef idx="0"/>
+    <cs:effectRef idx="0"/>
+    <cs:fontRef idx="minor">
+      <a:schemeClr val="tx1">
+        <a:lumMod val="65000"/>
+        <a:lumOff val="35000"/>
+      </a:schemeClr>
+    </cs:fontRef>
+    <cs:defRPr sz="900" kern="1200"/>
+  </cs:legend>
+  <cs:plotArea mods="allowNoFillOverride allowNoLineOverride">
+    <cs:lnRef idx="0"/>
+    <cs:fillRef idx="0"/>
+    <cs:effectRef idx="0"/>
+    <cs:fontRef idx="minor">
+      <a:schemeClr val="tx1"/>
+    </cs:fontRef>
+  </cs:plotArea>
+  <cs:plotArea3D mods="allowNoFillOverride allowNoLineOverride">
+    <cs:lnRef idx="0"/>
+    <cs:fillRef idx="0"/>
+    <cs:effectRef idx="0"/>
+    <cs:fontRef idx="minor">
+      <a:schemeClr val="tx1"/>
+    </cs:fontRef>
+  </cs:plotArea3D>
+  <cs:seriesAxis>
+    <cs:lnRef idx="0"/>
+    <cs:fillRef idx="0"/>
+    <cs:effectRef idx="0"/>
+    <cs:fontRef idx="minor">
+      <a:schemeClr val="tx1">
+        <a:lumMod val="65000"/>
+        <a:lumOff val="35000"/>
+      </a:schemeClr>
+    </cs:fontRef>
+    <cs:defRPr sz="900" kern="1200"/>
+  </cs:seriesAxis>
+  <cs:seriesLine>
+    <cs:lnRef idx="0"/>
+    <cs:fillRef idx="0"/>
+    <cs:effectRef idx="0"/>
+    <cs:fontRef idx="minor">
+      <a:schemeClr val="tx1"/>
+    </cs:fontRef>
+    <cs:spPr>
+      <a:ln w="9525" cap="flat" cmpd="sng" algn="ctr">
+        <a:solidFill>
+          <a:schemeClr val="tx1">
+            <a:lumMod val="35000"/>
+            <a:lumOff val="65000"/>
+          </a:schemeClr>
+        </a:solidFill>
+        <a:round/>
+      </a:ln>
+    </cs:spPr>
+  </cs:seriesLine>
+  <cs:title>
+    <cs:lnRef idx="0"/>
+    <cs:fillRef idx="0"/>
+    <cs:effectRef idx="0"/>
+    <cs:fontRef idx="minor">
+      <a:schemeClr val="tx1">
+        <a:lumMod val="65000"/>
+        <a:lumOff val="35000"/>
+      </a:schemeClr>
+    </cs:fontRef>
+    <cs:defRPr sz="1400" b="0" kern="1200" spc="0" baseline="0"/>
+  </cs:title>
+  <cs:trendline>
+    <cs:lnRef idx="0">
+      <cs:styleClr val="auto"/>
+    </cs:lnRef>
+    <cs:fillRef idx="0"/>
+    <cs:effectRef idx="0"/>
+    <cs:fontRef idx="minor">
+      <a:schemeClr val="tx1"/>
+    </cs:fontRef>
+    <cs:spPr>
+      <a:ln w="19050" cap="rnd">
+        <a:solidFill>
+          <a:schemeClr val="phClr"/>
+        </a:solidFill>
+        <a:prstDash val="sysDot"/>
+      </a:ln>
+    </cs:spPr>
+  </cs:trendline>
+  <cs:trendlineLabel>
+    <cs:lnRef idx="0"/>
+    <cs:fillRef idx="0"/>
+    <cs:effectRef idx="0"/>
+    <cs:fontRef idx="minor">
+      <a:schemeClr val="tx1">
+        <a:lumMod val="65000"/>
+        <a:lumOff val="35000"/>
+      </a:schemeClr>
+    </cs:fontRef>
+    <cs:defRPr sz="900" kern="1200"/>
+  </cs:trendlineLabel>
+  <cs:upBar>
+    <cs:lnRef idx="0"/>
+    <cs:fillRef idx="0"/>
+    <cs:effectRef idx="0"/>
+    <cs:fontRef idx="minor">
+      <a:schemeClr val="dk1"/>
+    </cs:fontRef>
+    <cs:spPr>
+      <a:solidFill>
+        <a:schemeClr val="lt1"/>
+      </a:solidFill>
+      <a:ln w="9525">
+        <a:solidFill>
+          <a:schemeClr val="tx1">
+            <a:lumMod val="15000"/>
+            <a:lumOff val="85000"/>
+          </a:schemeClr>
+        </a:solidFill>
+      </a:ln>
+    </cs:spPr>
+  </cs:upBar>
+  <cs:valueAxis>
+    <cs:lnRef idx="0"/>
+    <cs:fillRef idx="0"/>
+    <cs:effectRef idx="0"/>
+    <cs:fontRef idx="minor">
+      <a:schemeClr val="tx1">
+        <a:lumMod val="65000"/>
+        <a:lumOff val="35000"/>
+      </a:schemeClr>
+    </cs:fontRef>
+    <cs:defRPr sz="900" kern="1200"/>
+  </cs:valueAxis>
+  <cs:wall>
+    <cs:lnRef idx="0"/>
+    <cs:fillRef idx="0"/>
+    <cs:effectRef idx="0"/>
+    <cs:fontRef idx="minor">
+      <a:schemeClr val="tx1"/>
+    </cs:fontRef>
+    <cs:spPr>
+      <a:noFill/>
+      <a:ln>
+        <a:noFill/>
+      </a:ln>
+    </cs:spPr>
+  </cs:wall>
+</cs:chartStyle>
+</file>
+
+<file path=ppt/charts/style4.xml><?xml version="1.0" encoding="utf-8"?>
+<cs:chartStyle xmlns:cs="http://schemas.microsoft.com/office/drawing/2012/chartStyle" xmlns:a="http://schemas.openxmlformats.org/drawingml/2006/main" id="201">
+  <cs:axisTitle>
+    <cs:lnRef idx="0"/>
+    <cs:fillRef idx="0"/>
+    <cs:effectRef idx="0"/>
+    <cs:fontRef idx="minor">
+      <a:schemeClr val="tx1">
+        <a:lumMod val="65000"/>
+        <a:lumOff val="35000"/>
+      </a:schemeClr>
+    </cs:fontRef>
+    <cs:defRPr sz="1000" kern="1200"/>
+  </cs:axisTitle>
+  <cs:categoryAxis>
+    <cs:lnRef idx="0"/>
+    <cs:fillRef idx="0"/>
+    <cs:effectRef idx="0"/>
+    <cs:fontRef idx="minor">
+      <a:schemeClr val="tx1">
+        <a:lumMod val="65000"/>
+        <a:lumOff val="35000"/>
+      </a:schemeClr>
+    </cs:fontRef>
+    <cs:spPr>
+      <a:ln w="9525" cap="flat" cmpd="sng" algn="ctr">
+        <a:solidFill>
+          <a:schemeClr val="tx1">
+            <a:lumMod val="15000"/>
+            <a:lumOff val="85000"/>
+          </a:schemeClr>
+        </a:solidFill>
+        <a:round/>
+      </a:ln>
+    </cs:spPr>
+    <cs:defRPr sz="900" kern="1200"/>
+  </cs:categoryAxis>
+  <cs:chartArea mods="allowNoFillOverride allowNoLineOverride">
+    <cs:lnRef idx="0"/>
+    <cs:fillRef idx="0"/>
+    <cs:effectRef idx="0"/>
+    <cs:fontRef idx="minor">
+      <a:schemeClr val="tx1"/>
+    </cs:fontRef>
+    <cs:spPr>
+      <a:solidFill>
+        <a:schemeClr val="bg1"/>
+      </a:solidFill>
+      <a:ln w="9525" cap="flat" cmpd="sng" algn="ctr">
+        <a:solidFill>
+          <a:schemeClr val="tx1">
+            <a:lumMod val="15000"/>
+            <a:lumOff val="85000"/>
+          </a:schemeClr>
+        </a:solidFill>
+        <a:round/>
+      </a:ln>
+    </cs:spPr>
+    <cs:defRPr sz="1000" kern="1200"/>
+  </cs:chartArea>
+  <cs:dataLabel>
+    <cs:lnRef idx="0"/>
+    <cs:fillRef idx="0"/>
+    <cs:effectRef idx="0"/>
+    <cs:fontRef idx="minor">
+      <a:schemeClr val="tx1">
+        <a:lumMod val="75000"/>
+        <a:lumOff val="25000"/>
+      </a:schemeClr>
+    </cs:fontRef>
+    <cs:defRPr sz="900" kern="1200"/>
+  </cs:dataLabel>
+  <cs:dataLabelCallout>
+    <cs:lnRef idx="0"/>
+    <cs:fillRef idx="0"/>
+    <cs:effectRef idx="0"/>
+    <cs:fontRef idx="minor">
+      <a:schemeClr val="dk1">
+        <a:lumMod val="65000"/>
+        <a:lumOff val="35000"/>
+      </a:schemeClr>
+    </cs:fontRef>
+    <cs:spPr>
+      <a:solidFill>
+        <a:schemeClr val="lt1"/>
+      </a:solidFill>
+      <a:ln>
+        <a:solidFill>
+          <a:schemeClr val="dk1">
+            <a:lumMod val="25000"/>
+            <a:lumOff val="75000"/>
+          </a:schemeClr>
+        </a:solidFill>
+      </a:ln>
+    </cs:spPr>
+    <cs:defRPr sz="900" kern="1200"/>
+    <cs:bodyPr rot="0" spcFirstLastPara="1" vertOverflow="clip" horzOverflow="clip" vert="horz" wrap="square" lIns="36576" tIns="18288" rIns="36576" bIns="18288" anchor="ctr" anchorCtr="1">
+      <a:spAutoFit/>
+    </cs:bodyPr>
+  </cs:dataLabelCallout>
+  <cs:dataPoint>
+    <cs:lnRef idx="0"/>
+    <cs:fillRef idx="1">
+      <cs:styleClr val="auto"/>
+    </cs:fillRef>
+    <cs:effectRef idx="0"/>
+    <cs:fontRef idx="minor">
+      <a:schemeClr val="tx1"/>
+    </cs:fontRef>
+  </cs:dataPoint>
+  <cs:dataPoint3D>
+    <cs:lnRef idx="0"/>
+    <cs:fillRef idx="1">
+      <cs:styleClr val="auto"/>
+    </cs:fillRef>
+    <cs:effectRef idx="0"/>
+    <cs:fontRef idx="minor">
+      <a:schemeClr val="tx1"/>
+    </cs:fontRef>
+  </cs:dataPoint3D>
+  <cs:dataPointLine>
+    <cs:lnRef idx="0">
+      <cs:styleClr val="auto"/>
+    </cs:lnRef>
+    <cs:fillRef idx="1"/>
+    <cs:effectRef idx="0"/>
+    <cs:fontRef idx="minor">
+      <a:schemeClr val="tx1"/>
+    </cs:fontRef>
+    <cs:spPr>
+      <a:ln w="28575" cap="rnd">
+        <a:solidFill>
+          <a:schemeClr val="phClr"/>
+        </a:solidFill>
+        <a:round/>
+      </a:ln>
+    </cs:spPr>
+  </cs:dataPointLine>
+  <cs:dataPointMarker>
+    <cs:lnRef idx="0">
+      <cs:styleClr val="auto"/>
+    </cs:lnRef>
+    <cs:fillRef idx="1">
+      <cs:styleClr val="auto"/>
+    </cs:fillRef>
+    <cs:effectRef idx="0"/>
+    <cs:fontRef idx="minor">
+      <a:schemeClr val="tx1"/>
+    </cs:fontRef>
+    <cs:spPr>
+      <a:ln w="9525">
+        <a:solidFill>
+          <a:schemeClr val="phClr"/>
+        </a:solidFill>
+      </a:ln>
+    </cs:spPr>
+  </cs:dataPointMarker>
+  <cs:dataPointMarkerLayout symbol="circle" size="5"/>
+  <cs:dataPointWireframe>
+    <cs:lnRef idx="0">
+      <cs:styleClr val="auto"/>
+    </cs:lnRef>
+    <cs:fillRef idx="1"/>
+    <cs:effectRef idx="0"/>
+    <cs:fontRef idx="minor">
+      <a:schemeClr val="tx1"/>
+    </cs:fontRef>
+    <cs:spPr>
+      <a:ln w="9525" cap="rnd">
+        <a:solidFill>
+          <a:schemeClr val="phClr"/>
+        </a:solidFill>
+        <a:round/>
+      </a:ln>
+    </cs:spPr>
+  </cs:dataPointWireframe>
+  <cs:dataTable>
+    <cs:lnRef idx="0"/>
+    <cs:fillRef idx="0"/>
+    <cs:effectRef idx="0"/>
+    <cs:fontRef idx="minor">
+      <a:schemeClr val="tx1">
+        <a:lumMod val="65000"/>
+        <a:lumOff val="35000"/>
+      </a:schemeClr>
+    </cs:fontRef>
+    <cs:spPr>
+      <a:noFill/>
+      <a:ln w="9525" cap="flat" cmpd="sng" algn="ctr">
+        <a:solidFill>
+          <a:schemeClr val="tx1">
+            <a:lumMod val="15000"/>
+            <a:lumOff val="85000"/>
+          </a:schemeClr>
+        </a:solidFill>
+        <a:round/>
+      </a:ln>
+    </cs:spPr>
+    <cs:defRPr sz="900" kern="1200"/>
+  </cs:dataTable>
+  <cs:downBar>
+    <cs:lnRef idx="0"/>
+    <cs:fillRef idx="0"/>
+    <cs:effectRef idx="0"/>
+    <cs:fontRef idx="minor">
+      <a:schemeClr val="dk1"/>
+    </cs:fontRef>
+    <cs:spPr>
+      <a:solidFill>
+        <a:schemeClr val="dk1">
+          <a:lumMod val="65000"/>
+          <a:lumOff val="35000"/>
+        </a:schemeClr>
+      </a:solidFill>
+      <a:ln w="9525">
+        <a:solidFill>
+          <a:schemeClr val="tx1">
+            <a:lumMod val="65000"/>
+            <a:lumOff val="35000"/>
+          </a:schemeClr>
+        </a:solidFill>
+      </a:ln>
+    </cs:spPr>
+  </cs:downBar>
+  <cs:dropLine>
+    <cs:lnRef idx="0"/>
+    <cs:fillRef idx="0"/>
+    <cs:effectRef idx="0"/>
+    <cs:fontRef idx="minor">
+      <a:schemeClr val="tx1"/>
+    </cs:fontRef>
+    <cs:spPr>
+      <a:ln w="9525" cap="flat" cmpd="sng" algn="ctr">
+        <a:solidFill>
+          <a:schemeClr val="tx1">
+            <a:lumMod val="35000"/>
+            <a:lumOff val="65000"/>
+          </a:schemeClr>
+        </a:solidFill>
+        <a:round/>
+      </a:ln>
+    </cs:spPr>
+  </cs:dropLine>
+  <cs:errorBar>
+    <cs:lnRef idx="0"/>
+    <cs:fillRef idx="0"/>
+    <cs:effectRef idx="0"/>
+    <cs:fontRef idx="minor">
+      <a:schemeClr val="tx1"/>
+    </cs:fontRef>
+    <cs:spPr>
+      <a:ln w="9525" cap="flat" cmpd="sng" algn="ctr">
+        <a:solidFill>
+          <a:schemeClr val="tx1">
+            <a:lumMod val="65000"/>
+            <a:lumOff val="35000"/>
+          </a:schemeClr>
+        </a:solidFill>
+        <a:round/>
+      </a:ln>
+    </cs:spPr>
+  </cs:errorBar>
+  <cs:floor>
+    <cs:lnRef idx="0"/>
+    <cs:fillRef idx="0"/>
+    <cs:effectRef idx="0"/>
+    <cs:fontRef idx="minor">
+      <a:schemeClr val="tx1"/>
+    </cs:fontRef>
+    <cs:spPr>
+      <a:noFill/>
+      <a:ln>
+        <a:noFill/>
+      </a:ln>
+    </cs:spPr>
+  </cs:floor>
+  <cs:gridlineMajor>
+    <cs:lnRef idx="0"/>
+    <cs:fillRef idx="0"/>
+    <cs:effectRef idx="0"/>
+    <cs:fontRef idx="minor">
+      <a:schemeClr val="tx1"/>
+    </cs:fontRef>
+    <cs:spPr>
+      <a:ln w="9525" cap="flat" cmpd="sng" algn="ctr">
+        <a:solidFill>
+          <a:schemeClr val="tx1">
+            <a:lumMod val="15000"/>
+            <a:lumOff val="85000"/>
+          </a:schemeClr>
+        </a:solidFill>
+        <a:round/>
+      </a:ln>
+    </cs:spPr>
+  </cs:gridlineMajor>
+  <cs:gridlineMinor>
+    <cs:lnRef idx="0"/>
+    <cs:fillRef idx="0"/>
+    <cs:effectRef idx="0"/>
+    <cs:fontRef idx="minor">
+      <a:schemeClr val="tx1"/>
+    </cs:fontRef>
+    <cs:spPr>
+      <a:ln w="9525" cap="flat" cmpd="sng" algn="ctr">
+        <a:solidFill>
+          <a:schemeClr val="tx1">
+            <a:lumMod val="5000"/>
+            <a:lumOff val="95000"/>
+          </a:schemeClr>
+        </a:solidFill>
+        <a:round/>
+      </a:ln>
+    </cs:spPr>
+  </cs:gridlineMinor>
+  <cs:hiLoLine>
+    <cs:lnRef idx="0"/>
+    <cs:fillRef idx="0"/>
+    <cs:effectRef idx="0"/>
+    <cs:fontRef idx="minor">
+      <a:schemeClr val="tx1"/>
+    </cs:fontRef>
+    <cs:spPr>
+      <a:ln w="9525" cap="flat" cmpd="sng" algn="ctr">
+        <a:solidFill>
+          <a:schemeClr val="tx1">
+            <a:lumMod val="75000"/>
+            <a:lumOff val="25000"/>
+          </a:schemeClr>
+        </a:solidFill>
+        <a:round/>
+      </a:ln>
+    </cs:spPr>
+  </cs:hiLoLine>
+  <cs:leaderLine>
+    <cs:lnRef idx="0"/>
+    <cs:fillRef idx="0"/>
+    <cs:effectRef idx="0"/>
+    <cs:fontRef idx="minor">
+      <a:schemeClr val="tx1"/>
+    </cs:fontRef>
+    <cs:spPr>
+      <a:ln w="9525" cap="flat" cmpd="sng" algn="ctr">
+        <a:solidFill>
+          <a:schemeClr val="tx1">
+            <a:lumMod val="35000"/>
+            <a:lumOff val="65000"/>
+          </a:schemeClr>
+        </a:solidFill>
+        <a:round/>
+      </a:ln>
+    </cs:spPr>
+  </cs:leaderLine>
+  <cs:legend>
+    <cs:lnRef idx="0"/>
+    <cs:fillRef idx="0"/>
+    <cs:effectRef idx="0"/>
+    <cs:fontRef idx="minor">
+      <a:schemeClr val="tx1">
+        <a:lumMod val="65000"/>
+        <a:lumOff val="35000"/>
+      </a:schemeClr>
+    </cs:fontRef>
+    <cs:defRPr sz="900" kern="1200"/>
+  </cs:legend>
+  <cs:plotArea mods="allowNoFillOverride allowNoLineOverride">
+    <cs:lnRef idx="0"/>
+    <cs:fillRef idx="0"/>
+    <cs:effectRef idx="0"/>
+    <cs:fontRef idx="minor">
+      <a:schemeClr val="tx1"/>
+    </cs:fontRef>
+  </cs:plotArea>
+  <cs:plotArea3D mods="allowNoFillOverride allowNoLineOverride">
+    <cs:lnRef idx="0"/>
+    <cs:fillRef idx="0"/>
+    <cs:effectRef idx="0"/>
+    <cs:fontRef idx="minor">
+      <a:schemeClr val="tx1"/>
+    </cs:fontRef>
+  </cs:plotArea3D>
+  <cs:seriesAxis>
+    <cs:lnRef idx="0"/>
+    <cs:fillRef idx="0"/>
+    <cs:effectRef idx="0"/>
+    <cs:fontRef idx="minor">
+      <a:schemeClr val="tx1">
+        <a:lumMod val="65000"/>
+        <a:lumOff val="35000"/>
+      </a:schemeClr>
+    </cs:fontRef>
+    <cs:defRPr sz="900" kern="1200"/>
+  </cs:seriesAxis>
+  <cs:seriesLine>
+    <cs:lnRef idx="0"/>
+    <cs:fillRef idx="0"/>
+    <cs:effectRef idx="0"/>
+    <cs:fontRef idx="minor">
+      <a:schemeClr val="tx1"/>
+    </cs:fontRef>
+    <cs:spPr>
+      <a:ln w="9525" cap="flat" cmpd="sng" algn="ctr">
+        <a:solidFill>
+          <a:schemeClr val="tx1">
+            <a:lumMod val="35000"/>
+            <a:lumOff val="65000"/>
+          </a:schemeClr>
+        </a:solidFill>
+        <a:round/>
+      </a:ln>
+    </cs:spPr>
+  </cs:seriesLine>
+  <cs:title>
+    <cs:lnRef idx="0"/>
+    <cs:fillRef idx="0"/>
+    <cs:effectRef idx="0"/>
+    <cs:fontRef idx="minor">
+      <a:schemeClr val="tx1">
+        <a:lumMod val="65000"/>
+        <a:lumOff val="35000"/>
+      </a:schemeClr>
+    </cs:fontRef>
+    <cs:defRPr sz="1400" b="0" kern="1200" spc="0" baseline="0"/>
+  </cs:title>
+  <cs:trendline>
+    <cs:lnRef idx="0">
+      <cs:styleClr val="auto"/>
+    </cs:lnRef>
+    <cs:fillRef idx="0"/>
+    <cs:effectRef idx="0"/>
+    <cs:fontRef idx="minor">
+      <a:schemeClr val="tx1"/>
+    </cs:fontRef>
+    <cs:spPr>
+      <a:ln w="19050" cap="rnd">
+        <a:solidFill>
+          <a:schemeClr val="phClr"/>
+        </a:solidFill>
+        <a:prstDash val="sysDot"/>
+      </a:ln>
+    </cs:spPr>
+  </cs:trendline>
+  <cs:trendlineLabel>
+    <cs:lnRef idx="0"/>
+    <cs:fillRef idx="0"/>
+    <cs:effectRef idx="0"/>
+    <cs:fontRef idx="minor">
+      <a:schemeClr val="tx1">
+        <a:lumMod val="65000"/>
+        <a:lumOff val="35000"/>
+      </a:schemeClr>
+    </cs:fontRef>
+    <cs:defRPr sz="900" kern="1200"/>
+  </cs:trendlineLabel>
+  <cs:upBar>
+    <cs:lnRef idx="0"/>
+    <cs:fillRef idx="0"/>
+    <cs:effectRef idx="0"/>
+    <cs:fontRef idx="minor">
+      <a:schemeClr val="dk1"/>
+    </cs:fontRef>
+    <cs:spPr>
+      <a:solidFill>
+        <a:schemeClr val="lt1"/>
+      </a:solidFill>
+      <a:ln w="9525">
+        <a:solidFill>
+          <a:schemeClr val="tx1">
+            <a:lumMod val="15000"/>
+            <a:lumOff val="85000"/>
+          </a:schemeClr>
+        </a:solidFill>
+      </a:ln>
+    </cs:spPr>
+  </cs:upBar>
+  <cs:valueAxis>
+    <cs:lnRef idx="0"/>
+    <cs:fillRef idx="0"/>
+    <cs:effectRef idx="0"/>
+    <cs:fontRef idx="minor">
+      <a:schemeClr val="tx1">
+        <a:lumMod val="65000"/>
+        <a:lumOff val="35000"/>
+      </a:schemeClr>
+    </cs:fontRef>
+    <cs:defRPr sz="900" kern="1200"/>
+  </cs:valueAxis>
+  <cs:wall>
+    <cs:lnRef idx="0"/>
+    <cs:fillRef idx="0"/>
+    <cs:effectRef idx="0"/>
+    <cs:fontRef idx="minor">
+      <a:schemeClr val="tx1"/>
+    </cs:fontRef>
+    <cs:spPr>
+      <a:noFill/>
+      <a:ln>
+        <a:noFill/>
+      </a:ln>
+    </cs:spPr>
+  </cs:wall>
+</cs:chartStyle>
+</file>
+
 <file path=ppt/notesMasters/notesMaster1.xml><?xml version="1.0" encoding="utf-8"?>
 <p:notesMaster xmlns:a="http://schemas.openxmlformats.org/drawingml/2006/main" xmlns:r="http://schemas.openxmlformats.org/officeDocument/2006/relationships" xmlns:p="http://schemas.openxmlformats.org/presentationml/2006/main">
   <p:cSld>
@@ -2889,10 +4590,7 @@
           <a:bodyPr/>
           <a:lstStyle/>
           <a:p>
-            <a:r>
-              <a:rPr lang="hu-HU" dirty="0"/>
-              <a:t>? - https://www.freepik.com/premium-photo/fire-alphabet-question-mark-isolated-black-background_23682027.htm#page=2&amp;query=FIRE&amp;position=32&amp;from_view=author&amp;uuid=a48ed73a-a3ec-4063-ab27-5a739e530915</a:t>
-            </a:r>
+            <a:endParaRPr lang="en-GB" dirty="0"/>
           </a:p>
         </p:txBody>
       </p:sp>
@@ -2913,7 +4611,286 @@
           <a:p>
             <a:fld id="{F74E179E-53CC-44C3-B266-BA8C753902EB}" type="slidenum">
               <a:rPr lang="hu-HU" smtClean="0"/>
+              <a:t>7</a:t>
+            </a:fld>
+            <a:endParaRPr lang="hu-HU"/>
+          </a:p>
+        </p:txBody>
+      </p:sp>
+    </p:spTree>
+    <p:extLst>
+      <p:ext uri="{BB962C8B-B14F-4D97-AF65-F5344CB8AC3E}">
+        <p14:creationId xmlns:p14="http://schemas.microsoft.com/office/powerpoint/2010/main" val="1420622781"/>
+      </p:ext>
+    </p:extLst>
+  </p:cSld>
+  <p:clrMapOvr>
+    <a:masterClrMapping/>
+  </p:clrMapOvr>
+</p:notes>
+</file>
+
+<file path=ppt/notesSlides/notesSlide6.xml><?xml version="1.0" encoding="utf-8"?>
+<p:notes xmlns:a="http://schemas.openxmlformats.org/drawingml/2006/main" xmlns:r="http://schemas.openxmlformats.org/officeDocument/2006/relationships" xmlns:p="http://schemas.openxmlformats.org/presentationml/2006/main">
+  <p:cSld>
+    <p:spTree>
+      <p:nvGrpSpPr>
+        <p:cNvPr id="1" name=""/>
+        <p:cNvGrpSpPr/>
+        <p:nvPr/>
+      </p:nvGrpSpPr>
+      <p:grpSpPr>
+        <a:xfrm>
+          <a:off x="0" y="0"/>
+          <a:ext cx="0" cy="0"/>
+          <a:chOff x="0" y="0"/>
+          <a:chExt cx="0" cy="0"/>
+        </a:xfrm>
+      </p:grpSpPr>
+      <p:sp>
+        <p:nvSpPr>
+          <p:cNvPr id="2" name="Slide Image Placeholder 1"/>
+          <p:cNvSpPr>
+            <a:spLocks noGrp="1" noRot="1" noChangeAspect="1"/>
+          </p:cNvSpPr>
+          <p:nvPr>
+            <p:ph type="sldImg"/>
+          </p:nvPr>
+        </p:nvSpPr>
+        <p:spPr/>
+      </p:sp>
+      <p:sp>
+        <p:nvSpPr>
+          <p:cNvPr id="3" name="Notes Placeholder 2"/>
+          <p:cNvSpPr>
+            <a:spLocks noGrp="1"/>
+          </p:cNvSpPr>
+          <p:nvPr>
+            <p:ph type="body" idx="1"/>
+          </p:nvPr>
+        </p:nvSpPr>
+        <p:spPr/>
+        <p:txBody>
+          <a:bodyPr/>
+          <a:lstStyle/>
+          <a:p>
+            <a:endParaRPr lang="en-GB" dirty="0"/>
+          </a:p>
+        </p:txBody>
+      </p:sp>
+      <p:sp>
+        <p:nvSpPr>
+          <p:cNvPr id="4" name="Slide Number Placeholder 3"/>
+          <p:cNvSpPr>
+            <a:spLocks noGrp="1"/>
+          </p:cNvSpPr>
+          <p:nvPr>
+            <p:ph type="sldNum" sz="quarter" idx="5"/>
+          </p:nvPr>
+        </p:nvSpPr>
+        <p:spPr/>
+        <p:txBody>
+          <a:bodyPr/>
+          <a:lstStyle/>
+          <a:p>
+            <a:fld id="{F74E179E-53CC-44C3-B266-BA8C753902EB}" type="slidenum">
+              <a:rPr lang="hu-HU" smtClean="0"/>
+              <a:t>8</a:t>
+            </a:fld>
+            <a:endParaRPr lang="hu-HU"/>
+          </a:p>
+        </p:txBody>
+      </p:sp>
+    </p:spTree>
+    <p:extLst>
+      <p:ext uri="{BB962C8B-B14F-4D97-AF65-F5344CB8AC3E}">
+        <p14:creationId xmlns:p14="http://schemas.microsoft.com/office/powerpoint/2010/main" val="168919522"/>
+      </p:ext>
+    </p:extLst>
+  </p:cSld>
+  <p:clrMapOvr>
+    <a:masterClrMapping/>
+  </p:clrMapOvr>
+</p:notes>
+</file>
+
+<file path=ppt/notesSlides/notesSlide7.xml><?xml version="1.0" encoding="utf-8"?>
+<p:notes xmlns:a="http://schemas.openxmlformats.org/drawingml/2006/main" xmlns:r="http://schemas.openxmlformats.org/officeDocument/2006/relationships" xmlns:p="http://schemas.openxmlformats.org/presentationml/2006/main">
+  <p:cSld>
+    <p:spTree>
+      <p:nvGrpSpPr>
+        <p:cNvPr id="1" name="">
+          <a:extLst>
+            <a:ext uri="{FF2B5EF4-FFF2-40B4-BE49-F238E27FC236}">
+              <a16:creationId xmlns:a16="http://schemas.microsoft.com/office/drawing/2014/main" id="{0AAB66F3-25CA-B7C0-E6C1-153ADEF82963}"/>
+            </a:ext>
+          </a:extLst>
+        </p:cNvPr>
+        <p:cNvGrpSpPr/>
+        <p:nvPr/>
+      </p:nvGrpSpPr>
+      <p:grpSpPr>
+        <a:xfrm>
+          <a:off x="0" y="0"/>
+          <a:ext cx="0" cy="0"/>
+          <a:chOff x="0" y="0"/>
+          <a:chExt cx="0" cy="0"/>
+        </a:xfrm>
+      </p:grpSpPr>
+      <p:sp>
+        <p:nvSpPr>
+          <p:cNvPr id="2" name="Slide Image Placeholder 1">
+            <a:extLst>
+              <a:ext uri="{FF2B5EF4-FFF2-40B4-BE49-F238E27FC236}">
+                <a16:creationId xmlns:a16="http://schemas.microsoft.com/office/drawing/2014/main" id="{9713E19D-FCEF-8734-E869-C1903E0C53F9}"/>
+              </a:ext>
+            </a:extLst>
+          </p:cNvPr>
+          <p:cNvSpPr>
+            <a:spLocks noGrp="1" noRot="1" noChangeAspect="1"/>
+          </p:cNvSpPr>
+          <p:nvPr>
+            <p:ph type="sldImg"/>
+          </p:nvPr>
+        </p:nvSpPr>
+        <p:spPr/>
+      </p:sp>
+      <p:sp>
+        <p:nvSpPr>
+          <p:cNvPr id="3" name="Notes Placeholder 2">
+            <a:extLst>
+              <a:ext uri="{FF2B5EF4-FFF2-40B4-BE49-F238E27FC236}">
+                <a16:creationId xmlns:a16="http://schemas.microsoft.com/office/drawing/2014/main" id="{43D8E9D8-F917-FB6C-90F1-E294934CF0A9}"/>
+              </a:ext>
+            </a:extLst>
+          </p:cNvPr>
+          <p:cNvSpPr>
+            <a:spLocks noGrp="1"/>
+          </p:cNvSpPr>
+          <p:nvPr>
+            <p:ph type="body" idx="1"/>
+          </p:nvPr>
+        </p:nvSpPr>
+        <p:spPr/>
+        <p:txBody>
+          <a:bodyPr/>
+          <a:lstStyle/>
+          <a:p>
+            <a:endParaRPr lang="en-GB" dirty="0"/>
+          </a:p>
+        </p:txBody>
+      </p:sp>
+      <p:sp>
+        <p:nvSpPr>
+          <p:cNvPr id="4" name="Slide Number Placeholder 3">
+            <a:extLst>
+              <a:ext uri="{FF2B5EF4-FFF2-40B4-BE49-F238E27FC236}">
+                <a16:creationId xmlns:a16="http://schemas.microsoft.com/office/drawing/2014/main" id="{24A4C3BB-92E5-C70D-7993-FD9F0C41BE0F}"/>
+              </a:ext>
+            </a:extLst>
+          </p:cNvPr>
+          <p:cNvSpPr>
+            <a:spLocks noGrp="1"/>
+          </p:cNvSpPr>
+          <p:nvPr>
+            <p:ph type="sldNum" sz="quarter" idx="5"/>
+          </p:nvPr>
+        </p:nvSpPr>
+        <p:spPr/>
+        <p:txBody>
+          <a:bodyPr/>
+          <a:lstStyle/>
+          <a:p>
+            <a:fld id="{F74E179E-53CC-44C3-B266-BA8C753902EB}" type="slidenum">
+              <a:rPr lang="hu-HU" smtClean="0"/>
               <a:t>9</a:t>
+            </a:fld>
+            <a:endParaRPr lang="hu-HU"/>
+          </a:p>
+        </p:txBody>
+      </p:sp>
+    </p:spTree>
+    <p:extLst>
+      <p:ext uri="{BB962C8B-B14F-4D97-AF65-F5344CB8AC3E}">
+        <p14:creationId xmlns:p14="http://schemas.microsoft.com/office/powerpoint/2010/main" val="1045112015"/>
+      </p:ext>
+    </p:extLst>
+  </p:cSld>
+  <p:clrMapOvr>
+    <a:masterClrMapping/>
+  </p:clrMapOvr>
+</p:notes>
+</file>
+
+<file path=ppt/notesSlides/notesSlide8.xml><?xml version="1.0" encoding="utf-8"?>
+<p:notes xmlns:a="http://schemas.openxmlformats.org/drawingml/2006/main" xmlns:r="http://schemas.openxmlformats.org/officeDocument/2006/relationships" xmlns:p="http://schemas.openxmlformats.org/presentationml/2006/main">
+  <p:cSld>
+    <p:spTree>
+      <p:nvGrpSpPr>
+        <p:cNvPr id="1" name=""/>
+        <p:cNvGrpSpPr/>
+        <p:nvPr/>
+      </p:nvGrpSpPr>
+      <p:grpSpPr>
+        <a:xfrm>
+          <a:off x="0" y="0"/>
+          <a:ext cx="0" cy="0"/>
+          <a:chOff x="0" y="0"/>
+          <a:chExt cx="0" cy="0"/>
+        </a:xfrm>
+      </p:grpSpPr>
+      <p:sp>
+        <p:nvSpPr>
+          <p:cNvPr id="2" name="Slide Image Placeholder 1"/>
+          <p:cNvSpPr>
+            <a:spLocks noGrp="1" noRot="1" noChangeAspect="1"/>
+          </p:cNvSpPr>
+          <p:nvPr>
+            <p:ph type="sldImg"/>
+          </p:nvPr>
+        </p:nvSpPr>
+        <p:spPr/>
+      </p:sp>
+      <p:sp>
+        <p:nvSpPr>
+          <p:cNvPr id="3" name="Notes Placeholder 2"/>
+          <p:cNvSpPr>
+            <a:spLocks noGrp="1"/>
+          </p:cNvSpPr>
+          <p:nvPr>
+            <p:ph type="body" idx="1"/>
+          </p:nvPr>
+        </p:nvSpPr>
+        <p:spPr/>
+        <p:txBody>
+          <a:bodyPr/>
+          <a:lstStyle/>
+          <a:p>
+            <a:r>
+              <a:rPr lang="hu-HU" dirty="0"/>
+              <a:t>? - https://www.freepik.com/premium-photo/fire-alphabet-question-mark-isolated-black-background_23682027.htm#page=2&amp;query=FIRE&amp;position=32&amp;from_view=author&amp;uuid=a48ed73a-a3ec-4063-ab27-5a739e530915</a:t>
+            </a:r>
+          </a:p>
+        </p:txBody>
+      </p:sp>
+      <p:sp>
+        <p:nvSpPr>
+          <p:cNvPr id="4" name="Slide Number Placeholder 3"/>
+          <p:cNvSpPr>
+            <a:spLocks noGrp="1"/>
+          </p:cNvSpPr>
+          <p:nvPr>
+            <p:ph type="sldNum" sz="quarter" idx="5"/>
+          </p:nvPr>
+        </p:nvSpPr>
+        <p:spPr/>
+        <p:txBody>
+          <a:bodyPr/>
+          <a:lstStyle/>
+          <a:p>
+            <a:fld id="{F74E179E-53CC-44C3-B266-BA8C753902EB}" type="slidenum">
+              <a:rPr lang="hu-HU" smtClean="0"/>
+              <a:t>13</a:t>
             </a:fld>
             <a:endParaRPr lang="hu-HU"/>
           </a:p>
@@ -5889,61 +7866,6 @@
       </p:sp>
       <p:sp>
         <p:nvSpPr>
-          <p:cNvPr id="8" name="TextBox 7">
-            <a:extLst>
-              <a:ext uri="{FF2B5EF4-FFF2-40B4-BE49-F238E27FC236}">
-                <a16:creationId xmlns:a16="http://schemas.microsoft.com/office/drawing/2014/main" id="{D3FBF422-5977-03DA-DA15-CF3671C7B045}"/>
-              </a:ext>
-            </a:extLst>
-          </p:cNvPr>
-          <p:cNvSpPr txBox="1"/>
-          <p:nvPr/>
-        </p:nvSpPr>
-        <p:spPr>
-          <a:xfrm>
-            <a:off x="6096000" y="6211669"/>
-            <a:ext cx="6187493" cy="646331"/>
-          </a:xfrm>
-          <a:prstGeom prst="rect">
-            <a:avLst/>
-          </a:prstGeom>
-          <a:noFill/>
-        </p:spPr>
-        <p:txBody>
-          <a:bodyPr wrap="square" rtlCol="0">
-            <a:spAutoFit/>
-          </a:bodyPr>
-          <a:lstStyle/>
-          <a:p>
-            <a:r>
-              <a:rPr lang="hu-HU" dirty="0" err="1"/>
-              <a:t>Cyber</a:t>
-            </a:r>
-            <a:r>
-              <a:rPr lang="hu-HU" dirty="0"/>
-              <a:t> </a:t>
-            </a:r>
-            <a:r>
-              <a:rPr lang="hu-HU" dirty="0" err="1"/>
-              <a:t>Threat</a:t>
-            </a:r>
-            <a:r>
-              <a:rPr lang="hu-HU" dirty="0"/>
-              <a:t> </a:t>
-            </a:r>
-            <a:r>
-              <a:rPr lang="hu-HU" dirty="0" err="1"/>
-              <a:t>Intelligence</a:t>
-            </a:r>
-            <a:r>
-              <a:rPr lang="hu-HU" dirty="0"/>
-              <a:t> (CTI) aktuális kérdései Tudományos – Szakmai Konferencia NMHH, EIVOK-47</a:t>
-            </a:r>
-          </a:p>
-        </p:txBody>
-      </p:sp>
-      <p:sp>
-        <p:nvSpPr>
           <p:cNvPr id="9" name="TextBox 8">
             <a:extLst>
               <a:ext uri="{FF2B5EF4-FFF2-40B4-BE49-F238E27FC236}">
@@ -5985,6 +7907,2329 @@
     <p:extLst>
       <p:ext uri="{BB962C8B-B14F-4D97-AF65-F5344CB8AC3E}">
         <p14:creationId xmlns:p14="http://schemas.microsoft.com/office/powerpoint/2010/main" val="3280430302"/>
+      </p:ext>
+    </p:extLst>
+  </p:cSld>
+  <p:clrMapOvr>
+    <a:masterClrMapping/>
+  </p:clrMapOvr>
+</p:sld>
+</file>
+
+<file path=ppt/slides/slide10.xml><?xml version="1.0" encoding="utf-8"?>
+<p:sld xmlns:a="http://schemas.openxmlformats.org/drawingml/2006/main" xmlns:r="http://schemas.openxmlformats.org/officeDocument/2006/relationships" xmlns:p="http://schemas.openxmlformats.org/presentationml/2006/main">
+  <p:cSld>
+    <p:spTree>
+      <p:nvGrpSpPr>
+        <p:cNvPr id="1" name="">
+          <a:extLst>
+            <a:ext uri="{FF2B5EF4-FFF2-40B4-BE49-F238E27FC236}">
+              <a16:creationId xmlns:a16="http://schemas.microsoft.com/office/drawing/2014/main" id="{7E8A5C87-374F-9762-4CAC-CBFCCD83032A}"/>
+            </a:ext>
+          </a:extLst>
+        </p:cNvPr>
+        <p:cNvGrpSpPr/>
+        <p:nvPr/>
+      </p:nvGrpSpPr>
+      <p:grpSpPr>
+        <a:xfrm>
+          <a:off x="0" y="0"/>
+          <a:ext cx="0" cy="0"/>
+          <a:chOff x="0" y="0"/>
+          <a:chExt cx="0" cy="0"/>
+        </a:xfrm>
+      </p:grpSpPr>
+      <p:pic>
+        <p:nvPicPr>
+          <p:cNvPr id="5" name="Picture 2">
+            <a:extLst>
+              <a:ext uri="{FF2B5EF4-FFF2-40B4-BE49-F238E27FC236}">
+                <a16:creationId xmlns:a16="http://schemas.microsoft.com/office/drawing/2014/main" id="{0B840D71-FF35-FA9D-8EBA-85DFBCA448E5}"/>
+              </a:ext>
+            </a:extLst>
+          </p:cNvPr>
+          <p:cNvPicPr>
+            <a:picLocks noChangeAspect="1" noChangeArrowheads="1"/>
+          </p:cNvPicPr>
+          <p:nvPr/>
+        </p:nvPicPr>
+        <p:blipFill>
+          <a:blip r:embed="rId2">
+            <a:extLst>
+              <a:ext uri="{28A0092B-C50C-407E-A947-70E740481C1C}">
+                <a14:useLocalDpi xmlns:a14="http://schemas.microsoft.com/office/drawing/2010/main" val="0"/>
+              </a:ext>
+            </a:extLst>
+          </a:blip>
+          <a:srcRect/>
+          <a:stretch>
+            <a:fillRect/>
+          </a:stretch>
+        </p:blipFill>
+        <p:spPr bwMode="auto">
+          <a:xfrm>
+            <a:off x="0" y="0"/>
+            <a:ext cx="2143125" cy="2143125"/>
+          </a:xfrm>
+          <a:prstGeom prst="rect">
+            <a:avLst/>
+          </a:prstGeom>
+          <a:noFill/>
+          <a:extLst>
+            <a:ext uri="{909E8E84-426E-40DD-AFC4-6F175D3DCCD1}">
+              <a14:hiddenFill xmlns:a14="http://schemas.microsoft.com/office/drawing/2010/main">
+                <a:solidFill>
+                  <a:srgbClr val="FFFFFF"/>
+                </a:solidFill>
+              </a14:hiddenFill>
+            </a:ext>
+          </a:extLst>
+        </p:spPr>
+      </p:pic>
+      <p:sp>
+        <p:nvSpPr>
+          <p:cNvPr id="6" name="TextBox 5">
+            <a:extLst>
+              <a:ext uri="{FF2B5EF4-FFF2-40B4-BE49-F238E27FC236}">
+                <a16:creationId xmlns:a16="http://schemas.microsoft.com/office/drawing/2014/main" id="{99A406E6-1C41-5AE0-39BC-246F2C018135}"/>
+              </a:ext>
+            </a:extLst>
+          </p:cNvPr>
+          <p:cNvSpPr txBox="1"/>
+          <p:nvPr/>
+        </p:nvSpPr>
+        <p:spPr>
+          <a:xfrm>
+            <a:off x="1872998" y="370214"/>
+            <a:ext cx="3241593" cy="769441"/>
+          </a:xfrm>
+          <a:prstGeom prst="rect">
+            <a:avLst/>
+          </a:prstGeom>
+          <a:noFill/>
+        </p:spPr>
+        <p:txBody>
+          <a:bodyPr wrap="none" rtlCol="0">
+            <a:spAutoFit/>
+          </a:bodyPr>
+          <a:lstStyle/>
+          <a:p>
+            <a:r>
+              <a:rPr lang="hu-HU" sz="4400" dirty="0">
+                <a:highlight>
+                  <a:srgbClr val="FF3F5A"/>
+                </a:highlight>
+              </a:rPr>
+              <a:t>Kollaboráció</a:t>
+            </a:r>
+          </a:p>
+        </p:txBody>
+      </p:sp>
+      <p:pic>
+        <p:nvPicPr>
+          <p:cNvPr id="2050" name="Picture 2" descr="Seconsys">
+            <a:extLst>
+              <a:ext uri="{FF2B5EF4-FFF2-40B4-BE49-F238E27FC236}">
+                <a16:creationId xmlns:a16="http://schemas.microsoft.com/office/drawing/2014/main" id="{93B9DC35-8351-0F55-DF83-7DD7434B75BB}"/>
+              </a:ext>
+            </a:extLst>
+          </p:cNvPr>
+          <p:cNvPicPr>
+            <a:picLocks noChangeAspect="1" noChangeArrowheads="1"/>
+          </p:cNvPicPr>
+          <p:nvPr/>
+        </p:nvPicPr>
+        <p:blipFill>
+          <a:blip r:embed="rId3">
+            <a:extLst>
+              <a:ext uri="{28A0092B-C50C-407E-A947-70E740481C1C}">
+                <a14:useLocalDpi xmlns:a14="http://schemas.microsoft.com/office/drawing/2010/main" val="0"/>
+              </a:ext>
+            </a:extLst>
+          </a:blip>
+          <a:srcRect/>
+          <a:stretch>
+            <a:fillRect/>
+          </a:stretch>
+        </p:blipFill>
+        <p:spPr bwMode="auto">
+          <a:xfrm>
+            <a:off x="1602854" y="1313966"/>
+            <a:ext cx="2433545" cy="1277611"/>
+          </a:xfrm>
+          <a:prstGeom prst="rect">
+            <a:avLst/>
+          </a:prstGeom>
+          <a:noFill/>
+          <a:extLst>
+            <a:ext uri="{909E8E84-426E-40DD-AFC4-6F175D3DCCD1}">
+              <a14:hiddenFill xmlns:a14="http://schemas.microsoft.com/office/drawing/2010/main">
+                <a:solidFill>
+                  <a:srgbClr val="FFFFFF"/>
+                </a:solidFill>
+              </a14:hiddenFill>
+            </a:ext>
+          </a:extLst>
+        </p:spPr>
+      </p:pic>
+      <p:sp>
+        <p:nvSpPr>
+          <p:cNvPr id="9" name="TextBox 8">
+            <a:extLst>
+              <a:ext uri="{FF2B5EF4-FFF2-40B4-BE49-F238E27FC236}">
+                <a16:creationId xmlns:a16="http://schemas.microsoft.com/office/drawing/2014/main" id="{78CA2951-E2F7-9926-CADA-75DFD699FF36}"/>
+              </a:ext>
+            </a:extLst>
+          </p:cNvPr>
+          <p:cNvSpPr txBox="1"/>
+          <p:nvPr/>
+        </p:nvSpPr>
+        <p:spPr>
+          <a:xfrm>
+            <a:off x="5114591" y="1414900"/>
+            <a:ext cx="5881738" cy="1200329"/>
+          </a:xfrm>
+          <a:prstGeom prst="rect">
+            <a:avLst/>
+          </a:prstGeom>
+          <a:noFill/>
+        </p:spPr>
+        <p:txBody>
+          <a:bodyPr wrap="none" rtlCol="0">
+            <a:spAutoFit/>
+          </a:bodyPr>
+          <a:lstStyle/>
+          <a:p>
+            <a:r>
+              <a:rPr lang="hu-HU" dirty="0">
+                <a:highlight>
+                  <a:srgbClr val="FF3F5A"/>
+                </a:highlight>
+              </a:rPr>
+              <a:t>IPARI ÉS OT RENDSZEREKKEL KAPCSOLATOS HÍREK</a:t>
+            </a:r>
+          </a:p>
+          <a:p>
+            <a:pPr marL="285750" indent="-285750">
+              <a:buFontTx/>
+              <a:buChar char="-"/>
+            </a:pPr>
+            <a:r>
+              <a:rPr lang="hu-HU" dirty="0">
+                <a:highlight>
+                  <a:srgbClr val="000000"/>
+                </a:highlight>
+              </a:rPr>
+              <a:t>HAVI 1-2 CIKK</a:t>
+            </a:r>
+          </a:p>
+          <a:p>
+            <a:pPr marL="285750" indent="-285750">
+              <a:buFontTx/>
+              <a:buChar char="-"/>
+            </a:pPr>
+            <a:r>
+              <a:rPr lang="hu-HU" dirty="0">
+                <a:highlight>
+                  <a:srgbClr val="000000"/>
+                </a:highlight>
+              </a:rPr>
+              <a:t>SECONSYS FÓKUSZBAN (VILLAMOSENERGIA ÁGAZAT)</a:t>
+            </a:r>
+          </a:p>
+          <a:p>
+            <a:pPr marL="285750" indent="-285750">
+              <a:buFontTx/>
+              <a:buChar char="-"/>
+            </a:pPr>
+            <a:r>
+              <a:rPr lang="en-GB" dirty="0">
+                <a:hlinkClick r:id="rId4"/>
+              </a:rPr>
+              <a:t>HTTPS://YANAC.HU/TAG/SECONSYS/</a:t>
+            </a:r>
+            <a:endParaRPr lang="hu-HU" dirty="0">
+              <a:highlight>
+                <a:srgbClr val="000000"/>
+              </a:highlight>
+            </a:endParaRPr>
+          </a:p>
+        </p:txBody>
+      </p:sp>
+      <p:pic>
+        <p:nvPicPr>
+          <p:cNvPr id="11" name="Picture 2" descr="Photo fire alphabet question mark isolated on black background.">
+            <a:extLst>
+              <a:ext uri="{FF2B5EF4-FFF2-40B4-BE49-F238E27FC236}">
+                <a16:creationId xmlns:a16="http://schemas.microsoft.com/office/drawing/2014/main" id="{924BE81E-51BA-D4E0-6E7D-221AE152726E}"/>
+              </a:ext>
+            </a:extLst>
+          </p:cNvPr>
+          <p:cNvPicPr>
+            <a:picLocks noChangeAspect="1" noChangeArrowheads="1"/>
+          </p:cNvPicPr>
+          <p:nvPr/>
+        </p:nvPicPr>
+        <p:blipFill>
+          <a:blip r:embed="rId5">
+            <a:extLst>
+              <a:ext uri="{28A0092B-C50C-407E-A947-70E740481C1C}">
+                <a14:useLocalDpi xmlns:a14="http://schemas.microsoft.com/office/drawing/2010/main" val="0"/>
+              </a:ext>
+            </a:extLst>
+          </a:blip>
+          <a:srcRect/>
+          <a:stretch>
+            <a:fillRect/>
+          </a:stretch>
+        </p:blipFill>
+        <p:spPr bwMode="auto">
+          <a:xfrm>
+            <a:off x="2355174" y="3068785"/>
+            <a:ext cx="1469160" cy="1469160"/>
+          </a:xfrm>
+          <a:prstGeom prst="rect">
+            <a:avLst/>
+          </a:prstGeom>
+          <a:noFill/>
+          <a:extLst>
+            <a:ext uri="{909E8E84-426E-40DD-AFC4-6F175D3DCCD1}">
+              <a14:hiddenFill xmlns:a14="http://schemas.microsoft.com/office/drawing/2010/main">
+                <a:solidFill>
+                  <a:srgbClr val="FFFFFF"/>
+                </a:solidFill>
+              </a14:hiddenFill>
+            </a:ext>
+          </a:extLst>
+        </p:spPr>
+      </p:pic>
+      <p:sp>
+        <p:nvSpPr>
+          <p:cNvPr id="12" name="TextBox 11">
+            <a:extLst>
+              <a:ext uri="{FF2B5EF4-FFF2-40B4-BE49-F238E27FC236}">
+                <a16:creationId xmlns:a16="http://schemas.microsoft.com/office/drawing/2014/main" id="{F1C2238F-9C7A-0830-EC3A-920592F21ED6}"/>
+              </a:ext>
+            </a:extLst>
+          </p:cNvPr>
+          <p:cNvSpPr txBox="1"/>
+          <p:nvPr/>
+        </p:nvSpPr>
+        <p:spPr>
+          <a:xfrm>
+            <a:off x="5114591" y="3063273"/>
+            <a:ext cx="5595314" cy="1754326"/>
+          </a:xfrm>
+          <a:prstGeom prst="rect">
+            <a:avLst/>
+          </a:prstGeom>
+          <a:noFill/>
+        </p:spPr>
+        <p:txBody>
+          <a:bodyPr wrap="none" rtlCol="0">
+            <a:spAutoFit/>
+          </a:bodyPr>
+          <a:lstStyle/>
+          <a:p>
+            <a:r>
+              <a:rPr lang="hu-HU" dirty="0">
+                <a:highlight>
+                  <a:srgbClr val="FF3F5A"/>
+                </a:highlight>
+              </a:rPr>
+              <a:t>NÉVTELEN KIBERBIZTONSÁGI CÉG</a:t>
+            </a:r>
+          </a:p>
+          <a:p>
+            <a:pPr marL="285750" indent="-285750">
+              <a:buFontTx/>
+              <a:buChar char="-"/>
+            </a:pPr>
+            <a:r>
+              <a:rPr lang="hu-HU" dirty="0">
+                <a:highlight>
+                  <a:srgbClr val="000000"/>
+                </a:highlight>
+              </a:rPr>
+              <a:t>HETI HÍRLEVÉL</a:t>
+            </a:r>
+          </a:p>
+          <a:p>
+            <a:pPr marL="285750" indent="-285750">
+              <a:buFontTx/>
+              <a:buChar char="-"/>
+            </a:pPr>
+            <a:r>
+              <a:rPr lang="hu-HU" dirty="0"/>
+              <a:t>FENYEGETÉSI SZEREPLŐK ÉS KAMPÁNYOK</a:t>
+            </a:r>
+          </a:p>
+          <a:p>
+            <a:pPr marL="285750" indent="-285750">
+              <a:buFontTx/>
+              <a:buChar char="-"/>
+            </a:pPr>
+            <a:r>
+              <a:rPr lang="hu-HU" dirty="0"/>
+              <a:t>TÁMADÁSI TECHNIKÁK ÉS MALWARE</a:t>
+            </a:r>
+          </a:p>
+          <a:p>
+            <a:pPr marL="285750" indent="-285750">
+              <a:buFontTx/>
+              <a:buChar char="-"/>
+            </a:pPr>
+            <a:r>
+              <a:rPr lang="hu-HU" dirty="0"/>
+              <a:t>OT / KRITIKUS INFRASTRUKTÚRA</a:t>
+            </a:r>
+          </a:p>
+          <a:p>
+            <a:pPr marL="285750" indent="-285750">
+              <a:buFontTx/>
+              <a:buChar char="-"/>
+            </a:pPr>
+            <a:r>
+              <a:rPr lang="hu-HU" dirty="0"/>
+              <a:t>KIBERBIZTONSÁGI IRÁNYÍTÁS, VÉDELEM ÉS POLICY</a:t>
+            </a:r>
+            <a:endParaRPr lang="hu-HU" dirty="0">
+              <a:highlight>
+                <a:srgbClr val="000000"/>
+              </a:highlight>
+            </a:endParaRPr>
+          </a:p>
+        </p:txBody>
+      </p:sp>
+      <p:pic>
+        <p:nvPicPr>
+          <p:cNvPr id="2054" name="Picture 6" descr="CyberSecTV.eu - The EU Cybersecurity Streaming Channel">
+            <a:extLst>
+              <a:ext uri="{FF2B5EF4-FFF2-40B4-BE49-F238E27FC236}">
+                <a16:creationId xmlns:a16="http://schemas.microsoft.com/office/drawing/2014/main" id="{F0833099-9CB7-8E0A-4EC0-63D99B4776A5}"/>
+              </a:ext>
+            </a:extLst>
+          </p:cNvPr>
+          <p:cNvPicPr>
+            <a:picLocks noChangeAspect="1" noChangeArrowheads="1"/>
+          </p:cNvPicPr>
+          <p:nvPr/>
+        </p:nvPicPr>
+        <p:blipFill>
+          <a:blip r:embed="rId6">
+            <a:extLst>
+              <a:ext uri="{28A0092B-C50C-407E-A947-70E740481C1C}">
+                <a14:useLocalDpi xmlns:a14="http://schemas.microsoft.com/office/drawing/2010/main" val="0"/>
+              </a:ext>
+            </a:extLst>
+          </a:blip>
+          <a:srcRect/>
+          <a:stretch>
+            <a:fillRect/>
+          </a:stretch>
+        </p:blipFill>
+        <p:spPr bwMode="auto">
+          <a:xfrm>
+            <a:off x="1872998" y="5320763"/>
+            <a:ext cx="2437750" cy="731325"/>
+          </a:xfrm>
+          <a:prstGeom prst="rect">
+            <a:avLst/>
+          </a:prstGeom>
+          <a:noFill/>
+          <a:extLst>
+            <a:ext uri="{909E8E84-426E-40DD-AFC4-6F175D3DCCD1}">
+              <a14:hiddenFill xmlns:a14="http://schemas.microsoft.com/office/drawing/2010/main">
+                <a:solidFill>
+                  <a:srgbClr val="FFFFFF"/>
+                </a:solidFill>
+              </a14:hiddenFill>
+            </a:ext>
+          </a:extLst>
+        </p:spPr>
+      </p:pic>
+      <p:sp>
+        <p:nvSpPr>
+          <p:cNvPr id="14" name="TextBox 13">
+            <a:extLst>
+              <a:ext uri="{FF2B5EF4-FFF2-40B4-BE49-F238E27FC236}">
+                <a16:creationId xmlns:a16="http://schemas.microsoft.com/office/drawing/2014/main" id="{765C0EB9-D566-B67B-40CB-50604CD4DBA1}"/>
+              </a:ext>
+            </a:extLst>
+          </p:cNvPr>
+          <p:cNvSpPr txBox="1"/>
+          <p:nvPr/>
+        </p:nvSpPr>
+        <p:spPr>
+          <a:xfrm>
+            <a:off x="5114591" y="5265643"/>
+            <a:ext cx="4460003" cy="923330"/>
+          </a:xfrm>
+          <a:prstGeom prst="rect">
+            <a:avLst/>
+          </a:prstGeom>
+          <a:noFill/>
+        </p:spPr>
+        <p:txBody>
+          <a:bodyPr wrap="none" rtlCol="0">
+            <a:spAutoFit/>
+          </a:bodyPr>
+          <a:lstStyle/>
+          <a:p>
+            <a:r>
+              <a:rPr lang="hu-HU" dirty="0">
+                <a:highlight>
+                  <a:srgbClr val="FF3F5A"/>
+                </a:highlight>
+              </a:rPr>
+              <a:t>CyberSecTV.eu</a:t>
+            </a:r>
+          </a:p>
+          <a:p>
+            <a:pPr marL="285750" indent="-285750">
+              <a:buFontTx/>
+              <a:buChar char="-"/>
+            </a:pPr>
+            <a:r>
+              <a:rPr lang="hu-HU" dirty="0">
+                <a:highlight>
+                  <a:srgbClr val="000000"/>
+                </a:highlight>
+              </a:rPr>
+              <a:t>NEM FORMALIZÁLT, DE BARÁTI VISZONY</a:t>
+            </a:r>
+          </a:p>
+          <a:p>
+            <a:pPr marL="285750" indent="-285750">
+              <a:buFontTx/>
+              <a:buChar char="-"/>
+            </a:pPr>
+            <a:r>
+              <a:rPr lang="hu-HU" dirty="0">
+                <a:highlight>
+                  <a:srgbClr val="000000"/>
+                </a:highlight>
+              </a:rPr>
+              <a:t>ANYAGOK ÁTVÉTELE</a:t>
+            </a:r>
+          </a:p>
+        </p:txBody>
+      </p:sp>
+    </p:spTree>
+    <p:extLst>
+      <p:ext uri="{BB962C8B-B14F-4D97-AF65-F5344CB8AC3E}">
+        <p14:creationId xmlns:p14="http://schemas.microsoft.com/office/powerpoint/2010/main" val="3649624372"/>
+      </p:ext>
+    </p:extLst>
+  </p:cSld>
+  <p:clrMapOvr>
+    <a:masterClrMapping/>
+  </p:clrMapOvr>
+</p:sld>
+</file>
+
+<file path=ppt/slides/slide11.xml><?xml version="1.0" encoding="utf-8"?>
+<p:sld xmlns:a="http://schemas.openxmlformats.org/drawingml/2006/main" xmlns:r="http://schemas.openxmlformats.org/officeDocument/2006/relationships" xmlns:p="http://schemas.openxmlformats.org/presentationml/2006/main">
+  <p:cSld>
+    <p:spTree>
+      <p:nvGrpSpPr>
+        <p:cNvPr id="1" name=""/>
+        <p:cNvGrpSpPr/>
+        <p:nvPr/>
+      </p:nvGrpSpPr>
+      <p:grpSpPr>
+        <a:xfrm>
+          <a:off x="0" y="0"/>
+          <a:ext cx="0" cy="0"/>
+          <a:chOff x="0" y="0"/>
+          <a:chExt cx="0" cy="0"/>
+        </a:xfrm>
+      </p:grpSpPr>
+      <p:pic>
+        <p:nvPicPr>
+          <p:cNvPr id="5" name="Picture 2">
+            <a:extLst>
+              <a:ext uri="{FF2B5EF4-FFF2-40B4-BE49-F238E27FC236}">
+                <a16:creationId xmlns:a16="http://schemas.microsoft.com/office/drawing/2014/main" id="{D2B6620E-CC54-212B-EBD7-9559AF590806}"/>
+              </a:ext>
+            </a:extLst>
+          </p:cNvPr>
+          <p:cNvPicPr>
+            <a:picLocks noChangeAspect="1" noChangeArrowheads="1"/>
+          </p:cNvPicPr>
+          <p:nvPr/>
+        </p:nvPicPr>
+        <p:blipFill>
+          <a:blip r:embed="rId2">
+            <a:extLst>
+              <a:ext uri="{28A0092B-C50C-407E-A947-70E740481C1C}">
+                <a14:useLocalDpi xmlns:a14="http://schemas.microsoft.com/office/drawing/2010/main" val="0"/>
+              </a:ext>
+            </a:extLst>
+          </a:blip>
+          <a:srcRect/>
+          <a:stretch>
+            <a:fillRect/>
+          </a:stretch>
+        </p:blipFill>
+        <p:spPr bwMode="auto">
+          <a:xfrm>
+            <a:off x="0" y="0"/>
+            <a:ext cx="2143125" cy="2143125"/>
+          </a:xfrm>
+          <a:prstGeom prst="rect">
+            <a:avLst/>
+          </a:prstGeom>
+          <a:noFill/>
+          <a:extLst>
+            <a:ext uri="{909E8E84-426E-40DD-AFC4-6F175D3DCCD1}">
+              <a14:hiddenFill xmlns:a14="http://schemas.microsoft.com/office/drawing/2010/main">
+                <a:solidFill>
+                  <a:srgbClr val="FFFFFF"/>
+                </a:solidFill>
+              </a14:hiddenFill>
+            </a:ext>
+          </a:extLst>
+        </p:spPr>
+      </p:pic>
+      <p:sp>
+        <p:nvSpPr>
+          <p:cNvPr id="6" name="TextBox 5">
+            <a:extLst>
+              <a:ext uri="{FF2B5EF4-FFF2-40B4-BE49-F238E27FC236}">
+                <a16:creationId xmlns:a16="http://schemas.microsoft.com/office/drawing/2014/main" id="{B6FF17A8-2A06-5C7C-FFD6-5D761233B5BC}"/>
+              </a:ext>
+            </a:extLst>
+          </p:cNvPr>
+          <p:cNvSpPr txBox="1"/>
+          <p:nvPr/>
+        </p:nvSpPr>
+        <p:spPr>
+          <a:xfrm>
+            <a:off x="1872998" y="370214"/>
+            <a:ext cx="3394199" cy="769441"/>
+          </a:xfrm>
+          <a:prstGeom prst="rect">
+            <a:avLst/>
+          </a:prstGeom>
+          <a:noFill/>
+        </p:spPr>
+        <p:txBody>
+          <a:bodyPr wrap="none" rtlCol="0">
+            <a:spAutoFit/>
+          </a:bodyPr>
+          <a:lstStyle/>
+          <a:p>
+            <a:r>
+              <a:rPr lang="hu-HU" sz="4400" dirty="0">
+                <a:highlight>
+                  <a:srgbClr val="FF3F5A"/>
+                </a:highlight>
+              </a:rPr>
+              <a:t>Hová, Merre?</a:t>
+            </a:r>
+          </a:p>
+        </p:txBody>
+      </p:sp>
+      <p:sp>
+        <p:nvSpPr>
+          <p:cNvPr id="3" name="TextBox 2">
+            <a:extLst>
+              <a:ext uri="{FF2B5EF4-FFF2-40B4-BE49-F238E27FC236}">
+                <a16:creationId xmlns:a16="http://schemas.microsoft.com/office/drawing/2014/main" id="{68CAA59D-5BC6-4AE6-CBDC-3199CD5E4859}"/>
+              </a:ext>
+            </a:extLst>
+          </p:cNvPr>
+          <p:cNvSpPr txBox="1"/>
+          <p:nvPr/>
+        </p:nvSpPr>
+        <p:spPr>
+          <a:xfrm>
+            <a:off x="6295944" y="293269"/>
+            <a:ext cx="3210128" cy="1754326"/>
+          </a:xfrm>
+          <a:prstGeom prst="rect">
+            <a:avLst/>
+          </a:prstGeom>
+          <a:noFill/>
+        </p:spPr>
+        <p:txBody>
+          <a:bodyPr wrap="square" rtlCol="0">
+            <a:spAutoFit/>
+          </a:bodyPr>
+          <a:lstStyle/>
+          <a:p>
+            <a:r>
+              <a:rPr lang="hu-HU" dirty="0">
+                <a:highlight>
+                  <a:srgbClr val="FF3F5A"/>
+                </a:highlight>
+              </a:rPr>
+              <a:t>SZERKESZTŐK</a:t>
+            </a:r>
+          </a:p>
+          <a:p>
+            <a:pPr marL="285750" indent="-285750">
+              <a:buFontTx/>
+              <a:buChar char="-"/>
+            </a:pPr>
+            <a:r>
+              <a:rPr lang="hu-HU" dirty="0"/>
+              <a:t>TÖBB CIKK</a:t>
+            </a:r>
+          </a:p>
+          <a:p>
+            <a:pPr marL="285750" indent="-285750">
+              <a:buFontTx/>
+              <a:buChar char="-"/>
+            </a:pPr>
+            <a:r>
+              <a:rPr lang="hu-HU" dirty="0"/>
+              <a:t>NAGYOBB TERJEDELEM</a:t>
+            </a:r>
+          </a:p>
+          <a:p>
+            <a:pPr marL="285750" indent="-285750">
+              <a:buFontTx/>
+              <a:buChar char="-"/>
+            </a:pPr>
+            <a:r>
+              <a:rPr lang="hu-HU" dirty="0"/>
+              <a:t>TÖBB ELEMZÉS</a:t>
+            </a:r>
+          </a:p>
+          <a:p>
+            <a:pPr marL="285750" indent="-285750">
+              <a:buFontTx/>
+              <a:buChar char="-"/>
+            </a:pPr>
+            <a:r>
+              <a:rPr lang="hu-HU" dirty="0"/>
+              <a:t>FOLYAMATOS MŰKÖDÉS</a:t>
+            </a:r>
+          </a:p>
+          <a:p>
+            <a:pPr marL="285750" indent="-285750">
+              <a:buFontTx/>
+              <a:buChar char="-"/>
+            </a:pPr>
+            <a:endParaRPr lang="hu-HU" dirty="0"/>
+          </a:p>
+        </p:txBody>
+      </p:sp>
+      <p:sp>
+        <p:nvSpPr>
+          <p:cNvPr id="4" name="TextBox 3">
+            <a:extLst>
+              <a:ext uri="{FF2B5EF4-FFF2-40B4-BE49-F238E27FC236}">
+                <a16:creationId xmlns:a16="http://schemas.microsoft.com/office/drawing/2014/main" id="{702EECAA-27BA-E85F-CEE7-5500C7FFC967}"/>
+              </a:ext>
+            </a:extLst>
+          </p:cNvPr>
+          <p:cNvSpPr txBox="1"/>
+          <p:nvPr/>
+        </p:nvSpPr>
+        <p:spPr>
+          <a:xfrm>
+            <a:off x="9782055" y="293269"/>
+            <a:ext cx="3210128" cy="923330"/>
+          </a:xfrm>
+          <a:prstGeom prst="rect">
+            <a:avLst/>
+          </a:prstGeom>
+          <a:noFill/>
+        </p:spPr>
+        <p:txBody>
+          <a:bodyPr wrap="square" rtlCol="0">
+            <a:spAutoFit/>
+          </a:bodyPr>
+          <a:lstStyle/>
+          <a:p>
+            <a:r>
+              <a:rPr lang="hu-HU" dirty="0">
+                <a:highlight>
+                  <a:srgbClr val="FF3F5A"/>
+                </a:highlight>
+              </a:rPr>
+              <a:t>KÖZÖSSÉG</a:t>
+            </a:r>
+          </a:p>
+          <a:p>
+            <a:pPr marL="285750" indent="-285750">
+              <a:buFontTx/>
+              <a:buChar char="-"/>
+            </a:pPr>
+            <a:r>
+              <a:rPr lang="hu-HU" dirty="0"/>
+              <a:t>FORRÁSOK</a:t>
+            </a:r>
+          </a:p>
+          <a:p>
+            <a:pPr marL="285750" indent="-285750">
+              <a:buFontTx/>
+              <a:buChar char="-"/>
+            </a:pPr>
+            <a:r>
+              <a:rPr lang="hu-HU" dirty="0"/>
+              <a:t>HÍRLEVÉL</a:t>
+            </a:r>
+          </a:p>
+        </p:txBody>
+      </p:sp>
+      <p:sp>
+        <p:nvSpPr>
+          <p:cNvPr id="11" name="TextBox 10">
+            <a:extLst>
+              <a:ext uri="{FF2B5EF4-FFF2-40B4-BE49-F238E27FC236}">
+                <a16:creationId xmlns:a16="http://schemas.microsoft.com/office/drawing/2014/main" id="{4808E682-728E-2E84-0048-C19DFE704326}"/>
+              </a:ext>
+            </a:extLst>
+          </p:cNvPr>
+          <p:cNvSpPr txBox="1"/>
+          <p:nvPr/>
+        </p:nvSpPr>
+        <p:spPr>
+          <a:xfrm>
+            <a:off x="176697" y="2836685"/>
+            <a:ext cx="3097482" cy="369332"/>
+          </a:xfrm>
+          <a:prstGeom prst="rect">
+            <a:avLst/>
+          </a:prstGeom>
+          <a:noFill/>
+        </p:spPr>
+        <p:txBody>
+          <a:bodyPr wrap="square">
+            <a:spAutoFit/>
+          </a:bodyPr>
+          <a:lstStyle/>
+          <a:p>
+            <a:r>
+              <a:rPr lang="hu-HU" dirty="0">
+                <a:highlight>
+                  <a:srgbClr val="FF3F5A"/>
+                </a:highlight>
+              </a:rPr>
+              <a:t>SZERKESZTŐT KERESÜNK!!!</a:t>
+            </a:r>
+          </a:p>
+        </p:txBody>
+      </p:sp>
+      <p:sp>
+        <p:nvSpPr>
+          <p:cNvPr id="49" name="TextBox 48">
+            <a:extLst>
+              <a:ext uri="{FF2B5EF4-FFF2-40B4-BE49-F238E27FC236}">
+                <a16:creationId xmlns:a16="http://schemas.microsoft.com/office/drawing/2014/main" id="{0F7C6543-D1D5-F8B6-027D-B95010AF72E9}"/>
+              </a:ext>
+            </a:extLst>
+          </p:cNvPr>
+          <p:cNvSpPr txBox="1"/>
+          <p:nvPr/>
+        </p:nvSpPr>
+        <p:spPr>
+          <a:xfrm>
+            <a:off x="390397" y="3206017"/>
+            <a:ext cx="11277728" cy="3539430"/>
+          </a:xfrm>
+          <a:prstGeom prst="rect">
+            <a:avLst/>
+          </a:prstGeom>
+          <a:noFill/>
+        </p:spPr>
+        <p:txBody>
+          <a:bodyPr wrap="square">
+            <a:spAutoFit/>
+          </a:bodyPr>
+          <a:lstStyle/>
+          <a:p>
+            <a:r>
+              <a:rPr lang="en-GB" sz="1600" dirty="0" err="1"/>
+              <a:t>Társ</a:t>
+            </a:r>
+            <a:r>
+              <a:rPr lang="en-GB" sz="1600" dirty="0"/>
+              <a:t> </a:t>
+            </a:r>
+            <a:r>
+              <a:rPr lang="en-GB" sz="1600" dirty="0" err="1"/>
+              <a:t>szerkesztőt</a:t>
+            </a:r>
+            <a:r>
+              <a:rPr lang="en-GB" sz="1600" dirty="0"/>
+              <a:t>, </a:t>
+            </a:r>
+            <a:r>
+              <a:rPr lang="en-GB" sz="1600" dirty="0" err="1"/>
+              <a:t>szerkesztőket</a:t>
+            </a:r>
+            <a:r>
+              <a:rPr lang="en-GB" sz="1600" dirty="0"/>
+              <a:t>  📖 </a:t>
+            </a:r>
+            <a:r>
+              <a:rPr lang="en-GB" sz="1600" dirty="0" err="1"/>
+              <a:t>keresek</a:t>
+            </a:r>
+            <a:r>
+              <a:rPr lang="en-GB" sz="1600" dirty="0"/>
+              <a:t>, </a:t>
+            </a:r>
+            <a:r>
+              <a:rPr lang="en-GB" sz="1600" dirty="0" err="1"/>
+              <a:t>aki</a:t>
+            </a:r>
+            <a:r>
+              <a:rPr lang="en-GB" sz="1600" dirty="0"/>
+              <a:t>(k) </a:t>
+            </a:r>
+            <a:r>
+              <a:rPr lang="en-GB" sz="1600" dirty="0" err="1"/>
+              <a:t>napi</a:t>
+            </a:r>
+            <a:r>
+              <a:rPr lang="en-GB" sz="1600" dirty="0"/>
+              <a:t> </a:t>
+            </a:r>
+            <a:r>
+              <a:rPr lang="en-GB" sz="1600" dirty="0" err="1"/>
+              <a:t>szinten</a:t>
+            </a:r>
+            <a:r>
+              <a:rPr lang="en-GB" sz="1600" dirty="0"/>
+              <a:t> </a:t>
+            </a:r>
+            <a:r>
+              <a:rPr lang="en-GB" sz="1600" dirty="0" err="1"/>
+              <a:t>követi</a:t>
+            </a:r>
+            <a:r>
+              <a:rPr lang="en-GB" sz="1600" dirty="0"/>
+              <a:t>(k) </a:t>
+            </a:r>
+            <a:r>
+              <a:rPr lang="en-GB" sz="1600" dirty="0" err="1"/>
+              <a:t>az</a:t>
+            </a:r>
+            <a:r>
+              <a:rPr lang="en-GB" sz="1600" dirty="0"/>
+              <a:t> </a:t>
+            </a:r>
+            <a:r>
+              <a:rPr lang="en-GB" sz="1600" dirty="0" err="1"/>
+              <a:t>szakmai</a:t>
+            </a:r>
+            <a:r>
+              <a:rPr lang="en-GB" sz="1600" dirty="0"/>
+              <a:t> </a:t>
+            </a:r>
+            <a:r>
+              <a:rPr lang="en-GB" sz="1600" dirty="0" err="1"/>
+              <a:t>híreket</a:t>
+            </a:r>
+            <a:r>
+              <a:rPr lang="en-GB" sz="1600" dirty="0"/>
+              <a:t> 🗞️ , </a:t>
+            </a:r>
+            <a:r>
+              <a:rPr lang="en-GB" sz="1600" dirty="0" err="1"/>
+              <a:t>és</a:t>
+            </a:r>
+            <a:r>
+              <a:rPr lang="en-GB" sz="1600" dirty="0"/>
+              <a:t> van </a:t>
+            </a:r>
+            <a:r>
+              <a:rPr lang="en-GB" sz="1600" dirty="0" err="1"/>
+              <a:t>hétköznaponta</a:t>
+            </a:r>
+            <a:r>
+              <a:rPr lang="en-GB" sz="1600" dirty="0"/>
+              <a:t> 30-60  🕧 </a:t>
+            </a:r>
+            <a:r>
+              <a:rPr lang="en-GB" sz="1600" dirty="0" err="1"/>
+              <a:t>percük</a:t>
+            </a:r>
+            <a:r>
+              <a:rPr lang="en-GB" sz="1600" dirty="0"/>
+              <a:t> </a:t>
+            </a:r>
+            <a:r>
+              <a:rPr lang="en-GB" sz="1600" dirty="0" err="1"/>
+              <a:t>arra</a:t>
+            </a:r>
+            <a:r>
+              <a:rPr lang="en-GB" sz="1600" dirty="0"/>
+              <a:t>, </a:t>
+            </a:r>
+            <a:r>
+              <a:rPr lang="en-GB" sz="1600" dirty="0" err="1"/>
+              <a:t>hogy</a:t>
+            </a:r>
+            <a:r>
+              <a:rPr lang="en-GB" sz="1600" dirty="0"/>
+              <a:t> </a:t>
+            </a:r>
+            <a:r>
+              <a:rPr lang="en-GB" sz="1600" dirty="0" err="1"/>
+              <a:t>híreket</a:t>
+            </a:r>
+            <a:r>
+              <a:rPr lang="en-GB" sz="1600" dirty="0"/>
+              <a:t> </a:t>
+            </a:r>
+            <a:r>
+              <a:rPr lang="en-GB" sz="1600" dirty="0" err="1"/>
+              <a:t>keresgéljenek</a:t>
+            </a:r>
+            <a:r>
+              <a:rPr lang="en-GB" sz="1600" dirty="0"/>
+              <a:t>, </a:t>
+            </a:r>
+            <a:r>
+              <a:rPr lang="en-GB" sz="1600" dirty="0" err="1"/>
+              <a:t>azokat</a:t>
+            </a:r>
+            <a:r>
+              <a:rPr lang="en-GB" sz="1600" dirty="0"/>
+              <a:t> </a:t>
+            </a:r>
+            <a:r>
+              <a:rPr lang="en-GB" sz="1600" dirty="0" err="1"/>
+              <a:t>összegezzék</a:t>
+            </a:r>
+            <a:r>
+              <a:rPr lang="en-GB" sz="1600" dirty="0"/>
+              <a:t>, </a:t>
+            </a:r>
+            <a:r>
+              <a:rPr lang="en-GB" sz="1600" dirty="0" err="1"/>
+              <a:t>lefordítsák</a:t>
+            </a:r>
+            <a:r>
+              <a:rPr lang="en-GB" sz="1600" dirty="0"/>
+              <a:t>.</a:t>
+            </a:r>
+          </a:p>
+          <a:p>
+            <a:endParaRPr lang="en-GB" sz="1600" dirty="0"/>
+          </a:p>
+          <a:p>
+            <a:r>
+              <a:rPr lang="en-GB" sz="1600" dirty="0"/>
+              <a:t>A https://yanac.hu/ </a:t>
+            </a:r>
+            <a:r>
+              <a:rPr lang="en-GB" sz="1600" dirty="0" err="1"/>
+              <a:t>oldalunk</a:t>
+            </a:r>
+            <a:r>
+              <a:rPr lang="en-GB" sz="1600" dirty="0"/>
+              <a:t> </a:t>
+            </a:r>
+            <a:r>
+              <a:rPr lang="en-GB" sz="1600" dirty="0" err="1"/>
+              <a:t>már</a:t>
+            </a:r>
+            <a:r>
+              <a:rPr lang="en-GB" sz="1600" dirty="0"/>
+              <a:t> </a:t>
+            </a:r>
+            <a:r>
+              <a:rPr lang="en-GB" sz="1600" dirty="0" err="1"/>
+              <a:t>több</a:t>
+            </a:r>
+            <a:r>
+              <a:rPr lang="en-GB" sz="1600" dirty="0"/>
+              <a:t>, mint </a:t>
+            </a:r>
+            <a:r>
+              <a:rPr lang="hu-HU" sz="1600" dirty="0"/>
+              <a:t>négy</a:t>
+            </a:r>
+            <a:r>
+              <a:rPr lang="en-GB" sz="1600" dirty="0"/>
+              <a:t> </a:t>
+            </a:r>
+            <a:r>
+              <a:rPr lang="en-GB" sz="1600" dirty="0" err="1"/>
+              <a:t>éve</a:t>
+            </a:r>
+            <a:r>
+              <a:rPr lang="en-GB" sz="1600" dirty="0"/>
+              <a:t>  👶 </a:t>
+            </a:r>
+            <a:r>
+              <a:rPr lang="en-GB" sz="1600" dirty="0" err="1"/>
+              <a:t>üzemel</a:t>
+            </a:r>
+            <a:r>
+              <a:rPr lang="en-GB" sz="1600" dirty="0"/>
+              <a:t>, </a:t>
+            </a:r>
+            <a:r>
+              <a:rPr lang="en-GB" sz="1600" dirty="0" err="1"/>
+              <a:t>ez</a:t>
+            </a:r>
+            <a:r>
+              <a:rPr lang="en-GB" sz="1600" dirty="0"/>
+              <a:t> </a:t>
+            </a:r>
+            <a:r>
+              <a:rPr lang="en-GB" sz="1600" dirty="0" err="1"/>
+              <a:t>idő</a:t>
+            </a:r>
+            <a:r>
+              <a:rPr lang="en-GB" sz="1600" dirty="0"/>
+              <a:t> </a:t>
+            </a:r>
+            <a:r>
+              <a:rPr lang="en-GB" sz="1600" dirty="0" err="1"/>
+              <a:t>alatt</a:t>
+            </a:r>
+            <a:r>
+              <a:rPr lang="en-GB" sz="1600" dirty="0"/>
+              <a:t> </a:t>
+            </a:r>
+            <a:r>
+              <a:rPr lang="en-GB" sz="1600" dirty="0" err="1"/>
+              <a:t>majdnem</a:t>
+            </a:r>
+            <a:r>
+              <a:rPr lang="en-GB" sz="1600" dirty="0"/>
+              <a:t> 5000 </a:t>
+            </a:r>
+            <a:r>
+              <a:rPr lang="en-GB" sz="1600" dirty="0" err="1"/>
+              <a:t>saját</a:t>
+            </a:r>
+            <a:r>
+              <a:rPr lang="en-GB" sz="1600" dirty="0"/>
+              <a:t> </a:t>
+            </a:r>
+            <a:r>
+              <a:rPr lang="en-GB" sz="1600" dirty="0" err="1"/>
+              <a:t>fordítást</a:t>
+            </a:r>
+            <a:r>
+              <a:rPr lang="en-GB" sz="1600" dirty="0"/>
+              <a:t>, </a:t>
+            </a:r>
+            <a:r>
+              <a:rPr lang="en-GB" sz="1600" dirty="0" err="1"/>
+              <a:t>összegzést</a:t>
+            </a:r>
+            <a:r>
+              <a:rPr lang="en-GB" sz="1600" dirty="0"/>
+              <a:t> </a:t>
+            </a:r>
+            <a:r>
+              <a:rPr lang="en-GB" sz="1600" dirty="0" err="1"/>
+              <a:t>publikáltunk</a:t>
+            </a:r>
+            <a:r>
+              <a:rPr lang="en-GB" sz="1600" dirty="0"/>
+              <a:t>, </a:t>
+            </a:r>
+            <a:r>
+              <a:rPr lang="en-GB" sz="1600" dirty="0" err="1"/>
+              <a:t>és</a:t>
+            </a:r>
+            <a:r>
+              <a:rPr lang="en-GB" sz="1600" dirty="0"/>
+              <a:t> </a:t>
+            </a:r>
+            <a:r>
+              <a:rPr lang="en-GB" sz="1600" dirty="0" err="1"/>
+              <a:t>nagyon</a:t>
+            </a:r>
+            <a:r>
+              <a:rPr lang="en-GB" sz="1600" dirty="0"/>
+              <a:t> </a:t>
+            </a:r>
+            <a:r>
+              <a:rPr lang="en-GB" sz="1600" dirty="0" err="1"/>
+              <a:t>sok</a:t>
+            </a:r>
+            <a:r>
+              <a:rPr lang="en-GB" sz="1600" dirty="0"/>
+              <a:t> </a:t>
+            </a:r>
+            <a:r>
+              <a:rPr lang="en-GB" sz="1600" dirty="0" err="1"/>
+              <a:t>esetben</a:t>
+            </a:r>
+            <a:r>
+              <a:rPr lang="en-GB" sz="1600" dirty="0"/>
+              <a:t> mi </a:t>
+            </a:r>
+            <a:r>
+              <a:rPr lang="en-GB" sz="1600" dirty="0" err="1"/>
+              <a:t>voltunk</a:t>
+            </a:r>
+            <a:r>
+              <a:rPr lang="en-GB" sz="1600" dirty="0"/>
+              <a:t> </a:t>
+            </a:r>
+            <a:r>
+              <a:rPr lang="en-GB" sz="1600" dirty="0" err="1"/>
+              <a:t>azok</a:t>
+            </a:r>
+            <a:r>
+              <a:rPr lang="en-GB" sz="1600" dirty="0"/>
+              <a:t>, </a:t>
+            </a:r>
+            <a:r>
+              <a:rPr lang="en-GB" sz="1600" dirty="0" err="1"/>
+              <a:t>akik</a:t>
+            </a:r>
+            <a:r>
+              <a:rPr lang="en-GB" sz="1600" dirty="0"/>
+              <a:t> </a:t>
+            </a:r>
+            <a:r>
+              <a:rPr lang="en-GB" sz="1600" dirty="0" err="1"/>
+              <a:t>egy-egy</a:t>
+            </a:r>
+            <a:r>
+              <a:rPr lang="en-GB" sz="1600" dirty="0"/>
+              <a:t> </a:t>
+            </a:r>
+            <a:r>
+              <a:rPr lang="en-GB" sz="1600" dirty="0" err="1"/>
+              <a:t>fontosabb</a:t>
+            </a:r>
+            <a:r>
+              <a:rPr lang="en-GB" sz="1600" dirty="0"/>
+              <a:t> </a:t>
+            </a:r>
+            <a:r>
+              <a:rPr lang="en-GB" sz="1600" dirty="0" err="1"/>
+              <a:t>hírről</a:t>
+            </a:r>
+            <a:r>
+              <a:rPr lang="en-GB" sz="1600" dirty="0"/>
+              <a:t> </a:t>
+            </a:r>
+            <a:r>
+              <a:rPr lang="en-GB" sz="1600" dirty="0" err="1"/>
+              <a:t>elsőként</a:t>
+            </a:r>
+            <a:r>
+              <a:rPr lang="en-GB" sz="1600" dirty="0"/>
+              <a:t>  🏁 </a:t>
+            </a:r>
+            <a:r>
+              <a:rPr lang="en-GB" sz="1600" dirty="0" err="1"/>
+              <a:t>számoltak</a:t>
+            </a:r>
+            <a:r>
+              <a:rPr lang="en-GB" sz="1600" dirty="0"/>
+              <a:t> be </a:t>
+            </a:r>
+            <a:r>
+              <a:rPr lang="en-GB" sz="1600" dirty="0" err="1"/>
+              <a:t>magyar</a:t>
+            </a:r>
+            <a:r>
+              <a:rPr lang="en-GB" sz="1600" dirty="0"/>
+              <a:t> </a:t>
+            </a:r>
+            <a:r>
+              <a:rPr lang="en-GB" sz="1600" dirty="0" err="1"/>
+              <a:t>nyelven</a:t>
+            </a:r>
+            <a:r>
+              <a:rPr lang="en-GB" sz="1600" dirty="0"/>
+              <a:t> (SolarWinds pl.)  </a:t>
+            </a:r>
+            <a:r>
+              <a:rPr lang="en-GB" sz="1600" dirty="0" err="1"/>
+              <a:t>Mostanában</a:t>
+            </a:r>
+            <a:r>
+              <a:rPr lang="en-GB" sz="1600" dirty="0"/>
+              <a:t> </a:t>
+            </a:r>
+            <a:r>
+              <a:rPr lang="en-GB" sz="1600" dirty="0" err="1"/>
+              <a:t>azt</a:t>
+            </a:r>
+            <a:r>
+              <a:rPr lang="en-GB" sz="1600" dirty="0"/>
+              <a:t> </a:t>
+            </a:r>
+            <a:r>
+              <a:rPr lang="en-GB" sz="1600" dirty="0" err="1"/>
+              <a:t>tapasztaljuk</a:t>
+            </a:r>
+            <a:r>
+              <a:rPr lang="en-GB" sz="1600" dirty="0"/>
+              <a:t>, </a:t>
+            </a:r>
+            <a:r>
+              <a:rPr lang="en-GB" sz="1600" dirty="0" err="1"/>
+              <a:t>hogy</a:t>
+            </a:r>
+            <a:r>
+              <a:rPr lang="en-GB" sz="1600" dirty="0"/>
+              <a:t> a </a:t>
+            </a:r>
+            <a:r>
+              <a:rPr lang="en-GB" sz="1600" dirty="0" err="1"/>
+              <a:t>nagyobb</a:t>
+            </a:r>
+            <a:r>
+              <a:rPr lang="en-GB" sz="1600" dirty="0"/>
+              <a:t> </a:t>
+            </a:r>
+            <a:r>
+              <a:rPr lang="en-GB" sz="1600" dirty="0" err="1"/>
+              <a:t>portálok</a:t>
+            </a:r>
+            <a:r>
+              <a:rPr lang="en-GB" sz="1600" dirty="0"/>
+              <a:t> 📰  is </a:t>
+            </a:r>
+            <a:r>
+              <a:rPr lang="en-GB" sz="1600" dirty="0" err="1"/>
+              <a:t>követik</a:t>
+            </a:r>
+            <a:r>
+              <a:rPr lang="en-GB" sz="1600" dirty="0"/>
+              <a:t> </a:t>
+            </a:r>
+            <a:r>
+              <a:rPr lang="en-GB" sz="1600" dirty="0" err="1"/>
+              <a:t>az</a:t>
+            </a:r>
+            <a:r>
+              <a:rPr lang="en-GB" sz="1600" dirty="0"/>
+              <a:t> </a:t>
+            </a:r>
+            <a:r>
+              <a:rPr lang="en-GB" sz="1600" dirty="0" err="1"/>
+              <a:t>anyagainkat</a:t>
+            </a:r>
+            <a:r>
+              <a:rPr lang="en-GB" sz="1600" dirty="0"/>
+              <a:t>, </a:t>
+            </a:r>
+            <a:r>
+              <a:rPr lang="en-GB" sz="1600" dirty="0" err="1"/>
+              <a:t>és</a:t>
+            </a:r>
+            <a:r>
+              <a:rPr lang="en-GB" sz="1600" dirty="0"/>
+              <a:t> </a:t>
+            </a:r>
+            <a:r>
+              <a:rPr lang="en-GB" sz="1600" dirty="0" err="1"/>
+              <a:t>egyes</a:t>
+            </a:r>
+            <a:r>
+              <a:rPr lang="en-GB" sz="1600" dirty="0"/>
+              <a:t> </a:t>
+            </a:r>
+            <a:r>
+              <a:rPr lang="en-GB" sz="1600" dirty="0" err="1"/>
+              <a:t>esetekben</a:t>
+            </a:r>
+            <a:r>
+              <a:rPr lang="en-GB" sz="1600" dirty="0"/>
+              <a:t> </a:t>
+            </a:r>
+            <a:r>
+              <a:rPr lang="en-GB" sz="1600" dirty="0" err="1"/>
+              <a:t>azok</a:t>
+            </a:r>
+            <a:r>
+              <a:rPr lang="en-GB" sz="1600" dirty="0"/>
+              <a:t> </a:t>
+            </a:r>
+            <a:r>
+              <a:rPr lang="en-GB" sz="1600" dirty="0" err="1"/>
+              <a:t>alapján</a:t>
+            </a:r>
+            <a:r>
+              <a:rPr lang="en-GB" sz="1600" dirty="0"/>
+              <a:t> </a:t>
+            </a:r>
+            <a:r>
+              <a:rPr lang="en-GB" sz="1600" dirty="0" err="1"/>
+              <a:t>hozzák</a:t>
+            </a:r>
+            <a:r>
+              <a:rPr lang="en-GB" sz="1600" dirty="0"/>
+              <a:t> le </a:t>
+            </a:r>
+            <a:r>
+              <a:rPr lang="en-GB" sz="1600" dirty="0" err="1"/>
+              <a:t>saját</a:t>
+            </a:r>
+            <a:r>
+              <a:rPr lang="en-GB" sz="1600" dirty="0"/>
+              <a:t> </a:t>
+            </a:r>
+            <a:r>
+              <a:rPr lang="en-GB" sz="1600" dirty="0" err="1"/>
+              <a:t>híreiket</a:t>
+            </a:r>
+            <a:r>
+              <a:rPr lang="en-GB" sz="1600" dirty="0"/>
+              <a:t>. 📺 </a:t>
+            </a:r>
+          </a:p>
+          <a:p>
+            <a:endParaRPr lang="en-GB" sz="1600" dirty="0"/>
+          </a:p>
+          <a:p>
+            <a:r>
+              <a:rPr lang="en-GB" sz="1600" dirty="0" err="1"/>
+              <a:t>Szóval</a:t>
+            </a:r>
+            <a:r>
+              <a:rPr lang="en-GB" sz="1600" dirty="0"/>
+              <a:t>, ha </a:t>
+            </a:r>
+            <a:r>
+              <a:rPr lang="en-GB" sz="1600" dirty="0" err="1"/>
+              <a:t>valakinek</a:t>
+            </a:r>
+            <a:r>
+              <a:rPr lang="en-GB" sz="1600" dirty="0"/>
+              <a:t> van </a:t>
+            </a:r>
+            <a:r>
+              <a:rPr lang="en-GB" sz="1600" dirty="0" err="1"/>
+              <a:t>kedve</a:t>
+            </a:r>
+            <a:r>
+              <a:rPr lang="en-GB" sz="1600" dirty="0"/>
+              <a:t>, </a:t>
+            </a:r>
+            <a:r>
+              <a:rPr lang="en-GB" sz="1600" dirty="0" err="1"/>
+              <a:t>legfőbbként</a:t>
+            </a:r>
+            <a:r>
+              <a:rPr lang="en-GB" sz="1600" dirty="0"/>
+              <a:t> </a:t>
+            </a:r>
+            <a:r>
+              <a:rPr lang="en-GB" sz="1600" dirty="0" err="1"/>
+              <a:t>kitartása</a:t>
+            </a:r>
+            <a:r>
+              <a:rPr lang="en-GB" sz="1600" dirty="0"/>
+              <a:t> </a:t>
+            </a:r>
+            <a:r>
+              <a:rPr lang="en-GB" sz="1600" dirty="0" err="1"/>
+              <a:t>arra</a:t>
+            </a:r>
+            <a:r>
+              <a:rPr lang="en-GB" sz="1600" dirty="0"/>
+              <a:t>, </a:t>
+            </a:r>
+            <a:r>
+              <a:rPr lang="en-GB" sz="1600" dirty="0" err="1"/>
+              <a:t>hogy</a:t>
+            </a:r>
+            <a:r>
+              <a:rPr lang="en-GB" sz="1600" dirty="0"/>
+              <a:t> </a:t>
+            </a:r>
+            <a:r>
+              <a:rPr lang="en-GB" sz="1600" dirty="0" err="1"/>
+              <a:t>friss</a:t>
+            </a:r>
+            <a:r>
+              <a:rPr lang="en-GB" sz="1600" dirty="0"/>
+              <a:t>, </a:t>
+            </a:r>
+            <a:r>
+              <a:rPr lang="en-GB" sz="1600" dirty="0" err="1"/>
+              <a:t>aktuális</a:t>
+            </a:r>
+            <a:r>
+              <a:rPr lang="en-GB" sz="1600" dirty="0"/>
+              <a:t> </a:t>
+            </a:r>
+            <a:r>
+              <a:rPr lang="en-GB" sz="1600" dirty="0" err="1"/>
+              <a:t>és</a:t>
+            </a:r>
+            <a:r>
+              <a:rPr lang="en-GB" sz="1600" dirty="0"/>
+              <a:t> </a:t>
+            </a:r>
+            <a:r>
+              <a:rPr lang="en-GB" sz="1600" dirty="0" err="1"/>
+              <a:t>releváns</a:t>
+            </a:r>
+            <a:r>
+              <a:rPr lang="en-GB" sz="1600" dirty="0"/>
+              <a:t> </a:t>
+            </a:r>
+            <a:r>
+              <a:rPr lang="en-GB" sz="1600" dirty="0" err="1"/>
+              <a:t>híreket</a:t>
+            </a:r>
+            <a:r>
+              <a:rPr lang="en-GB" sz="1600" dirty="0"/>
+              <a:t> </a:t>
+            </a:r>
+            <a:r>
+              <a:rPr lang="en-GB" sz="1600" dirty="0" err="1"/>
+              <a:t>összegezzen</a:t>
+            </a:r>
+            <a:r>
+              <a:rPr lang="en-GB" sz="1600" dirty="0"/>
+              <a:t> </a:t>
+            </a:r>
+            <a:r>
+              <a:rPr lang="en-GB" sz="1600" dirty="0" err="1"/>
+              <a:t>magyarul</a:t>
+            </a:r>
+            <a:r>
+              <a:rPr lang="en-GB" sz="1600" dirty="0"/>
+              <a:t> 🇭🇺 , </a:t>
+            </a:r>
+            <a:r>
+              <a:rPr lang="en-GB" sz="1600" dirty="0" err="1"/>
+              <a:t>jelentkezzen</a:t>
+            </a:r>
+            <a:r>
+              <a:rPr lang="en-GB" sz="1600" dirty="0"/>
+              <a:t> </a:t>
+            </a:r>
+            <a:r>
+              <a:rPr lang="en-GB" sz="1600" dirty="0" err="1"/>
+              <a:t>bátran</a:t>
+            </a:r>
+            <a:r>
+              <a:rPr lang="en-GB" sz="1600" dirty="0"/>
+              <a:t> </a:t>
+            </a:r>
+            <a:r>
+              <a:rPr lang="en-GB" sz="1600" dirty="0" err="1"/>
+              <a:t>nálam</a:t>
+            </a:r>
+            <a:r>
+              <a:rPr lang="en-GB" sz="1600" dirty="0"/>
+              <a:t>, </a:t>
+            </a:r>
+            <a:r>
+              <a:rPr lang="en-GB" sz="1600" dirty="0" err="1"/>
+              <a:t>tudok</a:t>
+            </a:r>
+            <a:r>
+              <a:rPr lang="en-GB" sz="1600" dirty="0"/>
+              <a:t> </a:t>
+            </a:r>
+            <a:r>
+              <a:rPr lang="en-GB" sz="1600" dirty="0" err="1"/>
+              <a:t>hozzá</a:t>
+            </a:r>
+            <a:r>
+              <a:rPr lang="en-GB" sz="1600" dirty="0"/>
+              <a:t> </a:t>
+            </a:r>
+            <a:r>
+              <a:rPr lang="en-GB" sz="1600" dirty="0" err="1"/>
+              <a:t>adni</a:t>
+            </a:r>
+            <a:r>
+              <a:rPr lang="en-GB" sz="1600" dirty="0"/>
+              <a:t> </a:t>
+            </a:r>
+            <a:r>
+              <a:rPr lang="en-GB" sz="1600" dirty="0" err="1"/>
+              <a:t>felülelet</a:t>
+            </a:r>
+            <a:r>
+              <a:rPr lang="en-GB" sz="1600" dirty="0"/>
+              <a:t>. 📋 </a:t>
+            </a:r>
+          </a:p>
+          <a:p>
+            <a:endParaRPr lang="en-GB" sz="1600" dirty="0"/>
+          </a:p>
+          <a:p>
+            <a:r>
+              <a:rPr lang="en-GB" sz="1600" dirty="0" err="1"/>
+              <a:t>Ahogy</a:t>
+            </a:r>
+            <a:r>
+              <a:rPr lang="en-GB" sz="1600" dirty="0"/>
+              <a:t> </a:t>
+            </a:r>
+            <a:r>
+              <a:rPr lang="en-GB" sz="1600" dirty="0" err="1"/>
+              <a:t>az</a:t>
+            </a:r>
+            <a:r>
+              <a:rPr lang="en-GB" sz="1600" dirty="0"/>
+              <a:t> </a:t>
+            </a:r>
+            <a:r>
+              <a:rPr lang="en-GB" sz="1600" dirty="0" err="1"/>
+              <a:t>alapítóknak</a:t>
+            </a:r>
+            <a:r>
+              <a:rPr lang="en-GB" sz="1600" dirty="0"/>
+              <a:t>, </a:t>
+            </a:r>
+            <a:r>
+              <a:rPr lang="en-GB" sz="1600" dirty="0" err="1"/>
+              <a:t>úgy</a:t>
+            </a:r>
+            <a:r>
+              <a:rPr lang="en-GB" sz="1600" dirty="0"/>
+              <a:t> a </a:t>
+            </a:r>
+            <a:r>
+              <a:rPr lang="en-GB" sz="1600" dirty="0" err="1"/>
+              <a:t>társszerzőnek</a:t>
+            </a:r>
+            <a:r>
+              <a:rPr lang="en-GB" sz="1600" dirty="0"/>
+              <a:t> </a:t>
+            </a:r>
+            <a:r>
+              <a:rPr lang="en-GB" sz="1600" dirty="0" err="1"/>
+              <a:t>sem</a:t>
+            </a:r>
+            <a:r>
+              <a:rPr lang="en-GB" sz="1600" dirty="0"/>
+              <a:t> </a:t>
+            </a:r>
+            <a:r>
+              <a:rPr lang="en-GB" sz="1600" dirty="0" err="1"/>
+              <a:t>tudok</a:t>
+            </a:r>
+            <a:r>
+              <a:rPr lang="en-GB" sz="1600" dirty="0"/>
+              <a:t> </a:t>
+            </a:r>
+            <a:r>
+              <a:rPr lang="en-GB" sz="1600" dirty="0" err="1"/>
+              <a:t>fizetni</a:t>
+            </a:r>
+            <a:r>
+              <a:rPr lang="en-GB" sz="1600" dirty="0"/>
+              <a:t> 🚫 💶 , </a:t>
+            </a:r>
+            <a:r>
+              <a:rPr lang="en-GB" sz="1600" dirty="0" err="1"/>
+              <a:t>hisz</a:t>
+            </a:r>
+            <a:r>
+              <a:rPr lang="en-GB" sz="1600" dirty="0"/>
+              <a:t> </a:t>
+            </a:r>
+            <a:r>
+              <a:rPr lang="en-GB" sz="1600" dirty="0" err="1"/>
+              <a:t>az</a:t>
+            </a:r>
+            <a:r>
+              <a:rPr lang="en-GB" sz="1600" dirty="0"/>
+              <a:t> </a:t>
+            </a:r>
+            <a:r>
+              <a:rPr lang="en-GB" sz="1600" dirty="0" err="1"/>
+              <a:t>egész</a:t>
+            </a:r>
+            <a:r>
+              <a:rPr lang="en-GB" sz="1600" dirty="0"/>
+              <a:t> </a:t>
+            </a:r>
+            <a:r>
+              <a:rPr lang="en-GB" sz="1600" dirty="0" err="1"/>
+              <a:t>oldal</a:t>
+            </a:r>
+            <a:r>
+              <a:rPr lang="en-GB" sz="1600" dirty="0"/>
+              <a:t> non-profit, de </a:t>
+            </a:r>
+            <a:r>
+              <a:rPr lang="en-GB" sz="1600" dirty="0" err="1"/>
+              <a:t>minket</a:t>
+            </a:r>
+            <a:r>
+              <a:rPr lang="en-GB" sz="1600" dirty="0"/>
+              <a:t> </a:t>
+            </a:r>
+            <a:r>
+              <a:rPr lang="en-GB" sz="1600" dirty="0" err="1"/>
+              <a:t>például</a:t>
+            </a:r>
+            <a:r>
+              <a:rPr lang="en-GB" sz="1600" dirty="0"/>
+              <a:t> </a:t>
+            </a:r>
+            <a:r>
+              <a:rPr lang="en-GB" sz="1600" dirty="0" err="1"/>
+              <a:t>motivál</a:t>
+            </a:r>
+            <a:r>
+              <a:rPr lang="en-GB" sz="1600" dirty="0"/>
+              <a:t>, </a:t>
+            </a:r>
+            <a:r>
+              <a:rPr lang="en-GB" sz="1600" dirty="0" err="1"/>
+              <a:t>amikor</a:t>
+            </a:r>
+            <a:r>
+              <a:rPr lang="en-GB" sz="1600" dirty="0"/>
+              <a:t> </a:t>
+            </a:r>
+            <a:r>
+              <a:rPr lang="en-GB" sz="1600" dirty="0" err="1"/>
+              <a:t>látjuk</a:t>
+            </a:r>
+            <a:r>
+              <a:rPr lang="en-GB" sz="1600" dirty="0"/>
+              <a:t>, </a:t>
+            </a:r>
+            <a:r>
+              <a:rPr lang="en-GB" sz="1600" dirty="0" err="1"/>
+              <a:t>hogy</a:t>
+            </a:r>
+            <a:r>
+              <a:rPr lang="en-GB" sz="1600" dirty="0"/>
+              <a:t> pl. Dr. </a:t>
+            </a:r>
+            <a:r>
+              <a:rPr lang="en-GB" sz="1600" dirty="0" err="1"/>
+              <a:t>Krasznay</a:t>
+            </a:r>
+            <a:r>
+              <a:rPr lang="en-GB" sz="1600" dirty="0"/>
+              <a:t> Csaba 🧑‍🏫  </a:t>
+            </a:r>
+            <a:r>
+              <a:rPr lang="en-GB" sz="1600" dirty="0" err="1"/>
+              <a:t>hivatkozza</a:t>
+            </a:r>
+            <a:r>
+              <a:rPr lang="en-GB" sz="1600" dirty="0"/>
+              <a:t> </a:t>
+            </a:r>
+            <a:r>
+              <a:rPr lang="en-GB" sz="1600" dirty="0" err="1"/>
+              <a:t>cikkünket</a:t>
+            </a:r>
+            <a:r>
+              <a:rPr lang="en-GB" sz="1600" dirty="0"/>
+              <a:t> </a:t>
+            </a:r>
+            <a:r>
+              <a:rPr lang="en-GB" sz="1600" dirty="0" err="1"/>
+              <a:t>shortjaiban</a:t>
+            </a:r>
+            <a:r>
+              <a:rPr lang="en-GB" sz="1600" dirty="0"/>
+              <a:t> 🩳 , </a:t>
+            </a:r>
+            <a:r>
+              <a:rPr lang="en-GB" sz="1600" dirty="0" err="1"/>
+              <a:t>vagy</a:t>
+            </a:r>
+            <a:r>
+              <a:rPr lang="en-GB" sz="1600" dirty="0"/>
+              <a:t> </a:t>
+            </a:r>
+            <a:r>
+              <a:rPr lang="en-GB" sz="1600" dirty="0" err="1"/>
+              <a:t>máshol</a:t>
+            </a:r>
+            <a:r>
+              <a:rPr lang="en-GB" sz="1600" dirty="0"/>
+              <a:t> </a:t>
+            </a:r>
+            <a:r>
+              <a:rPr lang="en-GB" sz="1600" dirty="0" err="1"/>
+              <a:t>látjuk</a:t>
+            </a:r>
+            <a:r>
+              <a:rPr lang="en-GB" sz="1600" dirty="0"/>
+              <a:t> </a:t>
+            </a:r>
+            <a:r>
+              <a:rPr lang="en-GB" sz="1600" dirty="0" err="1"/>
+              <a:t>viszont</a:t>
+            </a:r>
+            <a:r>
+              <a:rPr lang="en-GB" sz="1600" dirty="0"/>
+              <a:t> </a:t>
+            </a:r>
+            <a:r>
+              <a:rPr lang="en-GB" sz="1600" dirty="0" err="1"/>
+              <a:t>azokat</a:t>
+            </a:r>
+            <a:r>
+              <a:rPr lang="en-GB" sz="1600" dirty="0"/>
+              <a:t> a </a:t>
+            </a:r>
+            <a:r>
+              <a:rPr lang="en-GB" sz="1600" dirty="0" err="1"/>
+              <a:t>címeket</a:t>
+            </a:r>
+            <a:r>
+              <a:rPr lang="en-GB" sz="1600" dirty="0"/>
+              <a:t>, </a:t>
+            </a:r>
+            <a:r>
+              <a:rPr lang="en-GB" sz="1600" dirty="0" err="1"/>
+              <a:t>amiket</a:t>
+            </a:r>
+            <a:r>
+              <a:rPr lang="en-GB" sz="1600" dirty="0"/>
+              <a:t> </a:t>
+            </a:r>
+            <a:r>
+              <a:rPr lang="en-GB" sz="1600" dirty="0" err="1"/>
+              <a:t>korábban</a:t>
+            </a:r>
+            <a:r>
+              <a:rPr lang="en-GB" sz="1600" dirty="0"/>
+              <a:t> mi </a:t>
+            </a:r>
+            <a:r>
+              <a:rPr lang="en-GB" sz="1600" dirty="0" err="1"/>
+              <a:t>már</a:t>
+            </a:r>
+            <a:r>
+              <a:rPr lang="en-GB" sz="1600" dirty="0"/>
+              <a:t> </a:t>
+            </a:r>
+            <a:r>
+              <a:rPr lang="en-GB" sz="1600" dirty="0" err="1"/>
+              <a:t>feldolgoztunk</a:t>
+            </a:r>
+            <a:r>
+              <a:rPr lang="en-GB" sz="1600" dirty="0"/>
+              <a:t>.  📈</a:t>
+            </a:r>
+          </a:p>
+        </p:txBody>
+      </p:sp>
+    </p:spTree>
+    <p:extLst>
+      <p:ext uri="{BB962C8B-B14F-4D97-AF65-F5344CB8AC3E}">
+        <p14:creationId xmlns:p14="http://schemas.microsoft.com/office/powerpoint/2010/main" val="3416589016"/>
+      </p:ext>
+    </p:extLst>
+  </p:cSld>
+  <p:clrMapOvr>
+    <a:masterClrMapping/>
+  </p:clrMapOvr>
+</p:sld>
+</file>
+
+<file path=ppt/slides/slide12.xml><?xml version="1.0" encoding="utf-8"?>
+<p:sld xmlns:a="http://schemas.openxmlformats.org/drawingml/2006/main" xmlns:r="http://schemas.openxmlformats.org/officeDocument/2006/relationships" xmlns:p="http://schemas.openxmlformats.org/presentationml/2006/main">
+  <p:cSld>
+    <p:spTree>
+      <p:nvGrpSpPr>
+        <p:cNvPr id="1" name="">
+          <a:extLst>
+            <a:ext uri="{FF2B5EF4-FFF2-40B4-BE49-F238E27FC236}">
+              <a16:creationId xmlns:a16="http://schemas.microsoft.com/office/drawing/2014/main" id="{10FFF174-CEE5-8602-EEC4-CF14A9E3C8D5}"/>
+            </a:ext>
+          </a:extLst>
+        </p:cNvPr>
+        <p:cNvGrpSpPr/>
+        <p:nvPr/>
+      </p:nvGrpSpPr>
+      <p:grpSpPr>
+        <a:xfrm>
+          <a:off x="0" y="0"/>
+          <a:ext cx="0" cy="0"/>
+          <a:chOff x="0" y="0"/>
+          <a:chExt cx="0" cy="0"/>
+        </a:xfrm>
+      </p:grpSpPr>
+      <p:pic>
+        <p:nvPicPr>
+          <p:cNvPr id="5" name="Picture 2">
+            <a:extLst>
+              <a:ext uri="{FF2B5EF4-FFF2-40B4-BE49-F238E27FC236}">
+                <a16:creationId xmlns:a16="http://schemas.microsoft.com/office/drawing/2014/main" id="{EF1F01B2-CCFE-95B0-8DFC-62A9A4F91EC0}"/>
+              </a:ext>
+            </a:extLst>
+          </p:cNvPr>
+          <p:cNvPicPr>
+            <a:picLocks noChangeAspect="1" noChangeArrowheads="1"/>
+          </p:cNvPicPr>
+          <p:nvPr/>
+        </p:nvPicPr>
+        <p:blipFill>
+          <a:blip r:embed="rId2">
+            <a:extLst>
+              <a:ext uri="{28A0092B-C50C-407E-A947-70E740481C1C}">
+                <a14:useLocalDpi xmlns:a14="http://schemas.microsoft.com/office/drawing/2010/main" val="0"/>
+              </a:ext>
+            </a:extLst>
+          </a:blip>
+          <a:srcRect/>
+          <a:stretch>
+            <a:fillRect/>
+          </a:stretch>
+        </p:blipFill>
+        <p:spPr bwMode="auto">
+          <a:xfrm>
+            <a:off x="0" y="0"/>
+            <a:ext cx="2143125" cy="2143125"/>
+          </a:xfrm>
+          <a:prstGeom prst="rect">
+            <a:avLst/>
+          </a:prstGeom>
+          <a:noFill/>
+          <a:extLst>
+            <a:ext uri="{909E8E84-426E-40DD-AFC4-6F175D3DCCD1}">
+              <a14:hiddenFill xmlns:a14="http://schemas.microsoft.com/office/drawing/2010/main">
+                <a:solidFill>
+                  <a:srgbClr val="FFFFFF"/>
+                </a:solidFill>
+              </a14:hiddenFill>
+            </a:ext>
+          </a:extLst>
+        </p:spPr>
+      </p:pic>
+      <p:sp>
+        <p:nvSpPr>
+          <p:cNvPr id="6" name="TextBox 5">
+            <a:extLst>
+              <a:ext uri="{FF2B5EF4-FFF2-40B4-BE49-F238E27FC236}">
+                <a16:creationId xmlns:a16="http://schemas.microsoft.com/office/drawing/2014/main" id="{8634302D-9775-B8E4-4EE9-1FA89279EAF9}"/>
+              </a:ext>
+            </a:extLst>
+          </p:cNvPr>
+          <p:cNvSpPr txBox="1"/>
+          <p:nvPr/>
+        </p:nvSpPr>
+        <p:spPr>
+          <a:xfrm>
+            <a:off x="1872998" y="370214"/>
+            <a:ext cx="3209276" cy="769441"/>
+          </a:xfrm>
+          <a:prstGeom prst="rect">
+            <a:avLst/>
+          </a:prstGeom>
+          <a:noFill/>
+        </p:spPr>
+        <p:txBody>
+          <a:bodyPr wrap="none" rtlCol="0">
+            <a:spAutoFit/>
+          </a:bodyPr>
+          <a:lstStyle/>
+          <a:p>
+            <a:r>
+              <a:rPr lang="hu-HU" sz="4400" dirty="0">
+                <a:highlight>
+                  <a:srgbClr val="FF3F5A"/>
+                </a:highlight>
+              </a:rPr>
+              <a:t>TÁMOGATÁS</a:t>
+            </a:r>
+          </a:p>
+        </p:txBody>
+      </p:sp>
+      <p:pic>
+        <p:nvPicPr>
+          <p:cNvPr id="3" name="Picture 2">
+            <a:extLst>
+              <a:ext uri="{FF2B5EF4-FFF2-40B4-BE49-F238E27FC236}">
+                <a16:creationId xmlns:a16="http://schemas.microsoft.com/office/drawing/2014/main" id="{EB8B752C-F172-A4A3-4B8B-F22D79AF962F}"/>
+              </a:ext>
+            </a:extLst>
+          </p:cNvPr>
+          <p:cNvPicPr>
+            <a:picLocks noChangeAspect="1"/>
+          </p:cNvPicPr>
+          <p:nvPr/>
+        </p:nvPicPr>
+        <p:blipFill>
+          <a:blip r:embed="rId3">
+            <a:extLst>
+              <a:ext uri="{28A0092B-C50C-407E-A947-70E740481C1C}">
+                <a14:useLocalDpi xmlns:a14="http://schemas.microsoft.com/office/drawing/2010/main" val="0"/>
+              </a:ext>
+            </a:extLst>
+          </a:blip>
+          <a:stretch>
+            <a:fillRect/>
+          </a:stretch>
+        </p:blipFill>
+        <p:spPr>
+          <a:xfrm>
+            <a:off x="6854069" y="2205700"/>
+            <a:ext cx="3574452" cy="4285281"/>
+          </a:xfrm>
+          <a:prstGeom prst="rect">
+            <a:avLst/>
+          </a:prstGeom>
+        </p:spPr>
+      </p:pic>
+      <p:sp>
+        <p:nvSpPr>
+          <p:cNvPr id="7" name="TextBox 6">
+            <a:extLst>
+              <a:ext uri="{FF2B5EF4-FFF2-40B4-BE49-F238E27FC236}">
+                <a16:creationId xmlns:a16="http://schemas.microsoft.com/office/drawing/2014/main" id="{0E2EA162-DA4A-0FAF-F9B0-37F0AFC839CB}"/>
+              </a:ext>
+            </a:extLst>
+          </p:cNvPr>
+          <p:cNvSpPr txBox="1"/>
+          <p:nvPr/>
+        </p:nvSpPr>
+        <p:spPr>
+          <a:xfrm>
+            <a:off x="7487619" y="139381"/>
+            <a:ext cx="4190354" cy="461665"/>
+          </a:xfrm>
+          <a:prstGeom prst="rect">
+            <a:avLst/>
+          </a:prstGeom>
+          <a:noFill/>
+        </p:spPr>
+        <p:txBody>
+          <a:bodyPr wrap="square">
+            <a:spAutoFit/>
+          </a:bodyPr>
+          <a:lstStyle/>
+          <a:p>
+            <a:r>
+              <a:rPr lang="en-GB" sz="2400" dirty="0"/>
+              <a:t>https://yanac.hu/tamogatas/</a:t>
+            </a:r>
+          </a:p>
+        </p:txBody>
+      </p:sp>
+      <p:sp>
+        <p:nvSpPr>
+          <p:cNvPr id="9" name="TextBox 8">
+            <a:extLst>
+              <a:ext uri="{FF2B5EF4-FFF2-40B4-BE49-F238E27FC236}">
+                <a16:creationId xmlns:a16="http://schemas.microsoft.com/office/drawing/2014/main" id="{6AD6F9F8-3C96-DECA-AA88-BDB5859ADC61}"/>
+              </a:ext>
+            </a:extLst>
+          </p:cNvPr>
+          <p:cNvSpPr txBox="1"/>
+          <p:nvPr/>
+        </p:nvSpPr>
+        <p:spPr>
+          <a:xfrm>
+            <a:off x="8173439" y="1443637"/>
+            <a:ext cx="935712" cy="584775"/>
+          </a:xfrm>
+          <a:prstGeom prst="rect">
+            <a:avLst/>
+          </a:prstGeom>
+          <a:noFill/>
+        </p:spPr>
+        <p:txBody>
+          <a:bodyPr wrap="square">
+            <a:spAutoFit/>
+          </a:bodyPr>
+          <a:lstStyle/>
+          <a:p>
+            <a:r>
+              <a:rPr lang="hu-HU" sz="3200" dirty="0">
+                <a:highlight>
+                  <a:srgbClr val="FF3F5A"/>
+                </a:highlight>
+              </a:rPr>
+              <a:t>10 €</a:t>
+            </a:r>
+          </a:p>
+        </p:txBody>
+      </p:sp>
+      <p:pic>
+        <p:nvPicPr>
+          <p:cNvPr id="13" name="Picture 12">
+            <a:extLst>
+              <a:ext uri="{FF2B5EF4-FFF2-40B4-BE49-F238E27FC236}">
+                <a16:creationId xmlns:a16="http://schemas.microsoft.com/office/drawing/2014/main" id="{8AA19028-8DA2-A83D-B1CC-333E38128E60}"/>
+              </a:ext>
+            </a:extLst>
+          </p:cNvPr>
+          <p:cNvPicPr>
+            <a:picLocks noChangeAspect="1"/>
+          </p:cNvPicPr>
+          <p:nvPr/>
+        </p:nvPicPr>
+        <p:blipFill>
+          <a:blip r:embed="rId4">
+            <a:extLst>
+              <a:ext uri="{28A0092B-C50C-407E-A947-70E740481C1C}">
+                <a14:useLocalDpi xmlns:a14="http://schemas.microsoft.com/office/drawing/2010/main" val="0"/>
+              </a:ext>
+            </a:extLst>
+          </a:blip>
+          <a:stretch>
+            <a:fillRect/>
+          </a:stretch>
+        </p:blipFill>
+        <p:spPr>
+          <a:xfrm>
+            <a:off x="1763481" y="2205700"/>
+            <a:ext cx="3574452" cy="4285281"/>
+          </a:xfrm>
+          <a:prstGeom prst="rect">
+            <a:avLst/>
+          </a:prstGeom>
+        </p:spPr>
+      </p:pic>
+      <p:sp>
+        <p:nvSpPr>
+          <p:cNvPr id="14" name="TextBox 13">
+            <a:extLst>
+              <a:ext uri="{FF2B5EF4-FFF2-40B4-BE49-F238E27FC236}">
+                <a16:creationId xmlns:a16="http://schemas.microsoft.com/office/drawing/2014/main" id="{AEC12FEB-F7F1-25C9-5069-E302D397A3FC}"/>
+              </a:ext>
+            </a:extLst>
+          </p:cNvPr>
+          <p:cNvSpPr txBox="1"/>
+          <p:nvPr/>
+        </p:nvSpPr>
+        <p:spPr>
+          <a:xfrm>
+            <a:off x="3136186" y="1443637"/>
+            <a:ext cx="829041" cy="584775"/>
+          </a:xfrm>
+          <a:prstGeom prst="rect">
+            <a:avLst/>
+          </a:prstGeom>
+          <a:noFill/>
+        </p:spPr>
+        <p:txBody>
+          <a:bodyPr wrap="square">
+            <a:spAutoFit/>
+          </a:bodyPr>
+          <a:lstStyle/>
+          <a:p>
+            <a:r>
+              <a:rPr lang="hu-HU" sz="3200" dirty="0">
+                <a:highlight>
+                  <a:srgbClr val="FF3F5A"/>
+                </a:highlight>
+              </a:rPr>
+              <a:t>5 €</a:t>
+            </a:r>
+          </a:p>
+        </p:txBody>
+      </p:sp>
+    </p:spTree>
+    <p:extLst>
+      <p:ext uri="{BB962C8B-B14F-4D97-AF65-F5344CB8AC3E}">
+        <p14:creationId xmlns:p14="http://schemas.microsoft.com/office/powerpoint/2010/main" val="2719384994"/>
+      </p:ext>
+    </p:extLst>
+  </p:cSld>
+  <p:clrMapOvr>
+    <a:masterClrMapping/>
+  </p:clrMapOvr>
+</p:sld>
+</file>
+
+<file path=ppt/slides/slide13.xml><?xml version="1.0" encoding="utf-8"?>
+<p:sld xmlns:a="http://schemas.openxmlformats.org/drawingml/2006/main" xmlns:r="http://schemas.openxmlformats.org/officeDocument/2006/relationships" xmlns:p="http://schemas.openxmlformats.org/presentationml/2006/main">
+  <p:cSld>
+    <p:spTree>
+      <p:nvGrpSpPr>
+        <p:cNvPr id="1" name=""/>
+        <p:cNvGrpSpPr/>
+        <p:nvPr/>
+      </p:nvGrpSpPr>
+      <p:grpSpPr>
+        <a:xfrm>
+          <a:off x="0" y="0"/>
+          <a:ext cx="0" cy="0"/>
+          <a:chOff x="0" y="0"/>
+          <a:chExt cx="0" cy="0"/>
+        </a:xfrm>
+      </p:grpSpPr>
+      <p:pic>
+        <p:nvPicPr>
+          <p:cNvPr id="5" name="Picture 2">
+            <a:extLst>
+              <a:ext uri="{FF2B5EF4-FFF2-40B4-BE49-F238E27FC236}">
+                <a16:creationId xmlns:a16="http://schemas.microsoft.com/office/drawing/2014/main" id="{D2B6620E-CC54-212B-EBD7-9559AF590806}"/>
+              </a:ext>
+            </a:extLst>
+          </p:cNvPr>
+          <p:cNvPicPr>
+            <a:picLocks noChangeAspect="1" noChangeArrowheads="1"/>
+          </p:cNvPicPr>
+          <p:nvPr/>
+        </p:nvPicPr>
+        <p:blipFill>
+          <a:blip r:embed="rId3">
+            <a:extLst>
+              <a:ext uri="{28A0092B-C50C-407E-A947-70E740481C1C}">
+                <a14:useLocalDpi xmlns:a14="http://schemas.microsoft.com/office/drawing/2010/main" val="0"/>
+              </a:ext>
+            </a:extLst>
+          </a:blip>
+          <a:srcRect/>
+          <a:stretch>
+            <a:fillRect/>
+          </a:stretch>
+        </p:blipFill>
+        <p:spPr bwMode="auto">
+          <a:xfrm>
+            <a:off x="0" y="0"/>
+            <a:ext cx="2143125" cy="2143125"/>
+          </a:xfrm>
+          <a:prstGeom prst="rect">
+            <a:avLst/>
+          </a:prstGeom>
+          <a:noFill/>
+          <a:extLst>
+            <a:ext uri="{909E8E84-426E-40DD-AFC4-6F175D3DCCD1}">
+              <a14:hiddenFill xmlns:a14="http://schemas.microsoft.com/office/drawing/2010/main">
+                <a:solidFill>
+                  <a:srgbClr val="FFFFFF"/>
+                </a:solidFill>
+              </a14:hiddenFill>
+            </a:ext>
+          </a:extLst>
+        </p:spPr>
+      </p:pic>
+      <p:sp>
+        <p:nvSpPr>
+          <p:cNvPr id="6" name="TextBox 5">
+            <a:extLst>
+              <a:ext uri="{FF2B5EF4-FFF2-40B4-BE49-F238E27FC236}">
+                <a16:creationId xmlns:a16="http://schemas.microsoft.com/office/drawing/2014/main" id="{B6FF17A8-2A06-5C7C-FFD6-5D761233B5BC}"/>
+              </a:ext>
+            </a:extLst>
+          </p:cNvPr>
+          <p:cNvSpPr txBox="1"/>
+          <p:nvPr/>
+        </p:nvSpPr>
+        <p:spPr>
+          <a:xfrm>
+            <a:off x="1872998" y="370214"/>
+            <a:ext cx="6661695" cy="769441"/>
+          </a:xfrm>
+          <a:prstGeom prst="rect">
+            <a:avLst/>
+          </a:prstGeom>
+          <a:noFill/>
+        </p:spPr>
+        <p:txBody>
+          <a:bodyPr wrap="none" rtlCol="0">
+            <a:spAutoFit/>
+          </a:bodyPr>
+          <a:lstStyle/>
+          <a:p>
+            <a:r>
+              <a:rPr lang="hu-HU" sz="4400" dirty="0">
+                <a:highlight>
+                  <a:srgbClr val="FF3F5A"/>
+                </a:highlight>
+              </a:rPr>
+              <a:t>KÖSZÖNÖM A FIGYELMET!</a:t>
+            </a:r>
+          </a:p>
+        </p:txBody>
+      </p:sp>
+      <p:sp>
+        <p:nvSpPr>
+          <p:cNvPr id="8" name="TextBox 7">
+            <a:extLst>
+              <a:ext uri="{FF2B5EF4-FFF2-40B4-BE49-F238E27FC236}">
+                <a16:creationId xmlns:a16="http://schemas.microsoft.com/office/drawing/2014/main" id="{9D7F81C3-05BB-B52A-1E42-41589BD6B5AB}"/>
+              </a:ext>
+            </a:extLst>
+          </p:cNvPr>
+          <p:cNvSpPr txBox="1"/>
+          <p:nvPr/>
+        </p:nvSpPr>
+        <p:spPr>
+          <a:xfrm>
+            <a:off x="7591312" y="5824331"/>
+            <a:ext cx="4411336" cy="769441"/>
+          </a:xfrm>
+          <a:prstGeom prst="rect">
+            <a:avLst/>
+          </a:prstGeom>
+          <a:noFill/>
+        </p:spPr>
+        <p:txBody>
+          <a:bodyPr wrap="none" rtlCol="0">
+            <a:spAutoFit/>
+          </a:bodyPr>
+          <a:lstStyle/>
+          <a:p>
+            <a:r>
+              <a:rPr lang="hu-HU" sz="4400" dirty="0">
+                <a:highlight>
+                  <a:srgbClr val="FF3F5A"/>
+                </a:highlight>
+              </a:rPr>
+              <a:t>https://yanac.hu/</a:t>
+            </a:r>
+          </a:p>
+        </p:txBody>
+      </p:sp>
+      <p:pic>
+        <p:nvPicPr>
+          <p:cNvPr id="2050" name="Picture 2" descr="Photo fire alphabet question mark isolated on black background.">
+            <a:extLst>
+              <a:ext uri="{FF2B5EF4-FFF2-40B4-BE49-F238E27FC236}">
+                <a16:creationId xmlns:a16="http://schemas.microsoft.com/office/drawing/2014/main" id="{C6B5AC52-8001-CCE9-0965-CE61AD77C2DB}"/>
+              </a:ext>
+            </a:extLst>
+          </p:cNvPr>
+          <p:cNvPicPr>
+            <a:picLocks noChangeAspect="1" noChangeArrowheads="1"/>
+          </p:cNvPicPr>
+          <p:nvPr/>
+        </p:nvPicPr>
+        <p:blipFill>
+          <a:blip r:embed="rId4">
+            <a:extLst>
+              <a:ext uri="{28A0092B-C50C-407E-A947-70E740481C1C}">
+                <a14:useLocalDpi xmlns:a14="http://schemas.microsoft.com/office/drawing/2010/main" val="0"/>
+              </a:ext>
+            </a:extLst>
+          </a:blip>
+          <a:srcRect/>
+          <a:stretch>
+            <a:fillRect/>
+          </a:stretch>
+        </p:blipFill>
+        <p:spPr bwMode="auto">
+          <a:xfrm>
+            <a:off x="4310934" y="1880479"/>
+            <a:ext cx="3570131" cy="3570131"/>
+          </a:xfrm>
+          <a:prstGeom prst="rect">
+            <a:avLst/>
+          </a:prstGeom>
+          <a:noFill/>
+          <a:extLst>
+            <a:ext uri="{909E8E84-426E-40DD-AFC4-6F175D3DCCD1}">
+              <a14:hiddenFill xmlns:a14="http://schemas.microsoft.com/office/drawing/2010/main">
+                <a:solidFill>
+                  <a:srgbClr val="FFFFFF"/>
+                </a:solidFill>
+              </a14:hiddenFill>
+            </a:ext>
+          </a:extLst>
+        </p:spPr>
+      </p:pic>
+    </p:spTree>
+    <p:extLst>
+      <p:ext uri="{BB962C8B-B14F-4D97-AF65-F5344CB8AC3E}">
+        <p14:creationId xmlns:p14="http://schemas.microsoft.com/office/powerpoint/2010/main" val="383254803"/>
       </p:ext>
     </p:extLst>
   </p:cSld>
@@ -6511,7 +10756,7 @@
         </p:blipFill>
         <p:spPr>
           <a:xfrm>
-            <a:off x="8861219" y="2093068"/>
+            <a:off x="7172053" y="2245468"/>
             <a:ext cx="1335932" cy="1335932"/>
           </a:xfrm>
           <a:prstGeom prst="rect">
@@ -6560,6 +10805,84 @@
                 <a:srgbClr val="FF3F5A"/>
               </a:highlight>
             </a:endParaRPr>
+          </a:p>
+        </p:txBody>
+      </p:sp>
+      <p:pic>
+        <p:nvPicPr>
+          <p:cNvPr id="2" name="Graphic 1" descr="User outline">
+            <a:extLst>
+              <a:ext uri="{FF2B5EF4-FFF2-40B4-BE49-F238E27FC236}">
+                <a16:creationId xmlns:a16="http://schemas.microsoft.com/office/drawing/2014/main" id="{CB4660EE-764E-8932-3425-45FDAE75F54A}"/>
+              </a:ext>
+            </a:extLst>
+          </p:cNvPr>
+          <p:cNvPicPr>
+            <a:picLocks noChangeAspect="1"/>
+          </p:cNvPicPr>
+          <p:nvPr/>
+        </p:nvPicPr>
+        <p:blipFill>
+          <a:blip r:embed="rId3">
+            <a:extLst>
+              <a:ext uri="{28A0092B-C50C-407E-A947-70E740481C1C}">
+                <a14:useLocalDpi xmlns:a14="http://schemas.microsoft.com/office/drawing/2010/main" val="0"/>
+              </a:ext>
+              <a:ext uri="{96DAC541-7B7A-43D3-8B79-37D633B846F1}">
+                <asvg:svgBlip xmlns:asvg="http://schemas.microsoft.com/office/drawing/2016/SVG/main" r:embed="rId4"/>
+              </a:ext>
+            </a:extLst>
+          </a:blip>
+          <a:stretch>
+            <a:fillRect/>
+          </a:stretch>
+        </p:blipFill>
+        <p:spPr>
+          <a:xfrm>
+            <a:off x="8844685" y="2275878"/>
+            <a:ext cx="1335932" cy="1335932"/>
+          </a:xfrm>
+          <a:prstGeom prst="rect">
+            <a:avLst/>
+          </a:prstGeom>
+        </p:spPr>
+      </p:pic>
+      <p:sp>
+        <p:nvSpPr>
+          <p:cNvPr id="3" name="TextBox 2">
+            <a:extLst>
+              <a:ext uri="{FF2B5EF4-FFF2-40B4-BE49-F238E27FC236}">
+                <a16:creationId xmlns:a16="http://schemas.microsoft.com/office/drawing/2014/main" id="{C36B7B89-B5BA-A50C-70D1-B80162FAB1FD}"/>
+              </a:ext>
+            </a:extLst>
+          </p:cNvPr>
+          <p:cNvSpPr txBox="1"/>
+          <p:nvPr/>
+        </p:nvSpPr>
+        <p:spPr>
+          <a:xfrm>
+            <a:off x="7172053" y="3489331"/>
+            <a:ext cx="1255472" cy="523220"/>
+          </a:xfrm>
+          <a:prstGeom prst="rect">
+            <a:avLst/>
+          </a:prstGeom>
+          <a:noFill/>
+        </p:spPr>
+        <p:txBody>
+          <a:bodyPr wrap="none" rtlCol="0">
+            <a:spAutoFit/>
+          </a:bodyPr>
+          <a:lstStyle/>
+          <a:p>
+            <a:r>
+              <a:rPr lang="hu-HU" sz="2800" dirty="0">
+                <a:highlight>
+                  <a:srgbClr val="FF3F5A"/>
+                </a:highlight>
+              </a:rPr>
+              <a:t>gh0o5t</a:t>
+            </a:r>
           </a:p>
         </p:txBody>
       </p:sp>
@@ -6693,8 +11016,8 @@
         </p:nvSpPr>
         <p:spPr>
           <a:xfrm>
-            <a:off x="0" y="5103674"/>
-            <a:ext cx="6096000" cy="1754326"/>
+            <a:off x="0" y="4714876"/>
+            <a:ext cx="6096000" cy="2585323"/>
           </a:xfrm>
           <a:prstGeom prst="rect">
             <a:avLst/>
@@ -6707,20 +11030,30 @@
           </a:bodyPr>
           <a:lstStyle/>
           <a:p>
-            <a:pPr algn="l" fontAlgn="base"/>
-            <a:r>
-              <a:rPr lang="en-US" b="0" i="0" dirty="0">
-                <a:solidFill>
-                  <a:srgbClr val="E4E4E7"/>
-                </a:solidFill>
-                <a:effectLst/>
+            <a:pPr fontAlgn="base"/>
+            <a:r>
+              <a:rPr lang="hu-HU" dirty="0"/>
+              <a:t>Mi, a YANAC alapítói úgy éreztük, hogy hazánkban nem érhető el olyan aggregátor szolgáltatás, amely csak informatikára, IT biztonságra és technológiára koncentrálna. Napról napra azon fáradozunk, hogy megtaláljuk azt az időszerű, megbízható információforrást, amelyet a mindennapi munkánkhoz felhasználhatunk. Ez az ötlet hívta életre a YANAC-ot.</a:t>
+            </a:r>
+          </a:p>
+          <a:p>
+            <a:br>
+              <a:rPr lang="hu-HU" dirty="0">
                 <a:highlight>
                   <a:srgbClr val="121212"/>
                 </a:highlight>
-                <a:latin typeface="inherit"/>
               </a:rPr>
-              <a:t>We, the funders of YANAC felt that within our country there is no aggregator service available what focuses only IT, IT Security and Technology. Day by day we are struggling to find the timely, reliable source of information what we can use for our daily work. This idea brought YANAC live. Hope you will come back to check out the latest news with us!</a:t>
-            </a:r>
+            </a:br>
+            <a:endParaRPr lang="en-US" b="0" i="0" dirty="0">
+              <a:solidFill>
+                <a:srgbClr val="E4E4E7"/>
+              </a:solidFill>
+              <a:effectLst/>
+              <a:highlight>
+                <a:srgbClr val="121212"/>
+              </a:highlight>
+              <a:latin typeface="inherit"/>
+            </a:endParaRPr>
           </a:p>
         </p:txBody>
       </p:sp>
@@ -7629,7 +11962,7 @@
                   <a:srgbClr val="000000"/>
                 </a:highlight>
               </a:rPr>
-              <a:t>3300 POSZT</a:t>
+              <a:t>5538 POSZT</a:t>
             </a:r>
           </a:p>
           <a:p>
@@ -7643,7 +11976,7 @@
                   <a:srgbClr val="000000"/>
                 </a:highlight>
               </a:rPr>
-              <a:t>46 NAP MUNKA</a:t>
+              <a:t>HETI 5 NAP</a:t>
             </a:r>
           </a:p>
           <a:p>
@@ -7724,7 +12057,7 @@
                   <a:srgbClr val="000000"/>
                 </a:highlight>
               </a:rPr>
-              <a:t>500 POSZT</a:t>
+              <a:t>731 POSZT</a:t>
             </a:r>
           </a:p>
           <a:p>
@@ -7738,7 +12071,7 @@
                   <a:srgbClr val="000000"/>
                 </a:highlight>
               </a:rPr>
-              <a:t>10 NAP MUNKA</a:t>
+              <a:t>HETI 1-2 NAP</a:t>
             </a:r>
           </a:p>
           <a:p>
@@ -7833,7 +12166,7 @@
                   <a:srgbClr val="000000"/>
                 </a:highlight>
               </a:rPr>
-              <a:t>70 POSZT</a:t>
+              <a:t>63 POSZT</a:t>
             </a:r>
           </a:p>
           <a:p>
@@ -7847,7 +12180,7 @@
                   <a:srgbClr val="000000"/>
                 </a:highlight>
               </a:rPr>
-              <a:t>1 NAP MUNKA</a:t>
+              <a:t>HAVI 1 NAP</a:t>
             </a:r>
           </a:p>
           <a:p>
@@ -7895,7 +12228,7 @@
         <p:spPr>
           <a:xfrm>
             <a:off x="3389601" y="3791546"/>
-            <a:ext cx="1893467" cy="1200329"/>
+            <a:ext cx="1866217" cy="1477328"/>
           </a:xfrm>
           <a:prstGeom prst="rect">
             <a:avLst/>
@@ -7933,7 +12266,7 @@
                   <a:srgbClr val="000000"/>
                 </a:highlight>
               </a:rPr>
-              <a:t>50 POSZT</a:t>
+              <a:t>941 POSZT</a:t>
             </a:r>
           </a:p>
           <a:p>
@@ -7947,7 +12280,7 @@
                   <a:srgbClr val="000000"/>
                 </a:highlight>
               </a:rPr>
-              <a:t>1 NAP MUNKA</a:t>
+              <a:t>HETI 1-2 NAP</a:t>
             </a:r>
           </a:p>
           <a:p>
@@ -7962,6 +12295,101 @@
                 </a:highlight>
               </a:rPr>
               <a:t>SZERKESZTÉS</a:t>
+            </a:r>
+          </a:p>
+          <a:p>
+            <a:pPr marL="285750" indent="-285750">
+              <a:buFontTx/>
+              <a:buChar char="-"/>
+            </a:pPr>
+            <a:r>
+              <a:rPr lang="hu-HU" dirty="0">
+                <a:highlight>
+                  <a:srgbClr val="000000"/>
+                </a:highlight>
+              </a:rPr>
+              <a:t>STRATÉGIA</a:t>
+            </a:r>
+          </a:p>
+        </p:txBody>
+      </p:sp>
+      <p:sp>
+        <p:nvSpPr>
+          <p:cNvPr id="9" name="TextBox 8">
+            <a:extLst>
+              <a:ext uri="{FF2B5EF4-FFF2-40B4-BE49-F238E27FC236}">
+                <a16:creationId xmlns:a16="http://schemas.microsoft.com/office/drawing/2014/main" id="{392DED48-28E1-F052-027F-F4FEA007D2A7}"/>
+              </a:ext>
+            </a:extLst>
+          </p:cNvPr>
+          <p:cNvSpPr txBox="1"/>
+          <p:nvPr/>
+        </p:nvSpPr>
+        <p:spPr>
+          <a:xfrm>
+            <a:off x="3924530" y="1866125"/>
+            <a:ext cx="1553823" cy="1200329"/>
+          </a:xfrm>
+          <a:prstGeom prst="rect">
+            <a:avLst/>
+          </a:prstGeom>
+          <a:noFill/>
+        </p:spPr>
+        <p:txBody>
+          <a:bodyPr wrap="none" rtlCol="0">
+            <a:spAutoFit/>
+          </a:bodyPr>
+          <a:lstStyle/>
+          <a:p>
+            <a:r>
+              <a:rPr lang="hu-HU" dirty="0">
+                <a:highlight>
+                  <a:srgbClr val="FF3F5A"/>
+                </a:highlight>
+              </a:rPr>
+              <a:t>gh0o5t</a:t>
+            </a:r>
+          </a:p>
+          <a:p>
+            <a:pPr marL="285750" indent="-285750">
+              <a:buFontTx/>
+              <a:buChar char="-"/>
+            </a:pPr>
+            <a:r>
+              <a:rPr lang="hu-HU" dirty="0">
+                <a:highlight>
+                  <a:srgbClr val="000000"/>
+                </a:highlight>
+              </a:rPr>
+              <a:t>BACK-END</a:t>
+            </a:r>
+          </a:p>
+          <a:p>
+            <a:pPr marL="285750" indent="-285750">
+              <a:buFontTx/>
+              <a:buChar char="-"/>
+            </a:pPr>
+            <a:r>
+              <a:rPr lang="hu-HU" dirty="0">
+                <a:highlight>
+                  <a:srgbClr val="000000"/>
+                </a:highlight>
+              </a:rPr>
+              <a:t>OPENCTI</a:t>
+            </a:r>
+          </a:p>
+          <a:p>
+            <a:pPr marL="285750" indent="-285750">
+              <a:buFontTx/>
+              <a:buChar char="-"/>
+            </a:pPr>
+            <a:r>
+              <a:rPr lang="hu-HU" dirty="0">
+                <a:highlight>
+                  <a:srgbClr val="000000"/>
+                </a:highlight>
+              </a:rPr>
+              <a:t>INFRA</a:t>
             </a:r>
           </a:p>
         </p:txBody>
@@ -7980,7 +12408,7 @@
 </file>
 
 <file path=ppt/slides/slide6.xml><?xml version="1.0" encoding="utf-8"?>
-<p:sld xmlns:a="http://schemas.openxmlformats.org/drawingml/2006/main" xmlns:r="http://schemas.openxmlformats.org/officeDocument/2006/relationships" xmlns:p="http://schemas.openxmlformats.org/presentationml/2006/main">
+<p:sld xmlns:a="http://schemas.openxmlformats.org/drawingml/2006/main" xmlns:r="http://schemas.openxmlformats.org/officeDocument/2006/relationships" xmlns:p="http://schemas.openxmlformats.org/presentationml/2006/main" show="0">
   <p:cSld>
     <p:spTree>
       <p:nvGrpSpPr>
@@ -8343,701 +12771,6 @@
           <p:nvPr/>
         </p:nvPicPr>
         <p:blipFill>
-          <a:blip r:embed="rId2">
-            <a:extLst>
-              <a:ext uri="{28A0092B-C50C-407E-A947-70E740481C1C}">
-                <a14:useLocalDpi xmlns:a14="http://schemas.microsoft.com/office/drawing/2010/main" val="0"/>
-              </a:ext>
-            </a:extLst>
-          </a:blip>
-          <a:srcRect/>
-          <a:stretch>
-            <a:fillRect/>
-          </a:stretch>
-        </p:blipFill>
-        <p:spPr bwMode="auto">
-          <a:xfrm>
-            <a:off x="0" y="0"/>
-            <a:ext cx="2143125" cy="2143125"/>
-          </a:xfrm>
-          <a:prstGeom prst="rect">
-            <a:avLst/>
-          </a:prstGeom>
-          <a:noFill/>
-          <a:extLst>
-            <a:ext uri="{909E8E84-426E-40DD-AFC4-6F175D3DCCD1}">
-              <a14:hiddenFill xmlns:a14="http://schemas.microsoft.com/office/drawing/2010/main">
-                <a:solidFill>
-                  <a:srgbClr val="FFFFFF"/>
-                </a:solidFill>
-              </a14:hiddenFill>
-            </a:ext>
-          </a:extLst>
-        </p:spPr>
-      </p:pic>
-      <p:sp>
-        <p:nvSpPr>
-          <p:cNvPr id="6" name="TextBox 5">
-            <a:extLst>
-              <a:ext uri="{FF2B5EF4-FFF2-40B4-BE49-F238E27FC236}">
-                <a16:creationId xmlns:a16="http://schemas.microsoft.com/office/drawing/2014/main" id="{B6FF17A8-2A06-5C7C-FFD6-5D761233B5BC}"/>
-              </a:ext>
-            </a:extLst>
-          </p:cNvPr>
-          <p:cNvSpPr txBox="1"/>
-          <p:nvPr/>
-        </p:nvSpPr>
-        <p:spPr>
-          <a:xfrm>
-            <a:off x="1872998" y="370214"/>
-            <a:ext cx="981807" cy="769441"/>
-          </a:xfrm>
-          <a:prstGeom prst="rect">
-            <a:avLst/>
-          </a:prstGeom>
-          <a:noFill/>
-        </p:spPr>
-        <p:txBody>
-          <a:bodyPr wrap="none" rtlCol="0">
-            <a:spAutoFit/>
-          </a:bodyPr>
-          <a:lstStyle/>
-          <a:p>
-            <a:r>
-              <a:rPr lang="hu-HU" sz="4400" dirty="0">
-                <a:highlight>
-                  <a:srgbClr val="FF3F5A"/>
-                </a:highlight>
-              </a:rPr>
-              <a:t>CTI</a:t>
-            </a:r>
-          </a:p>
-        </p:txBody>
-      </p:sp>
-      <p:graphicFrame>
-        <p:nvGraphicFramePr>
-          <p:cNvPr id="4" name="Chart 3">
-            <a:extLst>
-              <a:ext uri="{FF2B5EF4-FFF2-40B4-BE49-F238E27FC236}">
-                <a16:creationId xmlns:a16="http://schemas.microsoft.com/office/drawing/2014/main" id="{A288ADD4-6E59-E78D-B23E-8174C5A310C5}"/>
-              </a:ext>
-            </a:extLst>
-          </p:cNvPr>
-          <p:cNvGraphicFramePr>
-            <a:graphicFrameLocks/>
-          </p:cNvGraphicFramePr>
-          <p:nvPr>
-            <p:extLst>
-              <p:ext uri="{D42A27DB-BD31-4B8C-83A1-F6EECF244321}">
-                <p14:modId xmlns:p14="http://schemas.microsoft.com/office/powerpoint/2010/main" val="2578483664"/>
-              </p:ext>
-            </p:extLst>
-          </p:nvPr>
-        </p:nvGraphicFramePr>
-        <p:xfrm>
-          <a:off x="289003" y="3550596"/>
-          <a:ext cx="5131604" cy="3088532"/>
-        </p:xfrm>
-        <a:graphic>
-          <a:graphicData uri="http://schemas.openxmlformats.org/drawingml/2006/chart">
-            <c:chart xmlns:c="http://schemas.openxmlformats.org/drawingml/2006/chart" xmlns:r="http://schemas.openxmlformats.org/officeDocument/2006/relationships" r:id="rId3"/>
-          </a:graphicData>
-        </a:graphic>
-      </p:graphicFrame>
-      <p:sp>
-        <p:nvSpPr>
-          <p:cNvPr id="7" name="TextBox 6">
-            <a:extLst>
-              <a:ext uri="{FF2B5EF4-FFF2-40B4-BE49-F238E27FC236}">
-                <a16:creationId xmlns:a16="http://schemas.microsoft.com/office/drawing/2014/main" id="{8FA0CC15-FD6A-EDCB-9EE7-FAED754C4421}"/>
-              </a:ext>
-            </a:extLst>
-          </p:cNvPr>
-          <p:cNvSpPr txBox="1"/>
-          <p:nvPr/>
-        </p:nvSpPr>
-        <p:spPr>
-          <a:xfrm>
-            <a:off x="6964056" y="665797"/>
-            <a:ext cx="4567404" cy="1754326"/>
-          </a:xfrm>
-          <a:prstGeom prst="rect">
-            <a:avLst/>
-          </a:prstGeom>
-          <a:noFill/>
-        </p:spPr>
-        <p:txBody>
-          <a:bodyPr wrap="none" rtlCol="0">
-            <a:spAutoFit/>
-          </a:bodyPr>
-          <a:lstStyle/>
-          <a:p>
-            <a:r>
-              <a:rPr lang="hu-HU" dirty="0">
-                <a:highlight>
-                  <a:srgbClr val="FF3F5A"/>
-                </a:highlight>
-              </a:rPr>
-              <a:t>STATISZTIKA</a:t>
-            </a:r>
-          </a:p>
-          <a:p>
-            <a:pPr marL="285750" indent="-285750">
-              <a:buFontTx/>
-              <a:buChar char="-"/>
-            </a:pPr>
-            <a:r>
-              <a:rPr lang="hu-HU" dirty="0">
-                <a:highlight>
-                  <a:srgbClr val="000000"/>
-                </a:highlight>
-              </a:rPr>
-              <a:t>4000 POSZT</a:t>
-            </a:r>
-          </a:p>
-          <a:p>
-            <a:pPr marL="285750" indent="-285750">
-              <a:buFontTx/>
-              <a:buChar char="-"/>
-            </a:pPr>
-            <a:r>
-              <a:rPr lang="hu-HU" dirty="0">
-                <a:highlight>
-                  <a:srgbClr val="000000"/>
-                </a:highlight>
-              </a:rPr>
-              <a:t>50 VIEW / POSZT</a:t>
-            </a:r>
-          </a:p>
-          <a:p>
-            <a:pPr marL="285750" indent="-285750">
-              <a:buFontTx/>
-              <a:buChar char="-"/>
-            </a:pPr>
-            <a:r>
-              <a:rPr lang="hu-HU" dirty="0">
-                <a:highlight>
-                  <a:srgbClr val="000000"/>
-                </a:highlight>
-              </a:rPr>
-              <a:t>16.000 PAGEVIEW AZ ELMÚLT FÉL ÉVBEN</a:t>
-            </a:r>
-          </a:p>
-          <a:p>
-            <a:pPr marL="285750" indent="-285750">
-              <a:buFontTx/>
-              <a:buChar char="-"/>
-            </a:pPr>
-            <a:endParaRPr lang="hu-HU" dirty="0">
-              <a:highlight>
-                <a:srgbClr val="000000"/>
-              </a:highlight>
-            </a:endParaRPr>
-          </a:p>
-          <a:p>
-            <a:pPr marL="285750" indent="-285750">
-              <a:buFontTx/>
-              <a:buChar char="-"/>
-            </a:pPr>
-            <a:endParaRPr lang="hu-HU" dirty="0">
-              <a:highlight>
-                <a:srgbClr val="000000"/>
-              </a:highlight>
-            </a:endParaRPr>
-          </a:p>
-        </p:txBody>
-      </p:sp>
-      <p:graphicFrame>
-        <p:nvGraphicFramePr>
-          <p:cNvPr id="8" name="Chart 7">
-            <a:extLst>
-              <a:ext uri="{FF2B5EF4-FFF2-40B4-BE49-F238E27FC236}">
-                <a16:creationId xmlns:a16="http://schemas.microsoft.com/office/drawing/2014/main" id="{84CA5CFE-E45B-7CCB-4E41-D3C06F3DD181}"/>
-              </a:ext>
-            </a:extLst>
-          </p:cNvPr>
-          <p:cNvGraphicFramePr>
-            <a:graphicFrameLocks/>
-          </p:cNvGraphicFramePr>
-          <p:nvPr>
-            <p:extLst>
-              <p:ext uri="{D42A27DB-BD31-4B8C-83A1-F6EECF244321}">
-                <p14:modId xmlns:p14="http://schemas.microsoft.com/office/powerpoint/2010/main" val="1492388429"/>
-              </p:ext>
-            </p:extLst>
-          </p:nvPr>
-        </p:nvGraphicFramePr>
-        <p:xfrm>
-          <a:off x="6771395" y="3607941"/>
-          <a:ext cx="5138394" cy="3031187"/>
-        </p:xfrm>
-        <a:graphic>
-          <a:graphicData uri="http://schemas.openxmlformats.org/drawingml/2006/chart">
-            <c:chart xmlns:c="http://schemas.openxmlformats.org/drawingml/2006/chart" xmlns:r="http://schemas.openxmlformats.org/officeDocument/2006/relationships" r:id="rId4"/>
-          </a:graphicData>
-        </a:graphic>
-      </p:graphicFrame>
-    </p:spTree>
-    <p:extLst>
-      <p:ext uri="{BB962C8B-B14F-4D97-AF65-F5344CB8AC3E}">
-        <p14:creationId xmlns:p14="http://schemas.microsoft.com/office/powerpoint/2010/main" val="4255061035"/>
-      </p:ext>
-    </p:extLst>
-  </p:cSld>
-  <p:clrMapOvr>
-    <a:masterClrMapping/>
-  </p:clrMapOvr>
-</p:sld>
-</file>
-
-<file path=ppt/slides/slide8.xml><?xml version="1.0" encoding="utf-8"?>
-<p:sld xmlns:a="http://schemas.openxmlformats.org/drawingml/2006/main" xmlns:r="http://schemas.openxmlformats.org/officeDocument/2006/relationships" xmlns:p="http://schemas.openxmlformats.org/presentationml/2006/main">
-  <p:cSld>
-    <p:spTree>
-      <p:nvGrpSpPr>
-        <p:cNvPr id="1" name=""/>
-        <p:cNvGrpSpPr/>
-        <p:nvPr/>
-      </p:nvGrpSpPr>
-      <p:grpSpPr>
-        <a:xfrm>
-          <a:off x="0" y="0"/>
-          <a:ext cx="0" cy="0"/>
-          <a:chOff x="0" y="0"/>
-          <a:chExt cx="0" cy="0"/>
-        </a:xfrm>
-      </p:grpSpPr>
-      <p:pic>
-        <p:nvPicPr>
-          <p:cNvPr id="5" name="Picture 2">
-            <a:extLst>
-              <a:ext uri="{FF2B5EF4-FFF2-40B4-BE49-F238E27FC236}">
-                <a16:creationId xmlns:a16="http://schemas.microsoft.com/office/drawing/2014/main" id="{D2B6620E-CC54-212B-EBD7-9559AF590806}"/>
-              </a:ext>
-            </a:extLst>
-          </p:cNvPr>
-          <p:cNvPicPr>
-            <a:picLocks noChangeAspect="1" noChangeArrowheads="1"/>
-          </p:cNvPicPr>
-          <p:nvPr/>
-        </p:nvPicPr>
-        <p:blipFill>
-          <a:blip r:embed="rId2">
-            <a:extLst>
-              <a:ext uri="{28A0092B-C50C-407E-A947-70E740481C1C}">
-                <a14:useLocalDpi xmlns:a14="http://schemas.microsoft.com/office/drawing/2010/main" val="0"/>
-              </a:ext>
-            </a:extLst>
-          </a:blip>
-          <a:srcRect/>
-          <a:stretch>
-            <a:fillRect/>
-          </a:stretch>
-        </p:blipFill>
-        <p:spPr bwMode="auto">
-          <a:xfrm>
-            <a:off x="0" y="0"/>
-            <a:ext cx="2143125" cy="2143125"/>
-          </a:xfrm>
-          <a:prstGeom prst="rect">
-            <a:avLst/>
-          </a:prstGeom>
-          <a:noFill/>
-          <a:extLst>
-            <a:ext uri="{909E8E84-426E-40DD-AFC4-6F175D3DCCD1}">
-              <a14:hiddenFill xmlns:a14="http://schemas.microsoft.com/office/drawing/2010/main">
-                <a:solidFill>
-                  <a:srgbClr val="FFFFFF"/>
-                </a:solidFill>
-              </a14:hiddenFill>
-            </a:ext>
-          </a:extLst>
-        </p:spPr>
-      </p:pic>
-      <p:sp>
-        <p:nvSpPr>
-          <p:cNvPr id="6" name="TextBox 5">
-            <a:extLst>
-              <a:ext uri="{FF2B5EF4-FFF2-40B4-BE49-F238E27FC236}">
-                <a16:creationId xmlns:a16="http://schemas.microsoft.com/office/drawing/2014/main" id="{B6FF17A8-2A06-5C7C-FFD6-5D761233B5BC}"/>
-              </a:ext>
-            </a:extLst>
-          </p:cNvPr>
-          <p:cNvSpPr txBox="1"/>
-          <p:nvPr/>
-        </p:nvSpPr>
-        <p:spPr>
-          <a:xfrm>
-            <a:off x="1872998" y="370214"/>
-            <a:ext cx="3394199" cy="769441"/>
-          </a:xfrm>
-          <a:prstGeom prst="rect">
-            <a:avLst/>
-          </a:prstGeom>
-          <a:noFill/>
-        </p:spPr>
-        <p:txBody>
-          <a:bodyPr wrap="none" rtlCol="0">
-            <a:spAutoFit/>
-          </a:bodyPr>
-          <a:lstStyle/>
-          <a:p>
-            <a:r>
-              <a:rPr lang="hu-HU" sz="4400" dirty="0">
-                <a:highlight>
-                  <a:srgbClr val="FF3F5A"/>
-                </a:highlight>
-              </a:rPr>
-              <a:t>Hová, Merre?</a:t>
-            </a:r>
-          </a:p>
-        </p:txBody>
-      </p:sp>
-      <p:sp>
-        <p:nvSpPr>
-          <p:cNvPr id="2" name="TextBox 1">
-            <a:extLst>
-              <a:ext uri="{FF2B5EF4-FFF2-40B4-BE49-F238E27FC236}">
-                <a16:creationId xmlns:a16="http://schemas.microsoft.com/office/drawing/2014/main" id="{30936554-6978-1A5E-B05F-698B6DFBFE38}"/>
-              </a:ext>
-            </a:extLst>
-          </p:cNvPr>
-          <p:cNvSpPr txBox="1"/>
-          <p:nvPr/>
-        </p:nvSpPr>
-        <p:spPr>
-          <a:xfrm>
-            <a:off x="6958517" y="1071562"/>
-            <a:ext cx="3210128" cy="2308324"/>
-          </a:xfrm>
-          <a:prstGeom prst="rect">
-            <a:avLst/>
-          </a:prstGeom>
-          <a:noFill/>
-        </p:spPr>
-        <p:txBody>
-          <a:bodyPr wrap="square" rtlCol="0">
-            <a:spAutoFit/>
-          </a:bodyPr>
-          <a:lstStyle/>
-          <a:p>
-            <a:r>
-              <a:rPr lang="hu-HU" dirty="0">
-                <a:highlight>
-                  <a:srgbClr val="FF3F5A"/>
-                </a:highlight>
-              </a:rPr>
-              <a:t>CTI INTEGRÁCIÓ</a:t>
-            </a:r>
-          </a:p>
-          <a:p>
-            <a:pPr marL="285750" indent="-285750">
-              <a:buFontTx/>
-              <a:buChar char="-"/>
-            </a:pPr>
-            <a:r>
-              <a:rPr lang="hu-HU" dirty="0"/>
-              <a:t>KATEGÓRIÁK ÉS TAG-EK</a:t>
-            </a:r>
-          </a:p>
-          <a:p>
-            <a:pPr marL="285750" indent="-285750">
-              <a:buFontTx/>
-              <a:buChar char="-"/>
-            </a:pPr>
-            <a:r>
-              <a:rPr lang="hu-HU" dirty="0"/>
-              <a:t>TÁMADÓ CSOPORTOK</a:t>
-            </a:r>
-          </a:p>
-          <a:p>
-            <a:pPr marL="285750" indent="-285750">
-              <a:buFontTx/>
-              <a:buChar char="-"/>
-            </a:pPr>
-            <a:r>
-              <a:rPr lang="hu-HU" dirty="0"/>
-              <a:t>TÖRTÉNETEK</a:t>
-            </a:r>
-          </a:p>
-          <a:p>
-            <a:pPr marL="285750" indent="-285750">
-              <a:buFontTx/>
-              <a:buChar char="-"/>
-            </a:pPr>
-            <a:r>
-              <a:rPr lang="hu-HU" dirty="0"/>
-              <a:t>AUTOMATIZÁCIÓ</a:t>
-            </a:r>
-          </a:p>
-          <a:p>
-            <a:pPr marL="285750" indent="-285750">
-              <a:buFontTx/>
-              <a:buChar char="-"/>
-            </a:pPr>
-            <a:r>
-              <a:rPr lang="hu-HU" dirty="0"/>
-              <a:t>MEGLÉVŐ TUDÁS RENDSZEREZÉSE</a:t>
-            </a:r>
-          </a:p>
-          <a:p>
-            <a:pPr marL="285750" indent="-285750">
-              <a:buFontTx/>
-              <a:buChar char="-"/>
-            </a:pPr>
-            <a:endParaRPr lang="hu-HU" dirty="0"/>
-          </a:p>
-        </p:txBody>
-      </p:sp>
-      <p:sp>
-        <p:nvSpPr>
-          <p:cNvPr id="3" name="TextBox 2">
-            <a:extLst>
-              <a:ext uri="{FF2B5EF4-FFF2-40B4-BE49-F238E27FC236}">
-                <a16:creationId xmlns:a16="http://schemas.microsoft.com/office/drawing/2014/main" id="{68CAA59D-5BC6-4AE6-CBDC-3199CD5E4859}"/>
-              </a:ext>
-            </a:extLst>
-          </p:cNvPr>
-          <p:cNvSpPr txBox="1"/>
-          <p:nvPr/>
-        </p:nvSpPr>
-        <p:spPr>
-          <a:xfrm>
-            <a:off x="1071562" y="3762881"/>
-            <a:ext cx="3210128" cy="1754326"/>
-          </a:xfrm>
-          <a:prstGeom prst="rect">
-            <a:avLst/>
-          </a:prstGeom>
-          <a:noFill/>
-        </p:spPr>
-        <p:txBody>
-          <a:bodyPr wrap="square" rtlCol="0">
-            <a:spAutoFit/>
-          </a:bodyPr>
-          <a:lstStyle/>
-          <a:p>
-            <a:r>
-              <a:rPr lang="hu-HU" dirty="0">
-                <a:highlight>
-                  <a:srgbClr val="FF3F5A"/>
-                </a:highlight>
-              </a:rPr>
-              <a:t>SZERKESZTŐK</a:t>
-            </a:r>
-          </a:p>
-          <a:p>
-            <a:pPr marL="285750" indent="-285750">
-              <a:buFontTx/>
-              <a:buChar char="-"/>
-            </a:pPr>
-            <a:r>
-              <a:rPr lang="hu-HU" dirty="0"/>
-              <a:t>TÖBB CIKK</a:t>
-            </a:r>
-          </a:p>
-          <a:p>
-            <a:pPr marL="285750" indent="-285750">
-              <a:buFontTx/>
-              <a:buChar char="-"/>
-            </a:pPr>
-            <a:r>
-              <a:rPr lang="hu-HU" dirty="0"/>
-              <a:t>NAGYOBB TERJEDELEM</a:t>
-            </a:r>
-          </a:p>
-          <a:p>
-            <a:pPr marL="285750" indent="-285750">
-              <a:buFontTx/>
-              <a:buChar char="-"/>
-            </a:pPr>
-            <a:r>
-              <a:rPr lang="hu-HU" dirty="0"/>
-              <a:t>TÖBB ELEMZÉS</a:t>
-            </a:r>
-          </a:p>
-          <a:p>
-            <a:pPr marL="285750" indent="-285750">
-              <a:buFontTx/>
-              <a:buChar char="-"/>
-            </a:pPr>
-            <a:r>
-              <a:rPr lang="hu-HU" dirty="0"/>
-              <a:t>FOLYAMATOS MŰKÖDÉS</a:t>
-            </a:r>
-          </a:p>
-          <a:p>
-            <a:pPr marL="285750" indent="-285750">
-              <a:buFontTx/>
-              <a:buChar char="-"/>
-            </a:pPr>
-            <a:endParaRPr lang="hu-HU" dirty="0"/>
-          </a:p>
-        </p:txBody>
-      </p:sp>
-      <p:sp>
-        <p:nvSpPr>
-          <p:cNvPr id="4" name="TextBox 3">
-            <a:extLst>
-              <a:ext uri="{FF2B5EF4-FFF2-40B4-BE49-F238E27FC236}">
-                <a16:creationId xmlns:a16="http://schemas.microsoft.com/office/drawing/2014/main" id="{702EECAA-27BA-E85F-CEE7-5500C7FFC967}"/>
-              </a:ext>
-            </a:extLst>
-          </p:cNvPr>
-          <p:cNvSpPr txBox="1"/>
-          <p:nvPr/>
-        </p:nvSpPr>
-        <p:spPr>
-          <a:xfrm>
-            <a:off x="6958517" y="3762881"/>
-            <a:ext cx="3210128" cy="923330"/>
-          </a:xfrm>
-          <a:prstGeom prst="rect">
-            <a:avLst/>
-          </a:prstGeom>
-          <a:noFill/>
-        </p:spPr>
-        <p:txBody>
-          <a:bodyPr wrap="square" rtlCol="0">
-            <a:spAutoFit/>
-          </a:bodyPr>
-          <a:lstStyle/>
-          <a:p>
-            <a:r>
-              <a:rPr lang="hu-HU" dirty="0">
-                <a:highlight>
-                  <a:srgbClr val="FF3F5A"/>
-                </a:highlight>
-              </a:rPr>
-              <a:t>KÖZÖSSÉG</a:t>
-            </a:r>
-          </a:p>
-          <a:p>
-            <a:pPr marL="285750" indent="-285750">
-              <a:buFontTx/>
-              <a:buChar char="-"/>
-            </a:pPr>
-            <a:r>
-              <a:rPr lang="hu-HU" dirty="0"/>
-              <a:t>FORRÁSOK</a:t>
-            </a:r>
-          </a:p>
-          <a:p>
-            <a:pPr marL="285750" indent="-285750">
-              <a:buFontTx/>
-              <a:buChar char="-"/>
-            </a:pPr>
-            <a:r>
-              <a:rPr lang="hu-HU" dirty="0"/>
-              <a:t>HÍRLEVÉL</a:t>
-            </a:r>
-          </a:p>
-        </p:txBody>
-      </p:sp>
-      <p:sp>
-        <p:nvSpPr>
-          <p:cNvPr id="7" name="TextBox 6">
-            <a:extLst>
-              <a:ext uri="{FF2B5EF4-FFF2-40B4-BE49-F238E27FC236}">
-                <a16:creationId xmlns:a16="http://schemas.microsoft.com/office/drawing/2014/main" id="{DBB59728-5938-F5E9-441A-696191C80EC6}"/>
-              </a:ext>
-            </a:extLst>
-          </p:cNvPr>
-          <p:cNvSpPr txBox="1"/>
-          <p:nvPr/>
-        </p:nvSpPr>
-        <p:spPr>
-          <a:xfrm>
-            <a:off x="6958517" y="5324773"/>
-            <a:ext cx="3210128" cy="923330"/>
-          </a:xfrm>
-          <a:prstGeom prst="rect">
-            <a:avLst/>
-          </a:prstGeom>
-          <a:noFill/>
-        </p:spPr>
-        <p:txBody>
-          <a:bodyPr wrap="square" rtlCol="0">
-            <a:spAutoFit/>
-          </a:bodyPr>
-          <a:lstStyle/>
-          <a:p>
-            <a:r>
-              <a:rPr lang="hu-HU" dirty="0">
-                <a:highlight>
-                  <a:srgbClr val="FF3F5A"/>
-                </a:highlight>
-              </a:rPr>
-              <a:t>TÁMOGATÁS?</a:t>
-            </a:r>
-          </a:p>
-          <a:p>
-            <a:pPr marL="285750" indent="-285750">
-              <a:buFontTx/>
-              <a:buChar char="-"/>
-            </a:pPr>
-            <a:r>
-              <a:rPr lang="hu-HU" dirty="0"/>
-              <a:t>BUY ME A COFFEE</a:t>
-            </a:r>
-          </a:p>
-          <a:p>
-            <a:pPr marL="285750" indent="-285750">
-              <a:buFontTx/>
-              <a:buChar char="-"/>
-            </a:pPr>
-            <a:r>
-              <a:rPr lang="hu-HU" dirty="0"/>
-              <a:t>PATREON</a:t>
-            </a:r>
-          </a:p>
-        </p:txBody>
-      </p:sp>
-    </p:spTree>
-    <p:extLst>
-      <p:ext uri="{BB962C8B-B14F-4D97-AF65-F5344CB8AC3E}">
-        <p14:creationId xmlns:p14="http://schemas.microsoft.com/office/powerpoint/2010/main" val="3416589016"/>
-      </p:ext>
-    </p:extLst>
-  </p:cSld>
-  <p:clrMapOvr>
-    <a:masterClrMapping/>
-  </p:clrMapOvr>
-</p:sld>
-</file>
-
-<file path=ppt/slides/slide9.xml><?xml version="1.0" encoding="utf-8"?>
-<p:sld xmlns:a="http://schemas.openxmlformats.org/drawingml/2006/main" xmlns:r="http://schemas.openxmlformats.org/officeDocument/2006/relationships" xmlns:p="http://schemas.openxmlformats.org/presentationml/2006/main">
-  <p:cSld>
-    <p:spTree>
-      <p:nvGrpSpPr>
-        <p:cNvPr id="1" name=""/>
-        <p:cNvGrpSpPr/>
-        <p:nvPr/>
-      </p:nvGrpSpPr>
-      <p:grpSpPr>
-        <a:xfrm>
-          <a:off x="0" y="0"/>
-          <a:ext cx="0" cy="0"/>
-          <a:chOff x="0" y="0"/>
-          <a:chExt cx="0" cy="0"/>
-        </a:xfrm>
-      </p:grpSpPr>
-      <p:pic>
-        <p:nvPicPr>
-          <p:cNvPr id="5" name="Picture 2">
-            <a:extLst>
-              <a:ext uri="{FF2B5EF4-FFF2-40B4-BE49-F238E27FC236}">
-                <a16:creationId xmlns:a16="http://schemas.microsoft.com/office/drawing/2014/main" id="{D2B6620E-CC54-212B-EBD7-9559AF590806}"/>
-              </a:ext>
-            </a:extLst>
-          </p:cNvPr>
-          <p:cNvPicPr>
-            <a:picLocks noChangeAspect="1" noChangeArrowheads="1"/>
-          </p:cNvPicPr>
-          <p:nvPr/>
-        </p:nvPicPr>
-        <p:blipFill>
           <a:blip r:embed="rId3">
             <a:extLst>
               <a:ext uri="{28A0092B-C50C-407E-A947-70E740481C1C}">
@@ -9085,7 +12818,7 @@
         <p:spPr>
           <a:xfrm>
             <a:off x="1872998" y="370214"/>
-            <a:ext cx="6661695" cy="769441"/>
+            <a:ext cx="1948419" cy="769441"/>
           </a:xfrm>
           <a:prstGeom prst="rect">
             <a:avLst/>
@@ -9104,17 +12837,25 @@
                   <a:srgbClr val="FF3F5A"/>
                 </a:highlight>
               </a:rPr>
-              <a:t>KÖSZÖNÖM A FIGYELMET!</a:t>
+              <a:t>CTI </a:t>
+            </a:r>
+            <a:r>
+              <a:rPr lang="hu-HU" sz="1100" dirty="0">
+                <a:highlight>
+                  <a:srgbClr val="FF3F5A"/>
+                </a:highlight>
+              </a:rPr>
+              <a:t>(na jó, nem is)</a:t>
             </a:r>
           </a:p>
         </p:txBody>
       </p:sp>
       <p:sp>
         <p:nvSpPr>
-          <p:cNvPr id="8" name="TextBox 7">
+          <p:cNvPr id="7" name="TextBox 6">
             <a:extLst>
               <a:ext uri="{FF2B5EF4-FFF2-40B4-BE49-F238E27FC236}">
-                <a16:creationId xmlns:a16="http://schemas.microsoft.com/office/drawing/2014/main" id="{9D7F81C3-05BB-B52A-1E42-41589BD6B5AB}"/>
+                <a16:creationId xmlns:a16="http://schemas.microsoft.com/office/drawing/2014/main" id="{8FA0CC15-FD6A-EDCB-9EE7-FAED754C4421}"/>
               </a:ext>
             </a:extLst>
           </p:cNvPr>
@@ -9123,8 +12864,8 @@
         </p:nvSpPr>
         <p:spPr>
           <a:xfrm>
-            <a:off x="7591312" y="5824331"/>
-            <a:ext cx="4411336" cy="769441"/>
+            <a:off x="1812455" y="1265962"/>
+            <a:ext cx="4278864" cy="1200329"/>
           </a:xfrm>
           <a:prstGeom prst="rect">
             <a:avLst/>
@@ -9138,22 +12879,305 @@
           <a:lstStyle/>
           <a:p>
             <a:r>
+              <a:rPr lang="hu-HU" dirty="0">
+                <a:highlight>
+                  <a:srgbClr val="FF3F5A"/>
+                </a:highlight>
+              </a:rPr>
+              <a:t>STATISZTIKA</a:t>
+            </a:r>
+          </a:p>
+          <a:p>
+            <a:pPr marL="285750" indent="-285750">
+              <a:buFontTx/>
+              <a:buChar char="-"/>
+            </a:pPr>
+            <a:r>
+              <a:rPr lang="en-GB" dirty="0">
+                <a:highlight>
+                  <a:srgbClr val="000000"/>
+                </a:highlight>
+              </a:rPr>
+              <a:t>7273</a:t>
+            </a:r>
+            <a:r>
+              <a:rPr lang="hu-HU" dirty="0">
+                <a:highlight>
+                  <a:srgbClr val="000000"/>
+                </a:highlight>
+              </a:rPr>
+              <a:t> MAGYAR NYELVŰ POSZT</a:t>
+            </a:r>
+          </a:p>
+          <a:p>
+            <a:pPr marL="285750" indent="-285750">
+              <a:buFontTx/>
+              <a:buChar char="-"/>
+            </a:pPr>
+            <a:r>
+              <a:rPr lang="en-GB" dirty="0">
+                <a:highlight>
+                  <a:srgbClr val="000000"/>
+                </a:highlight>
+              </a:rPr>
+              <a:t>169</a:t>
+            </a:r>
+            <a:r>
+              <a:rPr lang="hu-HU" dirty="0">
+                <a:highlight>
+                  <a:srgbClr val="000000"/>
+                </a:highlight>
+              </a:rPr>
+              <a:t>.</a:t>
+            </a:r>
+            <a:r>
+              <a:rPr lang="en-GB" dirty="0">
+                <a:highlight>
+                  <a:srgbClr val="000000"/>
+                </a:highlight>
+              </a:rPr>
+              <a:t>075</a:t>
+            </a:r>
+            <a:r>
+              <a:rPr lang="hu-HU" dirty="0">
+                <a:highlight>
+                  <a:srgbClr val="000000"/>
+                </a:highlight>
+              </a:rPr>
+              <a:t> PAGEVIEW AZ ELMÚLT ÉVBEN</a:t>
+            </a:r>
+          </a:p>
+          <a:p>
+            <a:pPr marL="285750" indent="-285750">
+              <a:buFontTx/>
+              <a:buChar char="-"/>
+            </a:pPr>
+            <a:endParaRPr lang="hu-HU" dirty="0">
+              <a:highlight>
+                <a:srgbClr val="000000"/>
+              </a:highlight>
+            </a:endParaRPr>
+          </a:p>
+        </p:txBody>
+      </p:sp>
+      <p:graphicFrame>
+        <p:nvGraphicFramePr>
+          <p:cNvPr id="3" name="Chart 2">
+            <a:extLst>
+              <a:ext uri="{FF2B5EF4-FFF2-40B4-BE49-F238E27FC236}">
+                <a16:creationId xmlns:a16="http://schemas.microsoft.com/office/drawing/2014/main" id="{DABABCEA-6DFE-E17E-13CC-48412F12E4DC}"/>
+              </a:ext>
+            </a:extLst>
+          </p:cNvPr>
+          <p:cNvGraphicFramePr>
+            <a:graphicFrameLocks/>
+          </p:cNvGraphicFramePr>
+          <p:nvPr>
+            <p:extLst>
+              <p:ext uri="{D42A27DB-BD31-4B8C-83A1-F6EECF244321}">
+                <p14:modId xmlns:p14="http://schemas.microsoft.com/office/powerpoint/2010/main" val="2893227684"/>
+              </p:ext>
+            </p:extLst>
+          </p:nvPr>
+        </p:nvGraphicFramePr>
+        <p:xfrm>
+          <a:off x="6194853" y="3550596"/>
+          <a:ext cx="5708143" cy="3307404"/>
+        </p:xfrm>
+        <a:graphic>
+          <a:graphicData uri="http://schemas.openxmlformats.org/drawingml/2006/chart">
+            <c:chart xmlns:c="http://schemas.openxmlformats.org/drawingml/2006/chart" xmlns:r="http://schemas.openxmlformats.org/officeDocument/2006/relationships" r:id="rId4"/>
+          </a:graphicData>
+        </a:graphic>
+      </p:graphicFrame>
+      <p:graphicFrame>
+        <p:nvGraphicFramePr>
+          <p:cNvPr id="9" name="Chart 8">
+            <a:extLst>
+              <a:ext uri="{FF2B5EF4-FFF2-40B4-BE49-F238E27FC236}">
+                <a16:creationId xmlns:a16="http://schemas.microsoft.com/office/drawing/2014/main" id="{9E67A5D9-24FD-03E7-1A97-AD3B0D3397DC}"/>
+              </a:ext>
+            </a:extLst>
+          </p:cNvPr>
+          <p:cNvGraphicFramePr>
+            <a:graphicFrameLocks/>
+          </p:cNvGraphicFramePr>
+          <p:nvPr>
+            <p:extLst>
+              <p:ext uri="{D42A27DB-BD31-4B8C-83A1-F6EECF244321}">
+                <p14:modId xmlns:p14="http://schemas.microsoft.com/office/powerpoint/2010/main" val="3243771908"/>
+              </p:ext>
+            </p:extLst>
+          </p:nvPr>
+        </p:nvGraphicFramePr>
+        <p:xfrm>
+          <a:off x="6371287" y="0"/>
+          <a:ext cx="5531709" cy="3305431"/>
+        </p:xfrm>
+        <a:graphic>
+          <a:graphicData uri="http://schemas.openxmlformats.org/drawingml/2006/chart">
+            <c:chart xmlns:c="http://schemas.openxmlformats.org/drawingml/2006/chart" xmlns:r="http://schemas.openxmlformats.org/officeDocument/2006/relationships" r:id="rId5"/>
+          </a:graphicData>
+        </a:graphic>
+      </p:graphicFrame>
+      <p:graphicFrame>
+        <p:nvGraphicFramePr>
+          <p:cNvPr id="10" name="Chart 9">
+            <a:extLst>
+              <a:ext uri="{FF2B5EF4-FFF2-40B4-BE49-F238E27FC236}">
+                <a16:creationId xmlns:a16="http://schemas.microsoft.com/office/drawing/2014/main" id="{0418ED0E-571D-8209-5A04-7BC4CE207BFF}"/>
+              </a:ext>
+            </a:extLst>
+          </p:cNvPr>
+          <p:cNvGraphicFramePr>
+            <a:graphicFrameLocks/>
+          </p:cNvGraphicFramePr>
+          <p:nvPr>
+            <p:extLst>
+              <p:ext uri="{D42A27DB-BD31-4B8C-83A1-F6EECF244321}">
+                <p14:modId xmlns:p14="http://schemas.microsoft.com/office/powerpoint/2010/main" val="2605586785"/>
+              </p:ext>
+            </p:extLst>
+          </p:nvPr>
+        </p:nvGraphicFramePr>
+        <p:xfrm>
+          <a:off x="153078" y="2430677"/>
+          <a:ext cx="5844069" cy="4340825"/>
+        </p:xfrm>
+        <a:graphic>
+          <a:graphicData uri="http://schemas.openxmlformats.org/drawingml/2006/chart">
+            <c:chart xmlns:c="http://schemas.openxmlformats.org/drawingml/2006/chart" xmlns:r="http://schemas.openxmlformats.org/officeDocument/2006/relationships" r:id="rId6"/>
+          </a:graphicData>
+        </a:graphic>
+      </p:graphicFrame>
+    </p:spTree>
+    <p:extLst>
+      <p:ext uri="{BB962C8B-B14F-4D97-AF65-F5344CB8AC3E}">
+        <p14:creationId xmlns:p14="http://schemas.microsoft.com/office/powerpoint/2010/main" val="4255061035"/>
+      </p:ext>
+    </p:extLst>
+  </p:cSld>
+  <p:clrMapOvr>
+    <a:masterClrMapping/>
+  </p:clrMapOvr>
+</p:sld>
+</file>
+
+<file path=ppt/slides/slide8.xml><?xml version="1.0" encoding="utf-8"?>
+<p:sld xmlns:a="http://schemas.openxmlformats.org/drawingml/2006/main" xmlns:r="http://schemas.openxmlformats.org/officeDocument/2006/relationships" xmlns:p="http://schemas.openxmlformats.org/presentationml/2006/main">
+  <p:cSld>
+    <p:spTree>
+      <p:nvGrpSpPr>
+        <p:cNvPr id="1" name="">
+          <a:extLst>
+            <a:ext uri="{FF2B5EF4-FFF2-40B4-BE49-F238E27FC236}">
+              <a16:creationId xmlns:a16="http://schemas.microsoft.com/office/drawing/2014/main" id="{17A9FCD1-FE91-F93E-2920-4A7400B11BA2}"/>
+            </a:ext>
+          </a:extLst>
+        </p:cNvPr>
+        <p:cNvGrpSpPr/>
+        <p:nvPr/>
+      </p:nvGrpSpPr>
+      <p:grpSpPr>
+        <a:xfrm>
+          <a:off x="0" y="0"/>
+          <a:ext cx="0" cy="0"/>
+          <a:chOff x="0" y="0"/>
+          <a:chExt cx="0" cy="0"/>
+        </a:xfrm>
+      </p:grpSpPr>
+      <p:pic>
+        <p:nvPicPr>
+          <p:cNvPr id="5" name="Picture 2">
+            <a:extLst>
+              <a:ext uri="{FF2B5EF4-FFF2-40B4-BE49-F238E27FC236}">
+                <a16:creationId xmlns:a16="http://schemas.microsoft.com/office/drawing/2014/main" id="{818C1728-D9B2-E566-147E-AA5FF50911AE}"/>
+              </a:ext>
+            </a:extLst>
+          </p:cNvPr>
+          <p:cNvPicPr>
+            <a:picLocks noChangeAspect="1" noChangeArrowheads="1"/>
+          </p:cNvPicPr>
+          <p:nvPr/>
+        </p:nvPicPr>
+        <p:blipFill>
+          <a:blip r:embed="rId3">
+            <a:extLst>
+              <a:ext uri="{28A0092B-C50C-407E-A947-70E740481C1C}">
+                <a14:useLocalDpi xmlns:a14="http://schemas.microsoft.com/office/drawing/2010/main" val="0"/>
+              </a:ext>
+            </a:extLst>
+          </a:blip>
+          <a:srcRect/>
+          <a:stretch>
+            <a:fillRect/>
+          </a:stretch>
+        </p:blipFill>
+        <p:spPr bwMode="auto">
+          <a:xfrm>
+            <a:off x="0" y="0"/>
+            <a:ext cx="2143125" cy="2143125"/>
+          </a:xfrm>
+          <a:prstGeom prst="rect">
+            <a:avLst/>
+          </a:prstGeom>
+          <a:noFill/>
+          <a:extLst>
+            <a:ext uri="{909E8E84-426E-40DD-AFC4-6F175D3DCCD1}">
+              <a14:hiddenFill xmlns:a14="http://schemas.microsoft.com/office/drawing/2010/main">
+                <a:solidFill>
+                  <a:srgbClr val="FFFFFF"/>
+                </a:solidFill>
+              </a14:hiddenFill>
+            </a:ext>
+          </a:extLst>
+        </p:spPr>
+      </p:pic>
+      <p:sp>
+        <p:nvSpPr>
+          <p:cNvPr id="6" name="TextBox 5">
+            <a:extLst>
+              <a:ext uri="{FF2B5EF4-FFF2-40B4-BE49-F238E27FC236}">
+                <a16:creationId xmlns:a16="http://schemas.microsoft.com/office/drawing/2014/main" id="{9BC98695-B047-E740-7A7E-8A63C800F618}"/>
+              </a:ext>
+            </a:extLst>
+          </p:cNvPr>
+          <p:cNvSpPr txBox="1"/>
+          <p:nvPr/>
+        </p:nvSpPr>
+        <p:spPr>
+          <a:xfrm>
+            <a:off x="1872998" y="370214"/>
+            <a:ext cx="4232954" cy="769441"/>
+          </a:xfrm>
+          <a:prstGeom prst="rect">
+            <a:avLst/>
+          </a:prstGeom>
+          <a:noFill/>
+        </p:spPr>
+        <p:txBody>
+          <a:bodyPr wrap="none" rtlCol="0">
+            <a:spAutoFit/>
+          </a:bodyPr>
+          <a:lstStyle/>
+          <a:p>
+            <a:r>
               <a:rPr lang="hu-HU" sz="4400" dirty="0">
                 <a:highlight>
                   <a:srgbClr val="FF3F5A"/>
                 </a:highlight>
               </a:rPr>
-              <a:t>https://yanac.hu/</a:t>
+              <a:t>CTI INTEGRÁCIÓ</a:t>
             </a:r>
           </a:p>
         </p:txBody>
       </p:sp>
       <p:pic>
         <p:nvPicPr>
-          <p:cNvPr id="2050" name="Picture 2" descr="Photo fire alphabet question mark isolated on black background.">
+          <p:cNvPr id="3074" name="Picture 2" descr="Cyber Threat Intelligence tool endorsed by ANSSI | Interoperable Europe  Portal">
             <a:extLst>
               <a:ext uri="{FF2B5EF4-FFF2-40B4-BE49-F238E27FC236}">
-                <a16:creationId xmlns:a16="http://schemas.microsoft.com/office/drawing/2014/main" id="{C6B5AC52-8001-CCE9-0965-CE61AD77C2DB}"/>
+                <a16:creationId xmlns:a16="http://schemas.microsoft.com/office/drawing/2014/main" id="{BAD343B6-7773-BB1D-DA1D-0422DE1073D6}"/>
               </a:ext>
             </a:extLst>
           </p:cNvPr>
@@ -9177,8 +13201,604 @@
         </p:blipFill>
         <p:spPr bwMode="auto">
           <a:xfrm>
-            <a:off x="4310934" y="1880479"/>
-            <a:ext cx="3570131" cy="3570131"/>
+            <a:off x="3162161" y="2157684"/>
+            <a:ext cx="4338639" cy="1300163"/>
+          </a:xfrm>
+          <a:prstGeom prst="rect">
+            <a:avLst/>
+          </a:prstGeom>
+          <a:noFill/>
+          <a:extLst>
+            <a:ext uri="{909E8E84-426E-40DD-AFC4-6F175D3DCCD1}">
+              <a14:hiddenFill xmlns:a14="http://schemas.microsoft.com/office/drawing/2010/main">
+                <a:solidFill>
+                  <a:srgbClr val="FFFFFF"/>
+                </a:solidFill>
+              </a14:hiddenFill>
+            </a:ext>
+          </a:extLst>
+        </p:spPr>
+      </p:pic>
+      <p:pic>
+        <p:nvPicPr>
+          <p:cNvPr id="2" name="Picture 2">
+            <a:extLst>
+              <a:ext uri="{FF2B5EF4-FFF2-40B4-BE49-F238E27FC236}">
+                <a16:creationId xmlns:a16="http://schemas.microsoft.com/office/drawing/2014/main" id="{9F597549-1C95-E740-AF95-64AAE85F3EAD}"/>
+              </a:ext>
+            </a:extLst>
+          </p:cNvPr>
+          <p:cNvPicPr>
+            <a:picLocks noChangeAspect="1" noChangeArrowheads="1"/>
+          </p:cNvPicPr>
+          <p:nvPr/>
+        </p:nvPicPr>
+        <p:blipFill>
+          <a:blip r:embed="rId3">
+            <a:extLst>
+              <a:ext uri="{28A0092B-C50C-407E-A947-70E740481C1C}">
+                <a14:useLocalDpi xmlns:a14="http://schemas.microsoft.com/office/drawing/2010/main" val="0"/>
+              </a:ext>
+            </a:extLst>
+          </a:blip>
+          <a:srcRect/>
+          <a:stretch>
+            <a:fillRect/>
+          </a:stretch>
+        </p:blipFill>
+        <p:spPr bwMode="auto">
+          <a:xfrm>
+            <a:off x="9099334" y="370214"/>
+            <a:ext cx="893735" cy="893735"/>
+          </a:xfrm>
+          <a:prstGeom prst="rect">
+            <a:avLst/>
+          </a:prstGeom>
+          <a:noFill/>
+          <a:extLst>
+            <a:ext uri="{909E8E84-426E-40DD-AFC4-6F175D3DCCD1}">
+              <a14:hiddenFill xmlns:a14="http://schemas.microsoft.com/office/drawing/2010/main">
+                <a:solidFill>
+                  <a:srgbClr val="FFFFFF"/>
+                </a:solidFill>
+              </a14:hiddenFill>
+            </a:ext>
+          </a:extLst>
+        </p:spPr>
+      </p:pic>
+      <p:sp>
+        <p:nvSpPr>
+          <p:cNvPr id="3" name="TextBox 2">
+            <a:extLst>
+              <a:ext uri="{FF2B5EF4-FFF2-40B4-BE49-F238E27FC236}">
+                <a16:creationId xmlns:a16="http://schemas.microsoft.com/office/drawing/2014/main" id="{DD67B0DC-25C5-EB1C-D48C-981D63DE9E53}"/>
+              </a:ext>
+            </a:extLst>
+          </p:cNvPr>
+          <p:cNvSpPr txBox="1"/>
+          <p:nvPr/>
+        </p:nvSpPr>
+        <p:spPr>
+          <a:xfrm>
+            <a:off x="8872780" y="1773793"/>
+            <a:ext cx="1346844" cy="369332"/>
+          </a:xfrm>
+          <a:prstGeom prst="rect">
+            <a:avLst/>
+          </a:prstGeom>
+          <a:noFill/>
+        </p:spPr>
+        <p:txBody>
+          <a:bodyPr wrap="none" rtlCol="0">
+            <a:spAutoFit/>
+          </a:bodyPr>
+          <a:lstStyle/>
+          <a:p>
+            <a:r>
+              <a:rPr lang="hu-HU" dirty="0">
+                <a:highlight>
+                  <a:srgbClr val="FF3F5A"/>
+                </a:highlight>
+              </a:rPr>
+              <a:t>CÍMKE: IOC</a:t>
+            </a:r>
+            <a:endParaRPr lang="en-GB" dirty="0">
+              <a:highlight>
+                <a:srgbClr val="FF3F5A"/>
+              </a:highlight>
+            </a:endParaRPr>
+          </a:p>
+        </p:txBody>
+      </p:sp>
+      <p:sp>
+        <p:nvSpPr>
+          <p:cNvPr id="9" name="TextBox 8">
+            <a:extLst>
+              <a:ext uri="{FF2B5EF4-FFF2-40B4-BE49-F238E27FC236}">
+                <a16:creationId xmlns:a16="http://schemas.microsoft.com/office/drawing/2014/main" id="{8DC7D38E-55B2-1537-350D-4E9B663208BC}"/>
+              </a:ext>
+            </a:extLst>
+          </p:cNvPr>
+          <p:cNvSpPr txBox="1"/>
+          <p:nvPr/>
+        </p:nvSpPr>
+        <p:spPr>
+          <a:xfrm>
+            <a:off x="8465679" y="2654114"/>
+            <a:ext cx="2161046" cy="369332"/>
+          </a:xfrm>
+          <a:prstGeom prst="rect">
+            <a:avLst/>
+          </a:prstGeom>
+          <a:noFill/>
+        </p:spPr>
+        <p:txBody>
+          <a:bodyPr wrap="square">
+            <a:spAutoFit/>
+          </a:bodyPr>
+          <a:lstStyle/>
+          <a:p>
+            <a:r>
+              <a:rPr lang="hu-HU" dirty="0">
+                <a:highlight>
+                  <a:srgbClr val="000000"/>
+                </a:highlight>
+              </a:rPr>
+              <a:t>OPEN CTI SZERVER</a:t>
+            </a:r>
+          </a:p>
+        </p:txBody>
+      </p:sp>
+      <p:sp>
+        <p:nvSpPr>
+          <p:cNvPr id="10" name="TextBox 9">
+            <a:extLst>
+              <a:ext uri="{FF2B5EF4-FFF2-40B4-BE49-F238E27FC236}">
+                <a16:creationId xmlns:a16="http://schemas.microsoft.com/office/drawing/2014/main" id="{94D80D7D-2644-69C1-551F-C1D33C8E3410}"/>
+              </a:ext>
+            </a:extLst>
+          </p:cNvPr>
+          <p:cNvSpPr txBox="1"/>
+          <p:nvPr/>
+        </p:nvSpPr>
+        <p:spPr>
+          <a:xfrm>
+            <a:off x="8479114" y="3534435"/>
+            <a:ext cx="2134174" cy="369332"/>
+          </a:xfrm>
+          <a:prstGeom prst="rect">
+            <a:avLst/>
+          </a:prstGeom>
+          <a:noFill/>
+        </p:spPr>
+        <p:txBody>
+          <a:bodyPr wrap="none" rtlCol="0">
+            <a:spAutoFit/>
+          </a:bodyPr>
+          <a:lstStyle/>
+          <a:p>
+            <a:r>
+              <a:rPr lang="hu-HU" dirty="0">
+                <a:highlight>
+                  <a:srgbClr val="FF3F5A"/>
+                </a:highlight>
+              </a:rPr>
+              <a:t>IOC FELDOLGOZÁS</a:t>
+            </a:r>
+            <a:endParaRPr lang="en-GB" dirty="0">
+              <a:highlight>
+                <a:srgbClr val="FF3F5A"/>
+              </a:highlight>
+            </a:endParaRPr>
+          </a:p>
+        </p:txBody>
+      </p:sp>
+      <p:sp>
+        <p:nvSpPr>
+          <p:cNvPr id="11" name="TextBox 10">
+            <a:extLst>
+              <a:ext uri="{FF2B5EF4-FFF2-40B4-BE49-F238E27FC236}">
+                <a16:creationId xmlns:a16="http://schemas.microsoft.com/office/drawing/2014/main" id="{D391B140-B7AA-7831-9475-B1925C23E5FF}"/>
+              </a:ext>
+            </a:extLst>
+          </p:cNvPr>
+          <p:cNvSpPr txBox="1"/>
+          <p:nvPr/>
+        </p:nvSpPr>
+        <p:spPr>
+          <a:xfrm>
+            <a:off x="8727623" y="4414756"/>
+            <a:ext cx="1637155" cy="369332"/>
+          </a:xfrm>
+          <a:prstGeom prst="rect">
+            <a:avLst/>
+          </a:prstGeom>
+          <a:noFill/>
+        </p:spPr>
+        <p:txBody>
+          <a:bodyPr wrap="square">
+            <a:spAutoFit/>
+          </a:bodyPr>
+          <a:lstStyle/>
+          <a:p>
+            <a:r>
+              <a:rPr lang="hu-HU" dirty="0">
+                <a:highlight>
+                  <a:srgbClr val="000000"/>
+                </a:highlight>
+              </a:rPr>
+              <a:t>ENRICHMENT</a:t>
+            </a:r>
+          </a:p>
+        </p:txBody>
+      </p:sp>
+      <p:sp>
+        <p:nvSpPr>
+          <p:cNvPr id="12" name="TextBox 11">
+            <a:extLst>
+              <a:ext uri="{FF2B5EF4-FFF2-40B4-BE49-F238E27FC236}">
+                <a16:creationId xmlns:a16="http://schemas.microsoft.com/office/drawing/2014/main" id="{D9279ACC-BFD5-A941-EB08-7701A84BF16E}"/>
+              </a:ext>
+            </a:extLst>
+          </p:cNvPr>
+          <p:cNvSpPr txBox="1"/>
+          <p:nvPr/>
+        </p:nvSpPr>
+        <p:spPr>
+          <a:xfrm>
+            <a:off x="8770186" y="5295077"/>
+            <a:ext cx="1552028" cy="369332"/>
+          </a:xfrm>
+          <a:prstGeom prst="rect">
+            <a:avLst/>
+          </a:prstGeom>
+          <a:noFill/>
+        </p:spPr>
+        <p:txBody>
+          <a:bodyPr wrap="none" rtlCol="0">
+            <a:spAutoFit/>
+          </a:bodyPr>
+          <a:lstStyle/>
+          <a:p>
+            <a:r>
+              <a:rPr lang="hu-HU" dirty="0">
+                <a:highlight>
+                  <a:srgbClr val="FF3F5A"/>
+                </a:highlight>
+              </a:rPr>
+              <a:t>PUBLIKÁCIÓ?</a:t>
+            </a:r>
+            <a:endParaRPr lang="en-GB" dirty="0">
+              <a:highlight>
+                <a:srgbClr val="FF3F5A"/>
+              </a:highlight>
+            </a:endParaRPr>
+          </a:p>
+        </p:txBody>
+      </p:sp>
+      <p:sp>
+        <p:nvSpPr>
+          <p:cNvPr id="13" name="Arrow: Down 12">
+            <a:extLst>
+              <a:ext uri="{FF2B5EF4-FFF2-40B4-BE49-F238E27FC236}">
+                <a16:creationId xmlns:a16="http://schemas.microsoft.com/office/drawing/2014/main" id="{F6C543A2-D56D-0686-4D03-3FE40BCAE22D}"/>
+              </a:ext>
+            </a:extLst>
+          </p:cNvPr>
+          <p:cNvSpPr/>
+          <p:nvPr/>
+        </p:nvSpPr>
+        <p:spPr>
+          <a:xfrm>
+            <a:off x="9364095" y="1263949"/>
+            <a:ext cx="364210" cy="509844"/>
+          </a:xfrm>
+          <a:prstGeom prst="downArrow">
+            <a:avLst/>
+          </a:prstGeom>
+          <a:solidFill>
+            <a:srgbClr val="FF3F5A"/>
+          </a:solidFill>
+        </p:spPr>
+        <p:style>
+          <a:lnRef idx="2">
+            <a:schemeClr val="accent1">
+              <a:shade val="15000"/>
+            </a:schemeClr>
+          </a:lnRef>
+          <a:fillRef idx="1">
+            <a:schemeClr val="accent1"/>
+          </a:fillRef>
+          <a:effectRef idx="0">
+            <a:schemeClr val="accent1"/>
+          </a:effectRef>
+          <a:fontRef idx="minor">
+            <a:schemeClr val="lt1"/>
+          </a:fontRef>
+        </p:style>
+        <p:txBody>
+          <a:bodyPr rtlCol="0" anchor="ctr"/>
+          <a:lstStyle/>
+          <a:p>
+            <a:pPr algn="ctr"/>
+            <a:endParaRPr lang="en-GB" dirty="0"/>
+          </a:p>
+        </p:txBody>
+      </p:sp>
+      <p:sp>
+        <p:nvSpPr>
+          <p:cNvPr id="14" name="Arrow: Down 13">
+            <a:extLst>
+              <a:ext uri="{FF2B5EF4-FFF2-40B4-BE49-F238E27FC236}">
+                <a16:creationId xmlns:a16="http://schemas.microsoft.com/office/drawing/2014/main" id="{E864F388-B9CF-1610-5FE7-ABCA0A61B91D}"/>
+              </a:ext>
+            </a:extLst>
+          </p:cNvPr>
+          <p:cNvSpPr/>
+          <p:nvPr/>
+        </p:nvSpPr>
+        <p:spPr>
+          <a:xfrm>
+            <a:off x="9364095" y="2157684"/>
+            <a:ext cx="364210" cy="509844"/>
+          </a:xfrm>
+          <a:prstGeom prst="downArrow">
+            <a:avLst/>
+          </a:prstGeom>
+          <a:solidFill>
+            <a:srgbClr val="FF3F5A"/>
+          </a:solidFill>
+        </p:spPr>
+        <p:style>
+          <a:lnRef idx="2">
+            <a:schemeClr val="accent1">
+              <a:shade val="15000"/>
+            </a:schemeClr>
+          </a:lnRef>
+          <a:fillRef idx="1">
+            <a:schemeClr val="accent1"/>
+          </a:fillRef>
+          <a:effectRef idx="0">
+            <a:schemeClr val="accent1"/>
+          </a:effectRef>
+          <a:fontRef idx="minor">
+            <a:schemeClr val="lt1"/>
+          </a:fontRef>
+        </p:style>
+        <p:txBody>
+          <a:bodyPr rtlCol="0" anchor="ctr"/>
+          <a:lstStyle/>
+          <a:p>
+            <a:pPr algn="ctr"/>
+            <a:endParaRPr lang="en-GB" dirty="0"/>
+          </a:p>
+        </p:txBody>
+      </p:sp>
+      <p:sp>
+        <p:nvSpPr>
+          <p:cNvPr id="15" name="Arrow: Down 14">
+            <a:extLst>
+              <a:ext uri="{FF2B5EF4-FFF2-40B4-BE49-F238E27FC236}">
+                <a16:creationId xmlns:a16="http://schemas.microsoft.com/office/drawing/2014/main" id="{9A78F701-E075-BB92-4FCA-454B4DD120A7}"/>
+              </a:ext>
+            </a:extLst>
+          </p:cNvPr>
+          <p:cNvSpPr/>
+          <p:nvPr/>
+        </p:nvSpPr>
+        <p:spPr>
+          <a:xfrm>
+            <a:off x="9364095" y="3023446"/>
+            <a:ext cx="364210" cy="509844"/>
+          </a:xfrm>
+          <a:prstGeom prst="downArrow">
+            <a:avLst/>
+          </a:prstGeom>
+          <a:solidFill>
+            <a:srgbClr val="FF3F5A"/>
+          </a:solidFill>
+        </p:spPr>
+        <p:style>
+          <a:lnRef idx="2">
+            <a:schemeClr val="accent1">
+              <a:shade val="15000"/>
+            </a:schemeClr>
+          </a:lnRef>
+          <a:fillRef idx="1">
+            <a:schemeClr val="accent1"/>
+          </a:fillRef>
+          <a:effectRef idx="0">
+            <a:schemeClr val="accent1"/>
+          </a:effectRef>
+          <a:fontRef idx="minor">
+            <a:schemeClr val="lt1"/>
+          </a:fontRef>
+        </p:style>
+        <p:txBody>
+          <a:bodyPr rtlCol="0" anchor="ctr"/>
+          <a:lstStyle/>
+          <a:p>
+            <a:pPr algn="ctr"/>
+            <a:endParaRPr lang="en-GB" dirty="0"/>
+          </a:p>
+        </p:txBody>
+      </p:sp>
+      <p:sp>
+        <p:nvSpPr>
+          <p:cNvPr id="16" name="Arrow: Down 15">
+            <a:extLst>
+              <a:ext uri="{FF2B5EF4-FFF2-40B4-BE49-F238E27FC236}">
+                <a16:creationId xmlns:a16="http://schemas.microsoft.com/office/drawing/2014/main" id="{10A71E41-27E9-2AF0-3FDA-CE4BAD21059D}"/>
+              </a:ext>
+            </a:extLst>
+          </p:cNvPr>
+          <p:cNvSpPr/>
+          <p:nvPr/>
+        </p:nvSpPr>
+        <p:spPr>
+          <a:xfrm>
+            <a:off x="9364095" y="3904912"/>
+            <a:ext cx="364210" cy="509844"/>
+          </a:xfrm>
+          <a:prstGeom prst="downArrow">
+            <a:avLst/>
+          </a:prstGeom>
+          <a:solidFill>
+            <a:srgbClr val="FF3F5A"/>
+          </a:solidFill>
+        </p:spPr>
+        <p:style>
+          <a:lnRef idx="2">
+            <a:schemeClr val="accent1">
+              <a:shade val="15000"/>
+            </a:schemeClr>
+          </a:lnRef>
+          <a:fillRef idx="1">
+            <a:schemeClr val="accent1"/>
+          </a:fillRef>
+          <a:effectRef idx="0">
+            <a:schemeClr val="accent1"/>
+          </a:effectRef>
+          <a:fontRef idx="minor">
+            <a:schemeClr val="lt1"/>
+          </a:fontRef>
+        </p:style>
+        <p:txBody>
+          <a:bodyPr rtlCol="0" anchor="ctr"/>
+          <a:lstStyle/>
+          <a:p>
+            <a:pPr algn="ctr"/>
+            <a:endParaRPr lang="en-GB" dirty="0"/>
+          </a:p>
+        </p:txBody>
+      </p:sp>
+      <p:sp>
+        <p:nvSpPr>
+          <p:cNvPr id="17" name="Arrow: Down 16">
+            <a:extLst>
+              <a:ext uri="{FF2B5EF4-FFF2-40B4-BE49-F238E27FC236}">
+                <a16:creationId xmlns:a16="http://schemas.microsoft.com/office/drawing/2014/main" id="{D1202ADF-5846-49B2-1749-7EB9A5D50F0A}"/>
+              </a:ext>
+            </a:extLst>
+          </p:cNvPr>
+          <p:cNvSpPr/>
+          <p:nvPr/>
+        </p:nvSpPr>
+        <p:spPr>
+          <a:xfrm>
+            <a:off x="9367214" y="4784088"/>
+            <a:ext cx="364210" cy="509844"/>
+          </a:xfrm>
+          <a:prstGeom prst="downArrow">
+            <a:avLst/>
+          </a:prstGeom>
+          <a:solidFill>
+            <a:srgbClr val="FF3F5A"/>
+          </a:solidFill>
+        </p:spPr>
+        <p:style>
+          <a:lnRef idx="2">
+            <a:schemeClr val="accent1">
+              <a:shade val="15000"/>
+            </a:schemeClr>
+          </a:lnRef>
+          <a:fillRef idx="1">
+            <a:schemeClr val="accent1"/>
+          </a:fillRef>
+          <a:effectRef idx="0">
+            <a:schemeClr val="accent1"/>
+          </a:effectRef>
+          <a:fontRef idx="minor">
+            <a:schemeClr val="lt1"/>
+          </a:fontRef>
+        </p:style>
+        <p:txBody>
+          <a:bodyPr rtlCol="0" anchor="ctr"/>
+          <a:lstStyle/>
+          <a:p>
+            <a:pPr algn="ctr"/>
+            <a:endParaRPr lang="en-GB" dirty="0"/>
+          </a:p>
+        </p:txBody>
+      </p:sp>
+      <p:pic>
+        <p:nvPicPr>
+          <p:cNvPr id="3076" name="Picture 4" descr="MineMeld: threat intelligence automation – connect to STIX/TAXII service  [5] – Scubarda">
+            <a:extLst>
+              <a:ext uri="{FF2B5EF4-FFF2-40B4-BE49-F238E27FC236}">
+                <a16:creationId xmlns:a16="http://schemas.microsoft.com/office/drawing/2014/main" id="{3B494797-707C-8502-A89B-1C8C4A697060}"/>
+              </a:ext>
+            </a:extLst>
+          </p:cNvPr>
+          <p:cNvPicPr>
+            <a:picLocks noChangeAspect="1" noChangeArrowheads="1"/>
+          </p:cNvPicPr>
+          <p:nvPr/>
+        </p:nvPicPr>
+        <p:blipFill>
+          <a:blip r:embed="rId5">
+            <a:extLst>
+              <a:ext uri="{28A0092B-C50C-407E-A947-70E740481C1C}">
+                <a14:useLocalDpi xmlns:a14="http://schemas.microsoft.com/office/drawing/2010/main" val="0"/>
+              </a:ext>
+            </a:extLst>
+          </a:blip>
+          <a:srcRect/>
+          <a:stretch>
+            <a:fillRect/>
+          </a:stretch>
+        </p:blipFill>
+        <p:spPr bwMode="auto">
+          <a:xfrm>
+            <a:off x="616403" y="3533290"/>
+            <a:ext cx="2847975" cy="2514600"/>
+          </a:xfrm>
+          <a:prstGeom prst="rect">
+            <a:avLst/>
+          </a:prstGeom>
+          <a:noFill/>
+          <a:extLst>
+            <a:ext uri="{909E8E84-426E-40DD-AFC4-6F175D3DCCD1}">
+              <a14:hiddenFill xmlns:a14="http://schemas.microsoft.com/office/drawing/2010/main">
+                <a:solidFill>
+                  <a:srgbClr val="FFFFFF"/>
+                </a:solidFill>
+              </a14:hiddenFill>
+            </a:ext>
+          </a:extLst>
+        </p:spPr>
+      </p:pic>
+      <p:pic>
+        <p:nvPicPr>
+          <p:cNvPr id="3078" name="Picture 6" descr="YARA Rules in Cyber Threat Intelligence | by Chad Warner | Medium">
+            <a:extLst>
+              <a:ext uri="{FF2B5EF4-FFF2-40B4-BE49-F238E27FC236}">
+                <a16:creationId xmlns:a16="http://schemas.microsoft.com/office/drawing/2014/main" id="{F113945B-2D83-F38C-B900-79FE721912B9}"/>
+              </a:ext>
+            </a:extLst>
+          </p:cNvPr>
+          <p:cNvPicPr>
+            <a:picLocks noChangeAspect="1" noChangeArrowheads="1"/>
+          </p:cNvPicPr>
+          <p:nvPr/>
+        </p:nvPicPr>
+        <p:blipFill>
+          <a:blip r:embed="rId6">
+            <a:extLst>
+              <a:ext uri="{28A0092B-C50C-407E-A947-70E740481C1C}">
+                <a14:useLocalDpi xmlns:a14="http://schemas.microsoft.com/office/drawing/2010/main" val="0"/>
+              </a:ext>
+            </a:extLst>
+          </a:blip>
+          <a:srcRect/>
+          <a:stretch>
+            <a:fillRect/>
+          </a:stretch>
+        </p:blipFill>
+        <p:spPr bwMode="auto">
+          <a:xfrm>
+            <a:off x="4349359" y="4013583"/>
+            <a:ext cx="3224783" cy="1541010"/>
           </a:xfrm>
           <a:prstGeom prst="rect">
             <a:avLst/>
@@ -9198,7 +13818,565 @@
     </p:spTree>
     <p:extLst>
       <p:ext uri="{BB962C8B-B14F-4D97-AF65-F5344CB8AC3E}">
-        <p14:creationId xmlns:p14="http://schemas.microsoft.com/office/powerpoint/2010/main" val="383254803"/>
+        <p14:creationId xmlns:p14="http://schemas.microsoft.com/office/powerpoint/2010/main" val="3614822528"/>
+      </p:ext>
+    </p:extLst>
+  </p:cSld>
+  <p:clrMapOvr>
+    <a:masterClrMapping/>
+  </p:clrMapOvr>
+</p:sld>
+</file>
+
+<file path=ppt/slides/slide9.xml><?xml version="1.0" encoding="utf-8"?>
+<p:sld xmlns:a="http://schemas.openxmlformats.org/drawingml/2006/main" xmlns:r="http://schemas.openxmlformats.org/officeDocument/2006/relationships" xmlns:p="http://schemas.openxmlformats.org/presentationml/2006/main">
+  <p:cSld>
+    <p:spTree>
+      <p:nvGrpSpPr>
+        <p:cNvPr id="1" name="">
+          <a:extLst>
+            <a:ext uri="{FF2B5EF4-FFF2-40B4-BE49-F238E27FC236}">
+              <a16:creationId xmlns:a16="http://schemas.microsoft.com/office/drawing/2014/main" id="{1E7909FF-5356-5D12-7C42-D35D14E6FBB3}"/>
+            </a:ext>
+          </a:extLst>
+        </p:cNvPr>
+        <p:cNvGrpSpPr/>
+        <p:nvPr/>
+      </p:nvGrpSpPr>
+      <p:grpSpPr>
+        <a:xfrm>
+          <a:off x="0" y="0"/>
+          <a:ext cx="0" cy="0"/>
+          <a:chOff x="0" y="0"/>
+          <a:chExt cx="0" cy="0"/>
+        </a:xfrm>
+      </p:grpSpPr>
+      <p:pic>
+        <p:nvPicPr>
+          <p:cNvPr id="5" name="Picture 2">
+            <a:extLst>
+              <a:ext uri="{FF2B5EF4-FFF2-40B4-BE49-F238E27FC236}">
+                <a16:creationId xmlns:a16="http://schemas.microsoft.com/office/drawing/2014/main" id="{CD419ED7-144E-57D7-36BE-2AC32478DA40}"/>
+              </a:ext>
+            </a:extLst>
+          </p:cNvPr>
+          <p:cNvPicPr>
+            <a:picLocks noChangeAspect="1" noChangeArrowheads="1"/>
+          </p:cNvPicPr>
+          <p:nvPr/>
+        </p:nvPicPr>
+        <p:blipFill>
+          <a:blip r:embed="rId3">
+            <a:extLst>
+              <a:ext uri="{28A0092B-C50C-407E-A947-70E740481C1C}">
+                <a14:useLocalDpi xmlns:a14="http://schemas.microsoft.com/office/drawing/2010/main" val="0"/>
+              </a:ext>
+            </a:extLst>
+          </a:blip>
+          <a:srcRect/>
+          <a:stretch>
+            <a:fillRect/>
+          </a:stretch>
+        </p:blipFill>
+        <p:spPr bwMode="auto">
+          <a:xfrm>
+            <a:off x="0" y="0"/>
+            <a:ext cx="2143125" cy="2143125"/>
+          </a:xfrm>
+          <a:prstGeom prst="rect">
+            <a:avLst/>
+          </a:prstGeom>
+          <a:noFill/>
+          <a:extLst>
+            <a:ext uri="{909E8E84-426E-40DD-AFC4-6F175D3DCCD1}">
+              <a14:hiddenFill xmlns:a14="http://schemas.microsoft.com/office/drawing/2010/main">
+                <a:solidFill>
+                  <a:srgbClr val="FFFFFF"/>
+                </a:solidFill>
+              </a14:hiddenFill>
+            </a:ext>
+          </a:extLst>
+        </p:spPr>
+      </p:pic>
+      <p:sp>
+        <p:nvSpPr>
+          <p:cNvPr id="6" name="TextBox 5">
+            <a:extLst>
+              <a:ext uri="{FF2B5EF4-FFF2-40B4-BE49-F238E27FC236}">
+                <a16:creationId xmlns:a16="http://schemas.microsoft.com/office/drawing/2014/main" id="{7E682B91-754D-E6DA-CF33-CBC6BD1801BA}"/>
+              </a:ext>
+            </a:extLst>
+          </p:cNvPr>
+          <p:cNvSpPr txBox="1"/>
+          <p:nvPr/>
+        </p:nvSpPr>
+        <p:spPr>
+          <a:xfrm>
+            <a:off x="1872998" y="370214"/>
+            <a:ext cx="4121834" cy="769441"/>
+          </a:xfrm>
+          <a:prstGeom prst="rect">
+            <a:avLst/>
+          </a:prstGeom>
+          <a:noFill/>
+        </p:spPr>
+        <p:txBody>
+          <a:bodyPr wrap="none" rtlCol="0">
+            <a:spAutoFit/>
+          </a:bodyPr>
+          <a:lstStyle/>
+          <a:p>
+            <a:r>
+              <a:rPr lang="hu-HU" sz="4400" dirty="0">
+                <a:highlight>
+                  <a:srgbClr val="FF3F5A"/>
+                </a:highlight>
+              </a:rPr>
+              <a:t>CTI TÁMOGATÁS</a:t>
+            </a:r>
+          </a:p>
+        </p:txBody>
+      </p:sp>
+      <p:graphicFrame>
+        <p:nvGraphicFramePr>
+          <p:cNvPr id="7" name="Table 6">
+            <a:extLst>
+              <a:ext uri="{FF2B5EF4-FFF2-40B4-BE49-F238E27FC236}">
+                <a16:creationId xmlns:a16="http://schemas.microsoft.com/office/drawing/2014/main" id="{8DB48E84-4F9B-8EA1-D566-68C88835C145}"/>
+              </a:ext>
+            </a:extLst>
+          </p:cNvPr>
+          <p:cNvGraphicFramePr>
+            <a:graphicFrameLocks noGrp="1"/>
+          </p:cNvGraphicFramePr>
+          <p:nvPr>
+            <p:extLst>
+              <p:ext uri="{D42A27DB-BD31-4B8C-83A1-F6EECF244321}">
+                <p14:modId xmlns:p14="http://schemas.microsoft.com/office/powerpoint/2010/main" val="2281015027"/>
+              </p:ext>
+            </p:extLst>
+          </p:nvPr>
+        </p:nvGraphicFramePr>
+        <p:xfrm>
+          <a:off x="1402884" y="1398116"/>
+          <a:ext cx="10699857" cy="2601286"/>
+        </p:xfrm>
+        <a:graphic>
+          <a:graphicData uri="http://schemas.openxmlformats.org/drawingml/2006/table">
+            <a:tbl>
+              <a:tblPr firstRow="1" bandRow="1">
+                <a:tableStyleId>{5C22544A-7EE6-4342-B048-85BDC9FD1C3A}</a:tableStyleId>
+              </a:tblPr>
+              <a:tblGrid>
+                <a:gridCol w="3566619">
+                  <a:extLst>
+                    <a:ext uri="{9D8B030D-6E8A-4147-A177-3AD203B41FA5}">
+                      <a16:colId xmlns:a16="http://schemas.microsoft.com/office/drawing/2014/main" val="2797865709"/>
+                    </a:ext>
+                  </a:extLst>
+                </a:gridCol>
+                <a:gridCol w="1639089">
+                  <a:extLst>
+                    <a:ext uri="{9D8B030D-6E8A-4147-A177-3AD203B41FA5}">
+                      <a16:colId xmlns:a16="http://schemas.microsoft.com/office/drawing/2014/main" val="82696053"/>
+                    </a:ext>
+                  </a:extLst>
+                </a:gridCol>
+                <a:gridCol w="5494149">
+                  <a:extLst>
+                    <a:ext uri="{9D8B030D-6E8A-4147-A177-3AD203B41FA5}">
+                      <a16:colId xmlns:a16="http://schemas.microsoft.com/office/drawing/2014/main" val="3824607963"/>
+                    </a:ext>
+                  </a:extLst>
+                </a:gridCol>
+              </a:tblGrid>
+              <a:tr h="376246">
+                <a:tc>
+                  <a:txBody>
+                    <a:bodyPr/>
+                    <a:lstStyle/>
+                    <a:p>
+                      <a:r>
+                        <a:rPr lang="hu-HU" dirty="0"/>
+                        <a:t>Címke</a:t>
+                      </a:r>
+                      <a:endParaRPr lang="en-GB" dirty="0"/>
+                    </a:p>
+                  </a:txBody>
+                  <a:tcPr>
+                    <a:solidFill>
+                      <a:srgbClr val="FF3F5A"/>
+                    </a:solidFill>
+                  </a:tcPr>
+                </a:tc>
+                <a:tc>
+                  <a:txBody>
+                    <a:bodyPr/>
+                    <a:lstStyle/>
+                    <a:p>
+                      <a:r>
+                        <a:rPr lang="hu-HU" dirty="0"/>
+                        <a:t>Cikkek száma</a:t>
+                      </a:r>
+                      <a:endParaRPr lang="en-GB" dirty="0"/>
+                    </a:p>
+                  </a:txBody>
+                  <a:tcPr>
+                    <a:solidFill>
+                      <a:srgbClr val="FF3F5A"/>
+                    </a:solidFill>
+                  </a:tcPr>
+                </a:tc>
+                <a:tc>
+                  <a:txBody>
+                    <a:bodyPr/>
+                    <a:lstStyle/>
+                    <a:p>
+                      <a:r>
+                        <a:rPr lang="hu-HU" dirty="0"/>
+                        <a:t>URL</a:t>
+                      </a:r>
+                      <a:endParaRPr lang="en-GB" dirty="0"/>
+                    </a:p>
+                  </a:txBody>
+                  <a:tcPr>
+                    <a:solidFill>
+                      <a:srgbClr val="FF3F5A"/>
+                    </a:solidFill>
+                  </a:tcPr>
+                </a:tc>
+                <a:extLst>
+                  <a:ext uri="{0D108BD9-81ED-4DB2-BD59-A6C34878D82A}">
+                    <a16:rowId xmlns:a16="http://schemas.microsoft.com/office/drawing/2014/main" val="1559483732"/>
+                  </a:ext>
+                </a:extLst>
+              </a:tr>
+              <a:tr h="370840">
+                <a:tc>
+                  <a:txBody>
+                    <a:bodyPr/>
+                    <a:lstStyle/>
+                    <a:p>
+                      <a:r>
+                        <a:rPr lang="hu-HU" dirty="0"/>
+                        <a:t>Oroszország</a:t>
+                      </a:r>
+                      <a:endParaRPr lang="en-GB" dirty="0"/>
+                    </a:p>
+                  </a:txBody>
+                  <a:tcPr/>
+                </a:tc>
+                <a:tc>
+                  <a:txBody>
+                    <a:bodyPr/>
+                    <a:lstStyle/>
+                    <a:p>
+                      <a:r>
+                        <a:rPr lang="hu-HU" dirty="0"/>
+                        <a:t>270</a:t>
+                      </a:r>
+                      <a:endParaRPr lang="en-GB" dirty="0"/>
+                    </a:p>
+                  </a:txBody>
+                  <a:tcPr/>
+                </a:tc>
+                <a:tc>
+                  <a:txBody>
+                    <a:bodyPr/>
+                    <a:lstStyle/>
+                    <a:p>
+                      <a:r>
+                        <a:rPr lang="en-GB" dirty="0"/>
+                        <a:t>HTTPS://YANAC.HU/TAG/OROSZORSZAG/</a:t>
+                      </a:r>
+                    </a:p>
+                  </a:txBody>
+                  <a:tcPr/>
+                </a:tc>
+                <a:extLst>
+                  <a:ext uri="{0D108BD9-81ED-4DB2-BD59-A6C34878D82A}">
+                    <a16:rowId xmlns:a16="http://schemas.microsoft.com/office/drawing/2014/main" val="470032902"/>
+                  </a:ext>
+                </a:extLst>
+              </a:tr>
+              <a:tr h="370840">
+                <a:tc>
+                  <a:txBody>
+                    <a:bodyPr/>
+                    <a:lstStyle/>
+                    <a:p>
+                      <a:r>
+                        <a:rPr lang="hu-HU" dirty="0"/>
+                        <a:t>Ukrajna</a:t>
+                      </a:r>
+                      <a:endParaRPr lang="en-GB" dirty="0"/>
+                    </a:p>
+                  </a:txBody>
+                  <a:tcPr/>
+                </a:tc>
+                <a:tc>
+                  <a:txBody>
+                    <a:bodyPr/>
+                    <a:lstStyle/>
+                    <a:p>
+                      <a:r>
+                        <a:rPr lang="hu-HU" dirty="0"/>
+                        <a:t>126</a:t>
+                      </a:r>
+                      <a:endParaRPr lang="en-GB" dirty="0"/>
+                    </a:p>
+                  </a:txBody>
+                  <a:tcPr/>
+                </a:tc>
+                <a:tc>
+                  <a:txBody>
+                    <a:bodyPr/>
+                    <a:lstStyle/>
+                    <a:p>
+                      <a:r>
+                        <a:rPr lang="en-GB" dirty="0"/>
+                        <a:t>HTTPS://YANAC.HU/TAG/UKRAJNA/</a:t>
+                      </a:r>
+                    </a:p>
+                  </a:txBody>
+                  <a:tcPr/>
+                </a:tc>
+                <a:extLst>
+                  <a:ext uri="{0D108BD9-81ED-4DB2-BD59-A6C34878D82A}">
+                    <a16:rowId xmlns:a16="http://schemas.microsoft.com/office/drawing/2014/main" val="1254568493"/>
+                  </a:ext>
+                </a:extLst>
+              </a:tr>
+              <a:tr h="370840">
+                <a:tc>
+                  <a:txBody>
+                    <a:bodyPr/>
+                    <a:lstStyle/>
+                    <a:p>
+                      <a:r>
+                        <a:rPr lang="hu-HU" dirty="0"/>
+                        <a:t>Kína</a:t>
+                      </a:r>
+                      <a:endParaRPr lang="en-GB" dirty="0"/>
+                    </a:p>
+                  </a:txBody>
+                  <a:tcPr/>
+                </a:tc>
+                <a:tc>
+                  <a:txBody>
+                    <a:bodyPr/>
+                    <a:lstStyle/>
+                    <a:p>
+                      <a:r>
+                        <a:rPr lang="hu-HU" dirty="0"/>
+                        <a:t>230</a:t>
+                      </a:r>
+                      <a:endParaRPr lang="en-GB" dirty="0"/>
+                    </a:p>
+                  </a:txBody>
+                  <a:tcPr/>
+                </a:tc>
+                <a:tc>
+                  <a:txBody>
+                    <a:bodyPr/>
+                    <a:lstStyle/>
+                    <a:p>
+                      <a:r>
+                        <a:rPr lang="en-GB" dirty="0"/>
+                        <a:t>HTTPS://YANAC.HU/TAG/KINA/</a:t>
+                      </a:r>
+                    </a:p>
+                  </a:txBody>
+                  <a:tcPr/>
+                </a:tc>
+                <a:extLst>
+                  <a:ext uri="{0D108BD9-81ED-4DB2-BD59-A6C34878D82A}">
+                    <a16:rowId xmlns:a16="http://schemas.microsoft.com/office/drawing/2014/main" val="682614901"/>
+                  </a:ext>
+                </a:extLst>
+              </a:tr>
+              <a:tr h="370840">
+                <a:tc>
+                  <a:txBody>
+                    <a:bodyPr/>
+                    <a:lstStyle/>
+                    <a:p>
+                      <a:r>
+                        <a:rPr lang="hu-HU" dirty="0"/>
+                        <a:t>ENISA</a:t>
+                      </a:r>
+                      <a:endParaRPr lang="en-GB" dirty="0"/>
+                    </a:p>
+                  </a:txBody>
+                  <a:tcPr/>
+                </a:tc>
+                <a:tc>
+                  <a:txBody>
+                    <a:bodyPr/>
+                    <a:lstStyle/>
+                    <a:p>
+                      <a:r>
+                        <a:rPr lang="hu-HU" dirty="0"/>
+                        <a:t>28</a:t>
+                      </a:r>
+                      <a:endParaRPr lang="en-GB" dirty="0"/>
+                    </a:p>
+                  </a:txBody>
+                  <a:tcPr/>
+                </a:tc>
+                <a:tc>
+                  <a:txBody>
+                    <a:bodyPr/>
+                    <a:lstStyle/>
+                    <a:p>
+                      <a:r>
+                        <a:rPr lang="en-GB" dirty="0"/>
+                        <a:t>HTTPS://YANAC.HU/TAG/ENISA/</a:t>
+                      </a:r>
+                    </a:p>
+                  </a:txBody>
+                  <a:tcPr/>
+                </a:tc>
+                <a:extLst>
+                  <a:ext uri="{0D108BD9-81ED-4DB2-BD59-A6C34878D82A}">
+                    <a16:rowId xmlns:a16="http://schemas.microsoft.com/office/drawing/2014/main" val="1860687710"/>
+                  </a:ext>
+                </a:extLst>
+              </a:tr>
+              <a:tr h="370840">
+                <a:tc>
+                  <a:txBody>
+                    <a:bodyPr/>
+                    <a:lstStyle/>
+                    <a:p>
+                      <a:r>
+                        <a:rPr lang="hu-HU" dirty="0"/>
+                        <a:t>CCDCOE</a:t>
+                      </a:r>
+                      <a:endParaRPr lang="en-GB" dirty="0"/>
+                    </a:p>
+                  </a:txBody>
+                  <a:tcPr/>
+                </a:tc>
+                <a:tc>
+                  <a:txBody>
+                    <a:bodyPr/>
+                    <a:lstStyle/>
+                    <a:p>
+                      <a:r>
+                        <a:rPr lang="hu-HU" dirty="0"/>
+                        <a:t>10</a:t>
+                      </a:r>
+                      <a:endParaRPr lang="en-GB" dirty="0"/>
+                    </a:p>
+                  </a:txBody>
+                  <a:tcPr/>
+                </a:tc>
+                <a:tc>
+                  <a:txBody>
+                    <a:bodyPr/>
+                    <a:lstStyle/>
+                    <a:p>
+                      <a:r>
+                        <a:rPr lang="en-GB" dirty="0"/>
+                        <a:t>HTTPS://YANAC.HU/TAG/CCDCOE/</a:t>
+                      </a:r>
+                    </a:p>
+                  </a:txBody>
+                  <a:tcPr/>
+                </a:tc>
+                <a:extLst>
+                  <a:ext uri="{0D108BD9-81ED-4DB2-BD59-A6C34878D82A}">
+                    <a16:rowId xmlns:a16="http://schemas.microsoft.com/office/drawing/2014/main" val="1004630607"/>
+                  </a:ext>
+                </a:extLst>
+              </a:tr>
+              <a:tr h="370840">
+                <a:tc>
+                  <a:txBody>
+                    <a:bodyPr/>
+                    <a:lstStyle/>
+                    <a:p>
+                      <a:r>
+                        <a:rPr lang="hu-HU" dirty="0" err="1"/>
+                        <a:t>Ransomware</a:t>
+                      </a:r>
+                      <a:endParaRPr lang="en-GB" dirty="0"/>
+                    </a:p>
+                  </a:txBody>
+                  <a:tcPr/>
+                </a:tc>
+                <a:tc>
+                  <a:txBody>
+                    <a:bodyPr/>
+                    <a:lstStyle/>
+                    <a:p>
+                      <a:r>
+                        <a:rPr lang="hu-HU" dirty="0"/>
+                        <a:t>177</a:t>
+                      </a:r>
+                      <a:endParaRPr lang="en-GB" dirty="0"/>
+                    </a:p>
+                  </a:txBody>
+                  <a:tcPr/>
+                </a:tc>
+                <a:tc>
+                  <a:txBody>
+                    <a:bodyPr/>
+                    <a:lstStyle/>
+                    <a:p>
+                      <a:r>
+                        <a:rPr lang="en-GB" dirty="0"/>
+                        <a:t>HTTPS://YANAC.HU/TAG/RANSOMWARE/</a:t>
+                      </a:r>
+                    </a:p>
+                  </a:txBody>
+                  <a:tcPr/>
+                </a:tc>
+                <a:extLst>
+                  <a:ext uri="{0D108BD9-81ED-4DB2-BD59-A6C34878D82A}">
+                    <a16:rowId xmlns:a16="http://schemas.microsoft.com/office/drawing/2014/main" val="1961491110"/>
+                  </a:ext>
+                </a:extLst>
+              </a:tr>
+            </a:tbl>
+          </a:graphicData>
+        </a:graphic>
+      </p:graphicFrame>
+      <p:graphicFrame>
+        <p:nvGraphicFramePr>
+          <p:cNvPr id="8" name="Chart 7">
+            <a:extLst>
+              <a:ext uri="{FF2B5EF4-FFF2-40B4-BE49-F238E27FC236}">
+                <a16:creationId xmlns:a16="http://schemas.microsoft.com/office/drawing/2014/main" id="{6FBAF9A6-978E-3424-EB11-17EF3950C2DA}"/>
+              </a:ext>
+            </a:extLst>
+          </p:cNvPr>
+          <p:cNvGraphicFramePr>
+            <a:graphicFrameLocks/>
+          </p:cNvGraphicFramePr>
+          <p:nvPr>
+            <p:extLst>
+              <p:ext uri="{D42A27DB-BD31-4B8C-83A1-F6EECF244321}">
+                <p14:modId xmlns:p14="http://schemas.microsoft.com/office/powerpoint/2010/main" val="181486709"/>
+              </p:ext>
+            </p:extLst>
+          </p:nvPr>
+        </p:nvGraphicFramePr>
+        <p:xfrm>
+          <a:off x="6752813" y="4107180"/>
+          <a:ext cx="4568190" cy="2750820"/>
+        </p:xfrm>
+        <a:graphic>
+          <a:graphicData uri="http://schemas.openxmlformats.org/drawingml/2006/chart">
+            <c:chart xmlns:c="http://schemas.openxmlformats.org/drawingml/2006/chart" xmlns:r="http://schemas.openxmlformats.org/officeDocument/2006/relationships" r:id="rId4"/>
+          </a:graphicData>
+        </a:graphic>
+      </p:graphicFrame>
+    </p:spTree>
+    <p:extLst>
+      <p:ext uri="{BB962C8B-B14F-4D97-AF65-F5344CB8AC3E}">
+        <p14:creationId xmlns:p14="http://schemas.microsoft.com/office/powerpoint/2010/main" val="1226947090"/>
       </p:ext>
     </p:extLst>
   </p:cSld>

--- a/Yanac_NKE.pptx
+++ b/Yanac_NKE.pptx
@@ -5,7 +5,7 @@
     <p:sldMasterId id="2147483708" r:id="rId1"/>
   </p:sldMasterIdLst>
   <p:notesMasterIdLst>
-    <p:notesMasterId r:id="rId15"/>
+    <p:notesMasterId r:id="rId16"/>
   </p:notesMasterIdLst>
   <p:sldIdLst>
     <p:sldId id="256" r:id="rId2"/>
@@ -17,10 +17,11 @@
     <p:sldId id="268" r:id="rId8"/>
     <p:sldId id="273" r:id="rId9"/>
     <p:sldId id="274" r:id="rId10"/>
-    <p:sldId id="271" r:id="rId11"/>
-    <p:sldId id="269" r:id="rId12"/>
-    <p:sldId id="272" r:id="rId13"/>
-    <p:sldId id="270" r:id="rId14"/>
+    <p:sldId id="275" r:id="rId11"/>
+    <p:sldId id="271" r:id="rId12"/>
+    <p:sldId id="269" r:id="rId13"/>
+    <p:sldId id="272" r:id="rId14"/>
+    <p:sldId id="270" r:id="rId15"/>
   </p:sldIdLst>
   <p:sldSz cx="12192000" cy="6858000"/>
   <p:notesSz cx="6858000" cy="9144000"/>
@@ -3618,7 +3619,7 @@
           <a:p>
             <a:fld id="{807AC11F-7089-49B3-92D4-B9D8BF3AAAA9}" type="datetimeFigureOut">
               <a:rPr lang="hu-HU" smtClean="0"/>
-              <a:t>2026. 04. 17.</a:t>
+              <a:t>2026. 04. 18.</a:t>
             </a:fld>
             <a:endParaRPr lang="hu-HU"/>
           </a:p>
@@ -4827,6 +4828,114 @@
   <p:cSld>
     <p:spTree>
       <p:nvGrpSpPr>
+        <p:cNvPr id="1" name="">
+          <a:extLst>
+            <a:ext uri="{FF2B5EF4-FFF2-40B4-BE49-F238E27FC236}">
+              <a16:creationId xmlns:a16="http://schemas.microsoft.com/office/drawing/2014/main" id="{F2CD7B37-7E66-59CC-3EBF-2DD66A76DA72}"/>
+            </a:ext>
+          </a:extLst>
+        </p:cNvPr>
+        <p:cNvGrpSpPr/>
+        <p:nvPr/>
+      </p:nvGrpSpPr>
+      <p:grpSpPr>
+        <a:xfrm>
+          <a:off x="0" y="0"/>
+          <a:ext cx="0" cy="0"/>
+          <a:chOff x="0" y="0"/>
+          <a:chExt cx="0" cy="0"/>
+        </a:xfrm>
+      </p:grpSpPr>
+      <p:sp>
+        <p:nvSpPr>
+          <p:cNvPr id="2" name="Slide Image Placeholder 1">
+            <a:extLst>
+              <a:ext uri="{FF2B5EF4-FFF2-40B4-BE49-F238E27FC236}">
+                <a16:creationId xmlns:a16="http://schemas.microsoft.com/office/drawing/2014/main" id="{69AD53A7-C558-3FBB-72C8-C8A174BA7B6A}"/>
+              </a:ext>
+            </a:extLst>
+          </p:cNvPr>
+          <p:cNvSpPr>
+            <a:spLocks noGrp="1" noRot="1" noChangeAspect="1"/>
+          </p:cNvSpPr>
+          <p:nvPr>
+            <p:ph type="sldImg"/>
+          </p:nvPr>
+        </p:nvSpPr>
+        <p:spPr/>
+      </p:sp>
+      <p:sp>
+        <p:nvSpPr>
+          <p:cNvPr id="3" name="Notes Placeholder 2">
+            <a:extLst>
+              <a:ext uri="{FF2B5EF4-FFF2-40B4-BE49-F238E27FC236}">
+                <a16:creationId xmlns:a16="http://schemas.microsoft.com/office/drawing/2014/main" id="{7D3DB6A2-71CB-5A04-A827-EE2367FFCDD1}"/>
+              </a:ext>
+            </a:extLst>
+          </p:cNvPr>
+          <p:cNvSpPr>
+            <a:spLocks noGrp="1"/>
+          </p:cNvSpPr>
+          <p:nvPr>
+            <p:ph type="body" idx="1"/>
+          </p:nvPr>
+        </p:nvSpPr>
+        <p:spPr/>
+        <p:txBody>
+          <a:bodyPr/>
+          <a:lstStyle/>
+          <a:p>
+            <a:endParaRPr lang="en-GB" dirty="0"/>
+          </a:p>
+        </p:txBody>
+      </p:sp>
+      <p:sp>
+        <p:nvSpPr>
+          <p:cNvPr id="4" name="Slide Number Placeholder 3">
+            <a:extLst>
+              <a:ext uri="{FF2B5EF4-FFF2-40B4-BE49-F238E27FC236}">
+                <a16:creationId xmlns:a16="http://schemas.microsoft.com/office/drawing/2014/main" id="{B63FA32D-9A7A-AE35-3ADC-0193EEB45849}"/>
+              </a:ext>
+            </a:extLst>
+          </p:cNvPr>
+          <p:cNvSpPr>
+            <a:spLocks noGrp="1"/>
+          </p:cNvSpPr>
+          <p:nvPr>
+            <p:ph type="sldNum" sz="quarter" idx="5"/>
+          </p:nvPr>
+        </p:nvSpPr>
+        <p:spPr/>
+        <p:txBody>
+          <a:bodyPr/>
+          <a:lstStyle/>
+          <a:p>
+            <a:fld id="{F74E179E-53CC-44C3-B266-BA8C753902EB}" type="slidenum">
+              <a:rPr lang="hu-HU" smtClean="0"/>
+              <a:t>10</a:t>
+            </a:fld>
+            <a:endParaRPr lang="hu-HU"/>
+          </a:p>
+        </p:txBody>
+      </p:sp>
+    </p:spTree>
+    <p:extLst>
+      <p:ext uri="{BB962C8B-B14F-4D97-AF65-F5344CB8AC3E}">
+        <p14:creationId xmlns:p14="http://schemas.microsoft.com/office/powerpoint/2010/main" val="2487901477"/>
+      </p:ext>
+    </p:extLst>
+  </p:cSld>
+  <p:clrMapOvr>
+    <a:masterClrMapping/>
+  </p:clrMapOvr>
+</p:notes>
+</file>
+
+<file path=ppt/notesSlides/notesSlide9.xml><?xml version="1.0" encoding="utf-8"?>
+<p:notes xmlns:a="http://schemas.openxmlformats.org/drawingml/2006/main" xmlns:r="http://schemas.openxmlformats.org/officeDocument/2006/relationships" xmlns:p="http://schemas.openxmlformats.org/presentationml/2006/main">
+  <p:cSld>
+    <p:spTree>
+      <p:nvGrpSpPr>
         <p:cNvPr id="1" name=""/>
         <p:cNvGrpSpPr/>
         <p:nvPr/>
@@ -4890,7 +4999,7 @@
           <a:p>
             <a:fld id="{F74E179E-53CC-44C3-B266-BA8C753902EB}" type="slidenum">
               <a:rPr lang="hu-HU" smtClean="0"/>
-              <a:t>13</a:t>
+              <a:t>14</a:t>
             </a:fld>
             <a:endParaRPr lang="hu-HU"/>
           </a:p>
@@ -5040,7 +5149,7 @@
           <a:p>
             <a:fld id="{996333FD-3F07-4EEA-99DD-37AEE0CFF0CB}" type="datetimeFigureOut">
               <a:rPr lang="hu-HU" smtClean="0"/>
-              <a:t>2026. 04. 17.</a:t>
+              <a:t>2026. 04. 18.</a:t>
             </a:fld>
             <a:endParaRPr lang="hu-HU"/>
           </a:p>
@@ -5210,7 +5319,7 @@
           <a:p>
             <a:fld id="{996333FD-3F07-4EEA-99DD-37AEE0CFF0CB}" type="datetimeFigureOut">
               <a:rPr lang="hu-HU" smtClean="0"/>
-              <a:t>2026. 04. 17.</a:t>
+              <a:t>2026. 04. 18.</a:t>
             </a:fld>
             <a:endParaRPr lang="hu-HU"/>
           </a:p>
@@ -5390,7 +5499,7 @@
           <a:p>
             <a:fld id="{996333FD-3F07-4EEA-99DD-37AEE0CFF0CB}" type="datetimeFigureOut">
               <a:rPr lang="hu-HU" smtClean="0"/>
-              <a:t>2026. 04. 17.</a:t>
+              <a:t>2026. 04. 18.</a:t>
             </a:fld>
             <a:endParaRPr lang="hu-HU"/>
           </a:p>
@@ -5560,7 +5669,7 @@
           <a:p>
             <a:fld id="{996333FD-3F07-4EEA-99DD-37AEE0CFF0CB}" type="datetimeFigureOut">
               <a:rPr lang="hu-HU" smtClean="0"/>
-              <a:t>2026. 04. 17.</a:t>
+              <a:t>2026. 04. 18.</a:t>
             </a:fld>
             <a:endParaRPr lang="hu-HU"/>
           </a:p>
@@ -5806,7 +5915,7 @@
           <a:p>
             <a:fld id="{996333FD-3F07-4EEA-99DD-37AEE0CFF0CB}" type="datetimeFigureOut">
               <a:rPr lang="hu-HU" smtClean="0"/>
-              <a:t>2026. 04. 17.</a:t>
+              <a:t>2026. 04. 18.</a:t>
             </a:fld>
             <a:endParaRPr lang="hu-HU"/>
           </a:p>
@@ -6038,7 +6147,7 @@
           <a:p>
             <a:fld id="{996333FD-3F07-4EEA-99DD-37AEE0CFF0CB}" type="datetimeFigureOut">
               <a:rPr lang="hu-HU" smtClean="0"/>
-              <a:t>2026. 04. 17.</a:t>
+              <a:t>2026. 04. 18.</a:t>
             </a:fld>
             <a:endParaRPr lang="hu-HU"/>
           </a:p>
@@ -6405,7 +6514,7 @@
           <a:p>
             <a:fld id="{996333FD-3F07-4EEA-99DD-37AEE0CFF0CB}" type="datetimeFigureOut">
               <a:rPr lang="hu-HU" smtClean="0"/>
-              <a:t>2026. 04. 17.</a:t>
+              <a:t>2026. 04. 18.</a:t>
             </a:fld>
             <a:endParaRPr lang="hu-HU"/>
           </a:p>
@@ -6523,7 +6632,7 @@
           <a:p>
             <a:fld id="{996333FD-3F07-4EEA-99DD-37AEE0CFF0CB}" type="datetimeFigureOut">
               <a:rPr lang="hu-HU" smtClean="0"/>
-              <a:t>2026. 04. 17.</a:t>
+              <a:t>2026. 04. 18.</a:t>
             </a:fld>
             <a:endParaRPr lang="hu-HU"/>
           </a:p>
@@ -6618,7 +6727,7 @@
           <a:p>
             <a:fld id="{996333FD-3F07-4EEA-99DD-37AEE0CFF0CB}" type="datetimeFigureOut">
               <a:rPr lang="hu-HU" smtClean="0"/>
-              <a:t>2026. 04. 17.</a:t>
+              <a:t>2026. 04. 18.</a:t>
             </a:fld>
             <a:endParaRPr lang="hu-HU"/>
           </a:p>
@@ -6895,7 +7004,7 @@
           <a:p>
             <a:fld id="{996333FD-3F07-4EEA-99DD-37AEE0CFF0CB}" type="datetimeFigureOut">
               <a:rPr lang="hu-HU" smtClean="0"/>
-              <a:t>2026. 04. 17.</a:t>
+              <a:t>2026. 04. 18.</a:t>
             </a:fld>
             <a:endParaRPr lang="hu-HU"/>
           </a:p>
@@ -7152,7 +7261,7 @@
           <a:p>
             <a:fld id="{996333FD-3F07-4EEA-99DD-37AEE0CFF0CB}" type="datetimeFigureOut">
               <a:rPr lang="hu-HU" smtClean="0"/>
-              <a:t>2026. 04. 17.</a:t>
+              <a:t>2026. 04. 18.</a:t>
             </a:fld>
             <a:endParaRPr lang="hu-HU"/>
           </a:p>
@@ -7365,7 +7474,7 @@
           <a:p>
             <a:fld id="{996333FD-3F07-4EEA-99DD-37AEE0CFF0CB}" type="datetimeFigureOut">
               <a:rPr lang="hu-HU" smtClean="0"/>
-              <a:t>2026. 04. 17.</a:t>
+              <a:t>2026. 04. 18.</a:t>
             </a:fld>
             <a:endParaRPr lang="hu-HU"/>
           </a:p>
@@ -7924,6 +8033,188 @@
         <p:cNvPr id="1" name="">
           <a:extLst>
             <a:ext uri="{FF2B5EF4-FFF2-40B4-BE49-F238E27FC236}">
+              <a16:creationId xmlns:a16="http://schemas.microsoft.com/office/drawing/2014/main" id="{609ACD5F-FAEB-B116-0251-BA8EED04174A}"/>
+            </a:ext>
+          </a:extLst>
+        </p:cNvPr>
+        <p:cNvGrpSpPr/>
+        <p:nvPr/>
+      </p:nvGrpSpPr>
+      <p:grpSpPr>
+        <a:xfrm>
+          <a:off x="0" y="0"/>
+          <a:ext cx="0" cy="0"/>
+          <a:chOff x="0" y="0"/>
+          <a:chExt cx="0" cy="0"/>
+        </a:xfrm>
+      </p:grpSpPr>
+      <p:pic>
+        <p:nvPicPr>
+          <p:cNvPr id="9" name="Picture 8">
+            <a:extLst>
+              <a:ext uri="{FF2B5EF4-FFF2-40B4-BE49-F238E27FC236}">
+                <a16:creationId xmlns:a16="http://schemas.microsoft.com/office/drawing/2014/main" id="{77F5C2F1-3777-6D6D-668A-07E83F1B355D}"/>
+              </a:ext>
+            </a:extLst>
+          </p:cNvPr>
+          <p:cNvPicPr>
+            <a:picLocks noChangeAspect="1"/>
+          </p:cNvPicPr>
+          <p:nvPr/>
+        </p:nvPicPr>
+        <p:blipFill>
+          <a:blip r:embed="rId3"/>
+          <a:stretch>
+            <a:fillRect/>
+          </a:stretch>
+        </p:blipFill>
+        <p:spPr>
+          <a:xfrm>
+            <a:off x="131115" y="3834244"/>
+            <a:ext cx="7055708" cy="2732435"/>
+          </a:xfrm>
+          <a:prstGeom prst="rect">
+            <a:avLst/>
+          </a:prstGeom>
+        </p:spPr>
+      </p:pic>
+      <p:pic>
+        <p:nvPicPr>
+          <p:cNvPr id="5" name="Picture 2">
+            <a:extLst>
+              <a:ext uri="{FF2B5EF4-FFF2-40B4-BE49-F238E27FC236}">
+                <a16:creationId xmlns:a16="http://schemas.microsoft.com/office/drawing/2014/main" id="{9499D710-F91E-7E5F-0560-CEFACFFEF64E}"/>
+              </a:ext>
+            </a:extLst>
+          </p:cNvPr>
+          <p:cNvPicPr>
+            <a:picLocks noChangeAspect="1" noChangeArrowheads="1"/>
+          </p:cNvPicPr>
+          <p:nvPr/>
+        </p:nvPicPr>
+        <p:blipFill>
+          <a:blip r:embed="rId4">
+            <a:extLst>
+              <a:ext uri="{28A0092B-C50C-407E-A947-70E740481C1C}">
+                <a14:useLocalDpi xmlns:a14="http://schemas.microsoft.com/office/drawing/2010/main" val="0"/>
+              </a:ext>
+            </a:extLst>
+          </a:blip>
+          <a:srcRect/>
+          <a:stretch>
+            <a:fillRect/>
+          </a:stretch>
+        </p:blipFill>
+        <p:spPr bwMode="auto">
+          <a:xfrm>
+            <a:off x="0" y="0"/>
+            <a:ext cx="2143125" cy="2143125"/>
+          </a:xfrm>
+          <a:prstGeom prst="rect">
+            <a:avLst/>
+          </a:prstGeom>
+          <a:noFill/>
+          <a:extLst>
+            <a:ext uri="{909E8E84-426E-40DD-AFC4-6F175D3DCCD1}">
+              <a14:hiddenFill xmlns:a14="http://schemas.microsoft.com/office/drawing/2010/main">
+                <a:solidFill>
+                  <a:srgbClr val="FFFFFF"/>
+                </a:solidFill>
+              </a14:hiddenFill>
+            </a:ext>
+          </a:extLst>
+        </p:spPr>
+      </p:pic>
+      <p:sp>
+        <p:nvSpPr>
+          <p:cNvPr id="6" name="TextBox 5">
+            <a:extLst>
+              <a:ext uri="{FF2B5EF4-FFF2-40B4-BE49-F238E27FC236}">
+                <a16:creationId xmlns:a16="http://schemas.microsoft.com/office/drawing/2014/main" id="{15CA5E56-27C9-34FC-D41B-945F6A4C6B4A}"/>
+              </a:ext>
+            </a:extLst>
+          </p:cNvPr>
+          <p:cNvSpPr txBox="1"/>
+          <p:nvPr/>
+        </p:nvSpPr>
+        <p:spPr>
+          <a:xfrm>
+            <a:off x="1872998" y="370214"/>
+            <a:ext cx="4121834" cy="769441"/>
+          </a:xfrm>
+          <a:prstGeom prst="rect">
+            <a:avLst/>
+          </a:prstGeom>
+          <a:noFill/>
+        </p:spPr>
+        <p:txBody>
+          <a:bodyPr wrap="none" rtlCol="0">
+            <a:spAutoFit/>
+          </a:bodyPr>
+          <a:lstStyle/>
+          <a:p>
+            <a:r>
+              <a:rPr lang="hu-HU" sz="4400" dirty="0">
+                <a:highlight>
+                  <a:srgbClr val="FF3F5A"/>
+                </a:highlight>
+              </a:rPr>
+              <a:t>CTI TÁMOGATÁS</a:t>
+            </a:r>
+          </a:p>
+        </p:txBody>
+      </p:sp>
+      <p:pic>
+        <p:nvPicPr>
+          <p:cNvPr id="3" name="Picture 2">
+            <a:extLst>
+              <a:ext uri="{FF2B5EF4-FFF2-40B4-BE49-F238E27FC236}">
+                <a16:creationId xmlns:a16="http://schemas.microsoft.com/office/drawing/2014/main" id="{63C0AA63-B743-910F-D89D-15032D68A603}"/>
+              </a:ext>
+            </a:extLst>
+          </p:cNvPr>
+          <p:cNvPicPr>
+            <a:picLocks noChangeAspect="1"/>
+          </p:cNvPicPr>
+          <p:nvPr/>
+        </p:nvPicPr>
+        <p:blipFill>
+          <a:blip r:embed="rId5"/>
+          <a:stretch>
+            <a:fillRect/>
+          </a:stretch>
+        </p:blipFill>
+        <p:spPr>
+          <a:xfrm>
+            <a:off x="3658969" y="1297458"/>
+            <a:ext cx="8233326" cy="3719385"/>
+          </a:xfrm>
+          <a:prstGeom prst="rect">
+            <a:avLst/>
+          </a:prstGeom>
+        </p:spPr>
+      </p:pic>
+    </p:spTree>
+    <p:extLst>
+      <p:ext uri="{BB962C8B-B14F-4D97-AF65-F5344CB8AC3E}">
+        <p14:creationId xmlns:p14="http://schemas.microsoft.com/office/powerpoint/2010/main" val="1824678559"/>
+      </p:ext>
+    </p:extLst>
+  </p:cSld>
+  <p:clrMapOvr>
+    <a:masterClrMapping/>
+  </p:clrMapOvr>
+</p:sld>
+</file>
+
+<file path=ppt/slides/slide11.xml><?xml version="1.0" encoding="utf-8"?>
+<p:sld xmlns:a="http://schemas.openxmlformats.org/drawingml/2006/main" xmlns:r="http://schemas.openxmlformats.org/officeDocument/2006/relationships" xmlns:p="http://schemas.openxmlformats.org/presentationml/2006/main">
+  <p:cSld>
+    <p:spTree>
+      <p:nvGrpSpPr>
+        <p:cNvPr id="1" name="">
+          <a:extLst>
+            <a:ext uri="{FF2B5EF4-FFF2-40B4-BE49-F238E27FC236}">
               <a16:creationId xmlns:a16="http://schemas.microsoft.com/office/drawing/2014/main" id="{7E8A5C87-374F-9762-4CAC-CBFCCD83032A}"/>
             </a:ext>
           </a:extLst>
@@ -8156,53 +8447,6 @@
           </a:p>
         </p:txBody>
       </p:sp>
-      <p:pic>
-        <p:nvPicPr>
-          <p:cNvPr id="11" name="Picture 2" descr="Photo fire alphabet question mark isolated on black background.">
-            <a:extLst>
-              <a:ext uri="{FF2B5EF4-FFF2-40B4-BE49-F238E27FC236}">
-                <a16:creationId xmlns:a16="http://schemas.microsoft.com/office/drawing/2014/main" id="{924BE81E-51BA-D4E0-6E7D-221AE152726E}"/>
-              </a:ext>
-            </a:extLst>
-          </p:cNvPr>
-          <p:cNvPicPr>
-            <a:picLocks noChangeAspect="1" noChangeArrowheads="1"/>
-          </p:cNvPicPr>
-          <p:nvPr/>
-        </p:nvPicPr>
-        <p:blipFill>
-          <a:blip r:embed="rId5">
-            <a:extLst>
-              <a:ext uri="{28A0092B-C50C-407E-A947-70E740481C1C}">
-                <a14:useLocalDpi xmlns:a14="http://schemas.microsoft.com/office/drawing/2010/main" val="0"/>
-              </a:ext>
-            </a:extLst>
-          </a:blip>
-          <a:srcRect/>
-          <a:stretch>
-            <a:fillRect/>
-          </a:stretch>
-        </p:blipFill>
-        <p:spPr bwMode="auto">
-          <a:xfrm>
-            <a:off x="2355174" y="3068785"/>
-            <a:ext cx="1469160" cy="1469160"/>
-          </a:xfrm>
-          <a:prstGeom prst="rect">
-            <a:avLst/>
-          </a:prstGeom>
-          <a:noFill/>
-          <a:extLst>
-            <a:ext uri="{909E8E84-426E-40DD-AFC4-6F175D3DCCD1}">
-              <a14:hiddenFill xmlns:a14="http://schemas.microsoft.com/office/drawing/2010/main">
-                <a:solidFill>
-                  <a:srgbClr val="FFFFFF"/>
-                </a:solidFill>
-              </a14:hiddenFill>
-            </a:ext>
-          </a:extLst>
-        </p:spPr>
-      </p:pic>
       <p:sp>
         <p:nvSpPr>
           <p:cNvPr id="12" name="TextBox 11">
@@ -8237,7 +8481,7 @@
                   <a:srgbClr val="FF3F5A"/>
                 </a:highlight>
               </a:rPr>
-              <a:t>NÉVTELEN KIBERBIZTONSÁGI CÉG</a:t>
+              <a:t>ALVERAD</a:t>
             </a:r>
           </a:p>
           <a:p>
@@ -8316,7 +8560,7 @@
           <p:nvPr/>
         </p:nvPicPr>
         <p:blipFill>
-          <a:blip r:embed="rId6">
+          <a:blip r:embed="rId5">
             <a:extLst>
               <a:ext uri="{28A0092B-C50C-407E-A947-70E740481C1C}">
                 <a14:useLocalDpi xmlns:a14="http://schemas.microsoft.com/office/drawing/2010/main" val="0"/>
@@ -8415,6 +8659,53 @@
           </a:p>
         </p:txBody>
       </p:sp>
+      <p:pic>
+        <p:nvPicPr>
+          <p:cNvPr id="1026" name="Picture 2" descr="Alverad | Biztonságosabbá tesszük a világot">
+            <a:extLst>
+              <a:ext uri="{FF2B5EF4-FFF2-40B4-BE49-F238E27FC236}">
+                <a16:creationId xmlns:a16="http://schemas.microsoft.com/office/drawing/2014/main" id="{11195CBE-79C1-CDAE-C219-E70942BB955A}"/>
+              </a:ext>
+            </a:extLst>
+          </p:cNvPr>
+          <p:cNvPicPr>
+            <a:picLocks noChangeAspect="1" noChangeArrowheads="1"/>
+          </p:cNvPicPr>
+          <p:nvPr/>
+        </p:nvPicPr>
+        <p:blipFill>
+          <a:blip r:embed="rId6">
+            <a:extLst>
+              <a:ext uri="{28A0092B-C50C-407E-A947-70E740481C1C}">
+                <a14:useLocalDpi xmlns:a14="http://schemas.microsoft.com/office/drawing/2010/main" val="0"/>
+              </a:ext>
+            </a:extLst>
+          </a:blip>
+          <a:srcRect/>
+          <a:stretch>
+            <a:fillRect/>
+          </a:stretch>
+        </p:blipFill>
+        <p:spPr bwMode="auto">
+          <a:xfrm>
+            <a:off x="653075" y="2765888"/>
+            <a:ext cx="4333102" cy="1624913"/>
+          </a:xfrm>
+          <a:prstGeom prst="rect">
+            <a:avLst/>
+          </a:prstGeom>
+          <a:noFill/>
+          <a:extLst>
+            <a:ext uri="{909E8E84-426E-40DD-AFC4-6F175D3DCCD1}">
+              <a14:hiddenFill xmlns:a14="http://schemas.microsoft.com/office/drawing/2010/main">
+                <a:solidFill>
+                  <a:srgbClr val="FFFFFF"/>
+                </a:solidFill>
+              </a14:hiddenFill>
+            </a:ext>
+          </a:extLst>
+        </p:spPr>
+      </p:pic>
     </p:spTree>
     <p:extLst>
       <p:ext uri="{BB962C8B-B14F-4D97-AF65-F5344CB8AC3E}">
@@ -8428,7 +8719,7 @@
 </p:sld>
 </file>
 
-<file path=ppt/slides/slide11.xml><?xml version="1.0" encoding="utf-8"?>
+<file path=ppt/slides/slide12.xml><?xml version="1.0" encoding="utf-8"?>
 <p:sld xmlns:a="http://schemas.openxmlformats.org/drawingml/2006/main" xmlns:r="http://schemas.openxmlformats.org/officeDocument/2006/relationships" xmlns:p="http://schemas.openxmlformats.org/presentationml/2006/main">
   <p:cSld>
     <p:spTree>
@@ -9730,7 +10021,7 @@
 </p:sld>
 </file>
 
-<file path=ppt/slides/slide12.xml><?xml version="1.0" encoding="utf-8"?>
+<file path=ppt/slides/slide13.xml><?xml version="1.0" encoding="utf-8"?>
 <p:sld xmlns:a="http://schemas.openxmlformats.org/drawingml/2006/main" xmlns:r="http://schemas.openxmlformats.org/officeDocument/2006/relationships" xmlns:p="http://schemas.openxmlformats.org/presentationml/2006/main">
   <p:cSld>
     <p:spTree>
@@ -10037,7 +10328,7 @@
 </p:sld>
 </file>
 
-<file path=ppt/slides/slide13.xml><?xml version="1.0" encoding="utf-8"?>
+<file path=ppt/slides/slide14.xml><?xml version="1.0" encoding="utf-8"?>
 <p:sld xmlns:a="http://schemas.openxmlformats.org/drawingml/2006/main" xmlns:r="http://schemas.openxmlformats.org/officeDocument/2006/relationships" xmlns:p="http://schemas.openxmlformats.org/presentationml/2006/main">
   <p:cSld>
     <p:spTree>

--- a/Yanac_NKE.pptx
+++ b/Yanac_NKE.pptx
@@ -8378,7 +8378,7 @@
         <p:spPr>
           <a:xfrm>
             <a:off x="5114591" y="1414900"/>
-            <a:ext cx="5881738" cy="1200329"/>
+            <a:ext cx="5870261" cy="1477328"/>
           </a:xfrm>
           <a:prstGeom prst="rect">
             <a:avLst/>
@@ -8392,13 +8392,33 @@
           <a:lstStyle/>
           <a:p>
             <a:r>
-              <a:rPr lang="hu-HU" dirty="0">
+              <a:rPr lang="hu-HU" dirty="0" err="1">
                 <a:highlight>
                   <a:srgbClr val="FF3F5A"/>
                 </a:highlight>
               </a:rPr>
+              <a:t>SeCONSys</a:t>
+            </a:r>
+            <a:endParaRPr lang="hu-HU" dirty="0">
+              <a:highlight>
+                <a:srgbClr val="FF3F5A"/>
+              </a:highlight>
+            </a:endParaRPr>
+          </a:p>
+          <a:p>
+            <a:pPr marL="285750" indent="-285750">
+              <a:buFontTx/>
+              <a:buChar char="-"/>
+            </a:pPr>
+            <a:r>
+              <a:rPr lang="hu-HU" dirty="0"/>
               <a:t>IPARI ÉS OT RENDSZEREKKEL KAPCSOLATOS HÍREK</a:t>
             </a:r>
+            <a:endParaRPr lang="hu-HU" dirty="0">
+              <a:highlight>
+                <a:srgbClr val="000000"/>
+              </a:highlight>
+            </a:endParaRPr>
           </a:p>
           <a:p>
             <a:pPr marL="285750" indent="-285750">
@@ -8574,7 +8594,7 @@
         </p:blipFill>
         <p:spPr bwMode="auto">
           <a:xfrm>
-            <a:off x="1872998" y="5320763"/>
+            <a:off x="653075" y="4565112"/>
             <a:ext cx="2437750" cy="731325"/>
           </a:xfrm>
           <a:prstGeom prst="rect">
@@ -8606,7 +8626,7 @@
         </p:nvSpPr>
         <p:spPr>
           <a:xfrm>
-            <a:off x="5114591" y="5265643"/>
+            <a:off x="654588" y="5470748"/>
             <a:ext cx="4460003" cy="923330"/>
           </a:xfrm>
           <a:prstGeom prst="rect">
@@ -8706,6 +8726,125 @@
           </a:extLst>
         </p:spPr>
       </p:pic>
+      <p:pic>
+        <p:nvPicPr>
+          <p:cNvPr id="2" name="Picture 2" descr="TechLabify | LinkedIn">
+            <a:extLst>
+              <a:ext uri="{FF2B5EF4-FFF2-40B4-BE49-F238E27FC236}">
+                <a16:creationId xmlns:a16="http://schemas.microsoft.com/office/drawing/2014/main" id="{4AEB61F3-8D45-087C-1214-E8C44FEBE8EC}"/>
+              </a:ext>
+            </a:extLst>
+          </p:cNvPr>
+          <p:cNvPicPr>
+            <a:picLocks noChangeAspect="1" noChangeArrowheads="1"/>
+          </p:cNvPicPr>
+          <p:nvPr/>
+        </p:nvPicPr>
+        <p:blipFill>
+          <a:blip r:embed="rId7">
+            <a:extLst>
+              <a:ext uri="{28A0092B-C50C-407E-A947-70E740481C1C}">
+                <a14:useLocalDpi xmlns:a14="http://schemas.microsoft.com/office/drawing/2010/main" val="0"/>
+              </a:ext>
+            </a:extLst>
+          </a:blip>
+          <a:srcRect/>
+          <a:stretch>
+            <a:fillRect/>
+          </a:stretch>
+        </p:blipFill>
+        <p:spPr bwMode="auto">
+          <a:xfrm>
+            <a:off x="5295239" y="5090606"/>
+            <a:ext cx="1353143" cy="1334991"/>
+          </a:xfrm>
+          <a:prstGeom prst="rect">
+            <a:avLst/>
+          </a:prstGeom>
+          <a:noFill/>
+          <a:extLst>
+            <a:ext uri="{909E8E84-426E-40DD-AFC4-6F175D3DCCD1}">
+              <a14:hiddenFill xmlns:a14="http://schemas.microsoft.com/office/drawing/2010/main">
+                <a:solidFill>
+                  <a:srgbClr val="FFFFFF"/>
+                </a:solidFill>
+              </a14:hiddenFill>
+            </a:ext>
+          </a:extLst>
+        </p:spPr>
+      </p:pic>
+      <p:sp>
+        <p:nvSpPr>
+          <p:cNvPr id="3" name="TextBox 2">
+            <a:extLst>
+              <a:ext uri="{FF2B5EF4-FFF2-40B4-BE49-F238E27FC236}">
+                <a16:creationId xmlns:a16="http://schemas.microsoft.com/office/drawing/2014/main" id="{F172107F-3FD3-2A5B-0744-2E424AE206A7}"/>
+              </a:ext>
+            </a:extLst>
+          </p:cNvPr>
+          <p:cNvSpPr txBox="1"/>
+          <p:nvPr/>
+        </p:nvSpPr>
+        <p:spPr>
+          <a:xfrm>
+            <a:off x="7056463" y="5090606"/>
+            <a:ext cx="2295821" cy="923330"/>
+          </a:xfrm>
+          <a:prstGeom prst="rect">
+            <a:avLst/>
+          </a:prstGeom>
+          <a:noFill/>
+        </p:spPr>
+        <p:txBody>
+          <a:bodyPr wrap="none" rtlCol="0">
+            <a:spAutoFit/>
+          </a:bodyPr>
+          <a:lstStyle/>
+          <a:p>
+            <a:r>
+              <a:rPr lang="hu-HU" dirty="0" err="1">
+                <a:highlight>
+                  <a:srgbClr val="FF3F5A"/>
+                </a:highlight>
+              </a:rPr>
+              <a:t>TechLabify</a:t>
+            </a:r>
+            <a:endParaRPr lang="hu-HU" dirty="0">
+              <a:highlight>
+                <a:srgbClr val="FF3F5A"/>
+              </a:highlight>
+            </a:endParaRPr>
+          </a:p>
+          <a:p>
+            <a:pPr marL="285750" indent="-285750">
+              <a:buFontTx/>
+              <a:buChar char="-"/>
+            </a:pPr>
+            <a:r>
+              <a:rPr lang="hu-HU" dirty="0">
+                <a:highlight>
+                  <a:srgbClr val="000000"/>
+                </a:highlight>
+              </a:rPr>
+              <a:t>INFRASTRUKTÚRA</a:t>
+            </a:r>
+          </a:p>
+          <a:p>
+            <a:pPr marL="285750" indent="-285750">
+              <a:buFontTx/>
+              <a:buChar char="-"/>
+            </a:pPr>
+            <a:r>
+              <a:rPr lang="hu-HU" dirty="0">
+                <a:highlight>
+                  <a:srgbClr val="000000"/>
+                </a:highlight>
+              </a:rPr>
+              <a:t>?OKTATÁS?</a:t>
+            </a:r>
+          </a:p>
+        </p:txBody>
+      </p:sp>
     </p:spTree>
     <p:extLst>
       <p:ext uri="{BB962C8B-B14F-4D97-AF65-F5344CB8AC3E}">
